--- a/slides/slide1-8.pptx
+++ b/slides/slide1-8.pptx
@@ -5,7 +5,7 @@
     <p:sldMasterId id="2147483648" r:id="rId1"/>
   </p:sldMasterIdLst>
   <p:notesMasterIdLst>
-    <p:notesMasterId r:id="rId13"/>
+    <p:notesMasterId r:id="rId16"/>
   </p:notesMasterIdLst>
   <p:sldIdLst>
     <p:sldId id="256" r:id="rId2"/>
@@ -19,6 +19,9 @@
     <p:sldId id="262" r:id="rId10"/>
     <p:sldId id="263" r:id="rId11"/>
     <p:sldId id="264" r:id="rId12"/>
+    <p:sldId id="267" r:id="rId13"/>
+    <p:sldId id="268" r:id="rId14"/>
+    <p:sldId id="269" r:id="rId15"/>
   </p:sldIdLst>
   <p:sldSz cx="12192000" cy="6858000"/>
   <p:notesSz cx="6858000" cy="9144000"/>
@@ -217,7 +220,7 @@
           </a:lstStyle>
           <a:p>
             <a:fld id="{D4505566-D045-2049-9E06-2C2A0C4BC1C2}" type="datetimeFigureOut">
-              <a:t>2026/08/31</a:t>
+              <a:t>2026/09/02</a:t>
             </a:fld>
             <a:endParaRPr lang="en-JP"/>
           </a:p>
@@ -953,6 +956,174 @@
 </p:notes>
 </file>
 
+<file path=ppt/notesSlides/notesSlide6.xml><?xml version="1.0" encoding="utf-8"?>
+<p:notes xmlns:a="http://schemas.openxmlformats.org/drawingml/2006/main" xmlns:r="http://schemas.openxmlformats.org/officeDocument/2006/relationships" xmlns:p="http://schemas.openxmlformats.org/presentationml/2006/main">
+  <p:cSld>
+    <p:spTree>
+      <p:nvGrpSpPr>
+        <p:cNvPr id="1" name=""/>
+        <p:cNvGrpSpPr/>
+        <p:nvPr/>
+      </p:nvGrpSpPr>
+      <p:grpSpPr>
+        <a:xfrm>
+          <a:off x="0" y="0"/>
+          <a:ext cx="0" cy="0"/>
+          <a:chOff x="0" y="0"/>
+          <a:chExt cx="0" cy="0"/>
+        </a:xfrm>
+      </p:grpSpPr>
+      <p:sp>
+        <p:nvSpPr>
+          <p:cNvPr id="2" name="Slide Image Placeholder 1"/>
+          <p:cNvSpPr>
+            <a:spLocks noGrp="1" noRot="1" noChangeAspect="1"/>
+          </p:cNvSpPr>
+          <p:nvPr>
+            <p:ph type="sldImg"/>
+          </p:nvPr>
+        </p:nvSpPr>
+        <p:spPr/>
+      </p:sp>
+      <p:sp>
+        <p:nvSpPr>
+          <p:cNvPr id="3" name="Notes Placeholder 2"/>
+          <p:cNvSpPr>
+            <a:spLocks noGrp="1"/>
+          </p:cNvSpPr>
+          <p:nvPr>
+            <p:ph type="body" idx="1"/>
+          </p:nvPr>
+        </p:nvSpPr>
+        <p:spPr/>
+        <p:txBody>
+          <a:bodyPr/>
+          <a:lstStyle/>
+          <a:p>
+            <a:endParaRPr lang="en-US" dirty="0"/>
+          </a:p>
+        </p:txBody>
+      </p:sp>
+      <p:sp>
+        <p:nvSpPr>
+          <p:cNvPr id="4" name="Slide Number Placeholder 3"/>
+          <p:cNvSpPr>
+            <a:spLocks noGrp="1"/>
+          </p:cNvSpPr>
+          <p:nvPr>
+            <p:ph type="sldNum" sz="quarter" idx="10"/>
+          </p:nvPr>
+        </p:nvSpPr>
+        <p:spPr/>
+        <p:txBody>
+          <a:bodyPr/>
+          <a:lstStyle/>
+          <a:p>
+            <a:fld id="{F7021451-1387-4CA6-816F-3879F97B5CBC}" type="slidenum">
+              <a:rPr lang="en-US"/>
+              <a:t>12</a:t>
+            </a:fld>
+            <a:endParaRPr lang="en-US"/>
+          </a:p>
+        </p:txBody>
+      </p:sp>
+    </p:spTree>
+    <p:extLst>
+      <p:ext uri="{BB962C8B-B14F-4D97-AF65-F5344CB8AC3E}">
+        <p14:creationId xmlns:p14="http://schemas.microsoft.com/office/powerpoint/2010/main" val="1024086991"/>
+      </p:ext>
+    </p:extLst>
+  </p:cSld>
+  <p:clrMapOvr>
+    <a:masterClrMapping/>
+  </p:clrMapOvr>
+</p:notes>
+</file>
+
+<file path=ppt/notesSlides/notesSlide7.xml><?xml version="1.0" encoding="utf-8"?>
+<p:notes xmlns:a="http://schemas.openxmlformats.org/drawingml/2006/main" xmlns:r="http://schemas.openxmlformats.org/officeDocument/2006/relationships" xmlns:p="http://schemas.openxmlformats.org/presentationml/2006/main">
+  <p:cSld>
+    <p:spTree>
+      <p:nvGrpSpPr>
+        <p:cNvPr id="1" name=""/>
+        <p:cNvGrpSpPr/>
+        <p:nvPr/>
+      </p:nvGrpSpPr>
+      <p:grpSpPr>
+        <a:xfrm>
+          <a:off x="0" y="0"/>
+          <a:ext cx="0" cy="0"/>
+          <a:chOff x="0" y="0"/>
+          <a:chExt cx="0" cy="0"/>
+        </a:xfrm>
+      </p:grpSpPr>
+      <p:sp>
+        <p:nvSpPr>
+          <p:cNvPr id="2" name="Slide Image Placeholder 1"/>
+          <p:cNvSpPr>
+            <a:spLocks noGrp="1" noRot="1" noChangeAspect="1"/>
+          </p:cNvSpPr>
+          <p:nvPr>
+            <p:ph type="sldImg"/>
+          </p:nvPr>
+        </p:nvSpPr>
+        <p:spPr/>
+      </p:sp>
+      <p:sp>
+        <p:nvSpPr>
+          <p:cNvPr id="3" name="Notes Placeholder 2"/>
+          <p:cNvSpPr>
+            <a:spLocks noGrp="1"/>
+          </p:cNvSpPr>
+          <p:nvPr>
+            <p:ph type="body" idx="1"/>
+          </p:nvPr>
+        </p:nvSpPr>
+        <p:spPr/>
+        <p:txBody>
+          <a:bodyPr/>
+          <a:lstStyle/>
+          <a:p>
+            <a:endParaRPr lang="en-US" dirty="0"/>
+          </a:p>
+        </p:txBody>
+      </p:sp>
+      <p:sp>
+        <p:nvSpPr>
+          <p:cNvPr id="4" name="Slide Number Placeholder 3"/>
+          <p:cNvSpPr>
+            <a:spLocks noGrp="1"/>
+          </p:cNvSpPr>
+          <p:nvPr>
+            <p:ph type="sldNum" sz="quarter" idx="10"/>
+          </p:nvPr>
+        </p:nvSpPr>
+        <p:spPr/>
+        <p:txBody>
+          <a:bodyPr/>
+          <a:lstStyle/>
+          <a:p>
+            <a:fld id="{F7021451-1387-4CA6-816F-3879F97B5CBC}" type="slidenum">
+              <a:rPr lang="en-US"/>
+              <a:t>13</a:t>
+            </a:fld>
+            <a:endParaRPr lang="en-US"/>
+          </a:p>
+        </p:txBody>
+      </p:sp>
+    </p:spTree>
+    <p:extLst>
+      <p:ext uri="{BB962C8B-B14F-4D97-AF65-F5344CB8AC3E}">
+        <p14:creationId xmlns:p14="http://schemas.microsoft.com/office/powerpoint/2010/main" val="1024086991"/>
+      </p:ext>
+    </p:extLst>
+  </p:cSld>
+  <p:clrMapOvr>
+    <a:masterClrMapping/>
+  </p:clrMapOvr>
+</p:notes>
+</file>
+
 <file path=ppt/slideLayouts/slideLayout1.xml><?xml version="1.0" encoding="utf-8"?>
 <p:sldLayout xmlns:a="http://schemas.openxmlformats.org/drawingml/2006/main" xmlns:r="http://schemas.openxmlformats.org/officeDocument/2006/relationships" xmlns:p="http://schemas.openxmlformats.org/presentationml/2006/main" type="title" preserve="1">
   <p:cSld name="Title Slide">
@@ -1132,7 +1303,7 @@
           <a:p>
             <a:fld id="{5BCAD085-E8A6-8845-BD4E-CB4CCA059FC4}" type="datetimeFigureOut">
               <a:rPr lang="en-US" smtClean="0"/>
-              <a:t>8/31/26</a:t>
+              <a:t>9/2/26</a:t>
             </a:fld>
             <a:endParaRPr lang="en-US"/>
           </a:p>
@@ -1300,7 +1471,7 @@
           <a:p>
             <a:fld id="{5BCAD085-E8A6-8845-BD4E-CB4CCA059FC4}" type="datetimeFigureOut">
               <a:rPr lang="en-US" smtClean="0"/>
-              <a:t>8/31/26</a:t>
+              <a:t>9/2/26</a:t>
             </a:fld>
             <a:endParaRPr lang="en-US"/>
           </a:p>
@@ -1478,7 +1649,7 @@
           <a:p>
             <a:fld id="{5BCAD085-E8A6-8845-BD4E-CB4CCA059FC4}" type="datetimeFigureOut">
               <a:rPr lang="en-US" smtClean="0"/>
-              <a:t>8/31/26</a:t>
+              <a:t>9/2/26</a:t>
             </a:fld>
             <a:endParaRPr lang="en-US"/>
           </a:p>
@@ -1764,7 +1935,7 @@
           <a:p>
             <a:fld id="{5BCAD085-E8A6-8845-BD4E-CB4CCA059FC4}" type="datetimeFigureOut">
               <a:rPr lang="en-US" smtClean="0"/>
-              <a:t>8/31/26</a:t>
+              <a:t>9/2/26</a:t>
             </a:fld>
             <a:endParaRPr lang="en-US"/>
           </a:p>
@@ -2009,7 +2180,7 @@
           <a:p>
             <a:fld id="{5BCAD085-E8A6-8845-BD4E-CB4CCA059FC4}" type="datetimeFigureOut">
               <a:rPr lang="en-US" smtClean="0"/>
-              <a:t>8/31/26</a:t>
+              <a:t>9/2/26</a:t>
             </a:fld>
             <a:endParaRPr lang="en-US"/>
           </a:p>
@@ -2294,7 +2465,7 @@
           <a:p>
             <a:fld id="{5BCAD085-E8A6-8845-BD4E-CB4CCA059FC4}" type="datetimeFigureOut">
               <a:rPr lang="en-US" smtClean="0"/>
-              <a:t>8/31/26</a:t>
+              <a:t>9/2/26</a:t>
             </a:fld>
             <a:endParaRPr lang="en-US"/>
           </a:p>
@@ -2713,7 +2884,7 @@
           <a:p>
             <a:fld id="{5BCAD085-E8A6-8845-BD4E-CB4CCA059FC4}" type="datetimeFigureOut">
               <a:rPr lang="en-US" smtClean="0"/>
-              <a:t>8/31/26</a:t>
+              <a:t>9/2/26</a:t>
             </a:fld>
             <a:endParaRPr lang="en-US"/>
           </a:p>
@@ -2830,7 +3001,7 @@
           <a:p>
             <a:fld id="{5BCAD085-E8A6-8845-BD4E-CB4CCA059FC4}" type="datetimeFigureOut">
               <a:rPr lang="en-US" smtClean="0"/>
-              <a:t>8/31/26</a:t>
+              <a:t>9/2/26</a:t>
             </a:fld>
             <a:endParaRPr lang="en-US"/>
           </a:p>
@@ -2925,7 +3096,7 @@
           <a:p>
             <a:fld id="{5BCAD085-E8A6-8845-BD4E-CB4CCA059FC4}" type="datetimeFigureOut">
               <a:rPr lang="en-US" smtClean="0"/>
-              <a:t>8/31/26</a:t>
+              <a:t>9/2/26</a:t>
             </a:fld>
             <a:endParaRPr lang="en-US"/>
           </a:p>
@@ -3200,7 +3371,7 @@
           <a:p>
             <a:fld id="{5BCAD085-E8A6-8845-BD4E-CB4CCA059FC4}" type="datetimeFigureOut">
               <a:rPr lang="en-US" smtClean="0"/>
-              <a:t>8/31/26</a:t>
+              <a:t>9/2/26</a:t>
             </a:fld>
             <a:endParaRPr lang="en-US"/>
           </a:p>
@@ -3452,7 +3623,7 @@
           <a:p>
             <a:fld id="{5BCAD085-E8A6-8845-BD4E-CB4CCA059FC4}" type="datetimeFigureOut">
               <a:rPr lang="en-US" smtClean="0"/>
-              <a:t>8/31/26</a:t>
+              <a:t>9/2/26</a:t>
             </a:fld>
             <a:endParaRPr lang="en-US"/>
           </a:p>
@@ -3663,7 +3834,7 @@
           <a:p>
             <a:fld id="{5BCAD085-E8A6-8845-BD4E-CB4CCA059FC4}" type="datetimeFigureOut">
               <a:rPr lang="en-US" smtClean="0"/>
-              <a:t>8/31/26</a:t>
+              <a:t>9/2/26</a:t>
             </a:fld>
             <a:endParaRPr lang="en-US"/>
           </a:p>
@@ -10054,6 +10225,9544 @@
                 <a:latin typeface="Noto Sans CJK JP"/>
               </a:rPr>
               <a:t>「何を・どの粒度で・誰が・どこまで共通化して」Policy管理するかを具体化する</a:t>
+            </a:r>
+          </a:p>
+        </p:txBody>
+      </p:sp>
+    </p:spTree>
+  </p:cSld>
+  <p:clrMapOvr>
+    <a:masterClrMapping/>
+  </p:clrMapOvr>
+</p:sld>
+</file>
+
+<file path=ppt/slides/slide12.xml><?xml version="1.0" encoding="utf-8"?>
+<p:sld xmlns:a="http://schemas.openxmlformats.org/drawingml/2006/main" xmlns:r="http://schemas.openxmlformats.org/officeDocument/2006/relationships" xmlns:p="http://schemas.openxmlformats.org/presentationml/2006/main">
+  <p:cSld>
+    <p:spTree>
+      <p:nvGrpSpPr>
+        <p:cNvPr id="1" name=""/>
+        <p:cNvGrpSpPr/>
+        <p:nvPr/>
+      </p:nvGrpSpPr>
+      <p:grpSpPr>
+        <a:xfrm>
+          <a:off x="0" y="0"/>
+          <a:ext cx="0" cy="0"/>
+          <a:chOff x="0" y="0"/>
+          <a:chExt cx="0" cy="0"/>
+        </a:xfrm>
+      </p:grpSpPr>
+      <p:sp>
+        <p:nvSpPr>
+          <p:cNvPr id="2" name="Text 0"/>
+          <p:cNvSpPr txBox="1"/>
+          <p:nvPr/>
+        </p:nvSpPr>
+        <p:spPr>
+          <a:xfrm>
+            <a:off x="320040" y="118872"/>
+            <a:ext cx="11521440" cy="411480"/>
+          </a:xfrm>
+          <a:prstGeom prst="rect">
+            <a:avLst/>
+          </a:prstGeom>
+          <a:noFill/>
+          <a:ln/>
+        </p:spPr>
+        <p:txBody>
+          <a:bodyPr wrap="square" lIns="0" tIns="0" rIns="0" bIns="0" rtlCol="0" anchor="t"/>
+          <a:lstStyle/>
+          <a:p>
+            <a:pPr marL="0" indent="0" algn="l">
+              <a:buNone/>
+            </a:pPr>
+            <a:r>
+              <a:rPr lang="en-US" sz="2400" b="1" dirty="0">
+                <a:solidFill>
+                  <a:srgbClr val="000000"/>
+                </a:solidFill>
+                <a:latin typeface="Noto Sans CJK JP" pitchFamily="34" charset="0"/>
+                <a:ea typeface="Noto Sans CJK JP" pitchFamily="34" charset="-122"/>
+                <a:cs typeface="Noto Sans CJK JP" pitchFamily="34" charset="-120"/>
+              </a:rPr>
+              <a:t>7. OpenAI Agents SDK のガバナンス機能</a:t>
+            </a:r>
+            <a:endParaRPr lang="en-US" sz="2400" dirty="0"/>
+          </a:p>
+        </p:txBody>
+      </p:sp>
+      <p:sp>
+        <p:nvSpPr>
+          <p:cNvPr id="3" name="Text 1"/>
+          <p:cNvSpPr txBox="1"/>
+          <p:nvPr/>
+        </p:nvSpPr>
+        <p:spPr>
+          <a:xfrm>
+            <a:off x="365760" y="566928"/>
+            <a:ext cx="11521440" cy="237744"/>
+          </a:xfrm>
+          <a:prstGeom prst="rect">
+            <a:avLst/>
+          </a:prstGeom>
+          <a:noFill/>
+          <a:ln/>
+        </p:spPr>
+        <p:txBody>
+          <a:bodyPr wrap="square" lIns="0" tIns="0" rIns="0" bIns="0" rtlCol="0" anchor="t"/>
+          <a:lstStyle/>
+          <a:p>
+            <a:pPr marL="0" indent="0">
+              <a:buNone/>
+            </a:pPr>
+            <a:r>
+              <a:rPr lang="en-US" sz="1250" dirty="0">
+                <a:solidFill>
+                  <a:srgbClr val="000000"/>
+                </a:solidFill>
+                <a:latin typeface="Noto Sans CJK JP" pitchFamily="34" charset="0"/>
+                <a:ea typeface="Noto Sans CJK JP" pitchFamily="34" charset="-122"/>
+                <a:cs typeface="Noto Sans CJK JP" pitchFamily="34" charset="-120"/>
+              </a:rPr>
+              <a:t>ユーザのリクエストから Tool 実行までの各段階で，</a:t>
+            </a:r>
+            <a:r>
+              <a:rPr lang="en-US" sz="1250" b="1" dirty="0">
+                <a:solidFill>
+                  <a:srgbClr val="004696"/>
+                </a:solidFill>
+                <a:latin typeface="Noto Sans CJK JP" pitchFamily="34" charset="0"/>
+                <a:ea typeface="Noto Sans CJK JP" pitchFamily="34" charset="-122"/>
+                <a:cs typeface="Noto Sans CJK JP" pitchFamily="34" charset="-120"/>
+              </a:rPr>
+              <a:t>承認・検査・制御</a:t>
+            </a:r>
+            <a:r>
+              <a:rPr lang="en-US" sz="1250" dirty="0">
+                <a:solidFill>
+                  <a:srgbClr val="000000"/>
+                </a:solidFill>
+                <a:latin typeface="Noto Sans CJK JP" pitchFamily="34" charset="0"/>
+                <a:ea typeface="Noto Sans CJK JP" pitchFamily="34" charset="-122"/>
+                <a:cs typeface="Noto Sans CJK JP" pitchFamily="34" charset="-120"/>
+              </a:rPr>
+              <a:t> を行う（各 Function Tool に個別に設定）</a:t>
+            </a:r>
+            <a:endParaRPr lang="en-US" sz="1250" dirty="0"/>
+          </a:p>
+        </p:txBody>
+      </p:sp>
+      <p:sp>
+        <p:nvSpPr>
+          <p:cNvPr id="4" name="Shape 2"/>
+          <p:cNvSpPr/>
+          <p:nvPr/>
+        </p:nvSpPr>
+        <p:spPr>
+          <a:xfrm>
+            <a:off x="5440680" y="868680"/>
+            <a:ext cx="0" cy="5276088"/>
+          </a:xfrm>
+          <a:prstGeom prst="line">
+            <a:avLst/>
+          </a:prstGeom>
+          <a:noFill/>
+          <a:ln w="10160">
+            <a:solidFill>
+              <a:srgbClr val="CACED3"/>
+            </a:solidFill>
+            <a:prstDash val="solid"/>
+          </a:ln>
+        </p:spPr>
+        <p:txBody>
+          <a:bodyPr/>
+          <a:lstStyle/>
+          <a:p>
+            <a:endParaRPr lang="en-JP"/>
+          </a:p>
+        </p:txBody>
+      </p:sp>
+      <p:sp>
+        <p:nvSpPr>
+          <p:cNvPr id="5" name="Text 3"/>
+          <p:cNvSpPr txBox="1"/>
+          <p:nvPr/>
+        </p:nvSpPr>
+        <p:spPr>
+          <a:xfrm>
+            <a:off x="274320" y="896112"/>
+            <a:ext cx="2743200" cy="219456"/>
+          </a:xfrm>
+          <a:prstGeom prst="rect">
+            <a:avLst/>
+          </a:prstGeom>
+          <a:noFill/>
+          <a:ln/>
+        </p:spPr>
+        <p:txBody>
+          <a:bodyPr wrap="square" lIns="0" tIns="0" rIns="0" bIns="0" rtlCol="0" anchor="t"/>
+          <a:lstStyle/>
+          <a:p>
+            <a:pPr marL="0" indent="0" algn="l">
+              <a:buNone/>
+            </a:pPr>
+            <a:r>
+              <a:rPr lang="en-US" sz="1300" b="1" dirty="0">
+                <a:solidFill>
+                  <a:srgbClr val="000000"/>
+                </a:solidFill>
+                <a:latin typeface="Noto Sans CJK JP" pitchFamily="34" charset="0"/>
+                <a:ea typeface="Noto Sans CJK JP" pitchFamily="34" charset="-122"/>
+                <a:cs typeface="Noto Sans CJK JP" pitchFamily="34" charset="-120"/>
+              </a:rPr>
+              <a:t>仕組みの全体像</a:t>
+            </a:r>
+            <a:endParaRPr lang="en-US" sz="1300" dirty="0"/>
+          </a:p>
+        </p:txBody>
+      </p:sp>
+      <p:sp>
+        <p:nvSpPr>
+          <p:cNvPr id="6" name="Text 4"/>
+          <p:cNvSpPr txBox="1"/>
+          <p:nvPr/>
+        </p:nvSpPr>
+        <p:spPr>
+          <a:xfrm>
+            <a:off x="5532120" y="896112"/>
+            <a:ext cx="6309360" cy="219456"/>
+          </a:xfrm>
+          <a:prstGeom prst="rect">
+            <a:avLst/>
+          </a:prstGeom>
+          <a:noFill/>
+          <a:ln/>
+        </p:spPr>
+        <p:txBody>
+          <a:bodyPr wrap="square" lIns="0" tIns="0" rIns="0" bIns="0" rtlCol="0" anchor="t"/>
+          <a:lstStyle/>
+          <a:p>
+            <a:pPr marL="0" indent="0" algn="l">
+              <a:buNone/>
+            </a:pPr>
+            <a:r>
+              <a:rPr lang="en-US" sz="1300" b="1" dirty="0">
+                <a:solidFill>
+                  <a:srgbClr val="000000"/>
+                </a:solidFill>
+                <a:latin typeface="Noto Sans CJK JP" pitchFamily="34" charset="0"/>
+                <a:ea typeface="Noto Sans CJK JP" pitchFamily="34" charset="-122"/>
+                <a:cs typeface="Noto Sans CJK JP" pitchFamily="34" charset="-120"/>
+              </a:rPr>
+              <a:t>コード例（各 Function Tool にガバナンス機能を設定）</a:t>
+            </a:r>
+            <a:endParaRPr lang="en-US" sz="1300" dirty="0"/>
+          </a:p>
+        </p:txBody>
+      </p:sp>
+      <p:sp>
+        <p:nvSpPr>
+          <p:cNvPr id="7" name="Text 5"/>
+          <p:cNvSpPr txBox="1"/>
+          <p:nvPr/>
+        </p:nvSpPr>
+        <p:spPr>
+          <a:xfrm>
+            <a:off x="274320" y="1261872"/>
+            <a:ext cx="2057400" cy="219456"/>
+          </a:xfrm>
+          <a:prstGeom prst="rect">
+            <a:avLst/>
+          </a:prstGeom>
+          <a:noFill/>
+          <a:ln/>
+        </p:spPr>
+        <p:txBody>
+          <a:bodyPr wrap="square" lIns="0" tIns="0" rIns="0" bIns="0" rtlCol="0" anchor="t"/>
+          <a:lstStyle/>
+          <a:p>
+            <a:pPr marL="0" indent="0" algn="l">
+              <a:buNone/>
+            </a:pPr>
+            <a:r>
+              <a:rPr lang="en-US" sz="1300" b="1" dirty="0">
+                <a:solidFill>
+                  <a:srgbClr val="004696"/>
+                </a:solidFill>
+                <a:latin typeface="Noto Sans CJK JP" pitchFamily="34" charset="0"/>
+                <a:ea typeface="Noto Sans CJK JP" pitchFamily="34" charset="-122"/>
+                <a:cs typeface="Noto Sans CJK JP" pitchFamily="34" charset="-120"/>
+              </a:rPr>
+              <a:t>① リクエスト</a:t>
+            </a:r>
+            <a:endParaRPr lang="en-US" sz="1300" dirty="0"/>
+          </a:p>
+        </p:txBody>
+      </p:sp>
+      <p:sp>
+        <p:nvSpPr>
+          <p:cNvPr id="8" name="Text 6"/>
+          <p:cNvSpPr txBox="1"/>
+          <p:nvPr/>
+        </p:nvSpPr>
+        <p:spPr>
+          <a:xfrm>
+            <a:off x="292608" y="1536192"/>
+            <a:ext cx="2057400" cy="182880"/>
+          </a:xfrm>
+          <a:prstGeom prst="rect">
+            <a:avLst/>
+          </a:prstGeom>
+          <a:noFill/>
+          <a:ln/>
+        </p:spPr>
+        <p:txBody>
+          <a:bodyPr wrap="square" lIns="0" tIns="0" rIns="0" bIns="0" rtlCol="0" anchor="t"/>
+          <a:lstStyle/>
+          <a:p>
+            <a:pPr marL="0" indent="0">
+              <a:buNone/>
+            </a:pPr>
+            <a:r>
+              <a:rPr lang="en-US" sz="1050" dirty="0">
+                <a:solidFill>
+                  <a:srgbClr val="000000"/>
+                </a:solidFill>
+                <a:latin typeface="Noto Sans CJK JP" pitchFamily="34" charset="0"/>
+                <a:ea typeface="Noto Sans CJK JP" pitchFamily="34" charset="-122"/>
+                <a:cs typeface="Noto Sans CJK JP" pitchFamily="34" charset="-120"/>
+              </a:rPr>
+              <a:t>ユーザの指示を受け取る</a:t>
+            </a:r>
+            <a:endParaRPr lang="en-US" sz="1050" dirty="0"/>
+          </a:p>
+        </p:txBody>
+      </p:sp>
+      <p:sp>
+        <p:nvSpPr>
+          <p:cNvPr id="9" name="Shape 7"/>
+          <p:cNvSpPr/>
+          <p:nvPr/>
+        </p:nvSpPr>
+        <p:spPr>
+          <a:xfrm>
+            <a:off x="274320" y="1847088"/>
+            <a:ext cx="2057400" cy="0"/>
+          </a:xfrm>
+          <a:prstGeom prst="line">
+            <a:avLst/>
+          </a:prstGeom>
+          <a:noFill/>
+          <a:ln w="10160">
+            <a:solidFill>
+              <a:srgbClr val="DADEE2"/>
+            </a:solidFill>
+            <a:prstDash val="solid"/>
+          </a:ln>
+        </p:spPr>
+        <p:txBody>
+          <a:bodyPr/>
+          <a:lstStyle/>
+          <a:p>
+            <a:endParaRPr lang="en-JP"/>
+          </a:p>
+        </p:txBody>
+      </p:sp>
+      <p:sp>
+        <p:nvSpPr>
+          <p:cNvPr id="10" name="Text 8"/>
+          <p:cNvSpPr txBox="1"/>
+          <p:nvPr/>
+        </p:nvSpPr>
+        <p:spPr>
+          <a:xfrm>
+            <a:off x="274320" y="2011680"/>
+            <a:ext cx="2057400" cy="219456"/>
+          </a:xfrm>
+          <a:prstGeom prst="rect">
+            <a:avLst/>
+          </a:prstGeom>
+          <a:noFill/>
+          <a:ln/>
+        </p:spPr>
+        <p:txBody>
+          <a:bodyPr wrap="square" lIns="0" tIns="0" rIns="0" bIns="0" rtlCol="0" anchor="t"/>
+          <a:lstStyle/>
+          <a:p>
+            <a:pPr marL="0" indent="0" algn="l">
+              <a:buNone/>
+            </a:pPr>
+            <a:r>
+              <a:rPr lang="en-US" sz="1300" b="1" dirty="0">
+                <a:solidFill>
+                  <a:srgbClr val="004696"/>
+                </a:solidFill>
+                <a:latin typeface="Noto Sans CJK JP" pitchFamily="34" charset="0"/>
+                <a:ea typeface="Noto Sans CJK JP" pitchFamily="34" charset="-122"/>
+                <a:cs typeface="Noto Sans CJK JP" pitchFamily="34" charset="-120"/>
+              </a:rPr>
+              <a:t>② Tool 選択</a:t>
+            </a:r>
+            <a:endParaRPr lang="en-US" sz="1300" dirty="0"/>
+          </a:p>
+        </p:txBody>
+      </p:sp>
+      <p:sp>
+        <p:nvSpPr>
+          <p:cNvPr id="11" name="Text 9"/>
+          <p:cNvSpPr txBox="1"/>
+          <p:nvPr/>
+        </p:nvSpPr>
+        <p:spPr>
+          <a:xfrm>
+            <a:off x="292608" y="2286000"/>
+            <a:ext cx="2057400" cy="182880"/>
+          </a:xfrm>
+          <a:prstGeom prst="rect">
+            <a:avLst/>
+          </a:prstGeom>
+          <a:noFill/>
+          <a:ln/>
+        </p:spPr>
+        <p:txBody>
+          <a:bodyPr wrap="square" lIns="0" tIns="0" rIns="0" bIns="0" rtlCol="0" anchor="t"/>
+          <a:lstStyle/>
+          <a:p>
+            <a:pPr marL="0" indent="0">
+              <a:buNone/>
+            </a:pPr>
+            <a:r>
+              <a:rPr lang="en-US" sz="1050" dirty="0">
+                <a:solidFill>
+                  <a:srgbClr val="000000"/>
+                </a:solidFill>
+                <a:latin typeface="Noto Sans CJK JP" pitchFamily="34" charset="0"/>
+                <a:ea typeface="Noto Sans CJK JP" pitchFamily="34" charset="-122"/>
+                <a:cs typeface="Noto Sans CJK JP" pitchFamily="34" charset="-120"/>
+              </a:rPr>
+              <a:t>LLM が Tool を選択し，</a:t>
+            </a:r>
+            <a:endParaRPr lang="en-US" sz="1050" dirty="0"/>
+          </a:p>
+        </p:txBody>
+      </p:sp>
+      <p:sp>
+        <p:nvSpPr>
+          <p:cNvPr id="12" name="Text 10"/>
+          <p:cNvSpPr txBox="1"/>
+          <p:nvPr/>
+        </p:nvSpPr>
+        <p:spPr>
+          <a:xfrm>
+            <a:off x="292608" y="2478024"/>
+            <a:ext cx="2057400" cy="182880"/>
+          </a:xfrm>
+          <a:prstGeom prst="rect">
+            <a:avLst/>
+          </a:prstGeom>
+          <a:noFill/>
+          <a:ln/>
+        </p:spPr>
+        <p:txBody>
+          <a:bodyPr wrap="square" lIns="0" tIns="0" rIns="0" bIns="0" rtlCol="0" anchor="t"/>
+          <a:lstStyle/>
+          <a:p>
+            <a:pPr marL="0" indent="0">
+              <a:buNone/>
+            </a:pPr>
+            <a:r>
+              <a:rPr lang="en-US" sz="1050" dirty="0">
+                <a:solidFill>
+                  <a:srgbClr val="000000"/>
+                </a:solidFill>
+                <a:latin typeface="Noto Sans CJK JP" pitchFamily="34" charset="0"/>
+                <a:ea typeface="Noto Sans CJK JP" pitchFamily="34" charset="-122"/>
+                <a:cs typeface="Noto Sans CJK JP" pitchFamily="34" charset="-120"/>
+              </a:rPr>
+              <a:t>Tool Call を生成</a:t>
+            </a:r>
+            <a:endParaRPr lang="en-US" sz="1050" dirty="0"/>
+          </a:p>
+        </p:txBody>
+      </p:sp>
+      <p:sp>
+        <p:nvSpPr>
+          <p:cNvPr id="13" name="Shape 11"/>
+          <p:cNvSpPr/>
+          <p:nvPr/>
+        </p:nvSpPr>
+        <p:spPr>
+          <a:xfrm>
+            <a:off x="274320" y="2788920"/>
+            <a:ext cx="2057400" cy="0"/>
+          </a:xfrm>
+          <a:prstGeom prst="line">
+            <a:avLst/>
+          </a:prstGeom>
+          <a:noFill/>
+          <a:ln w="10160">
+            <a:solidFill>
+              <a:srgbClr val="DADEE2"/>
+            </a:solidFill>
+            <a:prstDash val="solid"/>
+          </a:ln>
+        </p:spPr>
+        <p:txBody>
+          <a:bodyPr/>
+          <a:lstStyle/>
+          <a:p>
+            <a:endParaRPr lang="en-JP"/>
+          </a:p>
+        </p:txBody>
+      </p:sp>
+      <p:sp>
+        <p:nvSpPr>
+          <p:cNvPr id="14" name="Text 12"/>
+          <p:cNvSpPr txBox="1"/>
+          <p:nvPr/>
+        </p:nvSpPr>
+        <p:spPr>
+          <a:xfrm>
+            <a:off x="274320" y="2971800"/>
+            <a:ext cx="2057400" cy="219456"/>
+          </a:xfrm>
+          <a:prstGeom prst="rect">
+            <a:avLst/>
+          </a:prstGeom>
+          <a:noFill/>
+          <a:ln/>
+        </p:spPr>
+        <p:txBody>
+          <a:bodyPr wrap="square" lIns="0" tIns="0" rIns="0" bIns="0" rtlCol="0" anchor="t"/>
+          <a:lstStyle/>
+          <a:p>
+            <a:pPr marL="0" indent="0" algn="l">
+              <a:buNone/>
+            </a:pPr>
+            <a:r>
+              <a:rPr lang="en-US" sz="1300" b="1" dirty="0">
+                <a:solidFill>
+                  <a:srgbClr val="004696"/>
+                </a:solidFill>
+                <a:latin typeface="Noto Sans CJK JP" pitchFamily="34" charset="0"/>
+                <a:ea typeface="Noto Sans CJK JP" pitchFamily="34" charset="-122"/>
+                <a:cs typeface="Noto Sans CJK JP" pitchFamily="34" charset="-120"/>
+              </a:rPr>
+              <a:t>③ 実行前のガバナンス</a:t>
+            </a:r>
+            <a:endParaRPr lang="en-US" sz="1300" dirty="0"/>
+          </a:p>
+        </p:txBody>
+      </p:sp>
+      <p:sp>
+        <p:nvSpPr>
+          <p:cNvPr id="15" name="Text 13"/>
+          <p:cNvSpPr txBox="1"/>
+          <p:nvPr/>
+        </p:nvSpPr>
+        <p:spPr>
+          <a:xfrm>
+            <a:off x="292608" y="3246120"/>
+            <a:ext cx="2057400" cy="182880"/>
+          </a:xfrm>
+          <a:prstGeom prst="rect">
+            <a:avLst/>
+          </a:prstGeom>
+          <a:noFill/>
+          <a:ln/>
+        </p:spPr>
+        <p:txBody>
+          <a:bodyPr wrap="square" lIns="0" tIns="0" rIns="0" bIns="0" rtlCol="0" anchor="t"/>
+          <a:lstStyle/>
+          <a:p>
+            <a:pPr marL="0" indent="0">
+              <a:buNone/>
+            </a:pPr>
+            <a:r>
+              <a:rPr lang="en-US" sz="1050" dirty="0">
+                <a:solidFill>
+                  <a:srgbClr val="000000"/>
+                </a:solidFill>
+                <a:latin typeface="Noto Sans CJK JP" pitchFamily="34" charset="0"/>
+                <a:ea typeface="Noto Sans CJK JP" pitchFamily="34" charset="-122"/>
+                <a:cs typeface="Noto Sans CJK JP" pitchFamily="34" charset="-120"/>
+              </a:rPr>
+              <a:t>承認や入力検査を行い，</a:t>
+            </a:r>
+            <a:endParaRPr lang="en-US" sz="1050" dirty="0"/>
+          </a:p>
+        </p:txBody>
+      </p:sp>
+      <p:sp>
+        <p:nvSpPr>
+          <p:cNvPr id="16" name="Text 14"/>
+          <p:cNvSpPr txBox="1"/>
+          <p:nvPr/>
+        </p:nvSpPr>
+        <p:spPr>
+          <a:xfrm>
+            <a:off x="292608" y="3438144"/>
+            <a:ext cx="2057400" cy="182880"/>
+          </a:xfrm>
+          <a:prstGeom prst="rect">
+            <a:avLst/>
+          </a:prstGeom>
+          <a:noFill/>
+          <a:ln/>
+        </p:spPr>
+        <p:txBody>
+          <a:bodyPr wrap="square" lIns="0" tIns="0" rIns="0" bIns="0" rtlCol="0" anchor="t"/>
+          <a:lstStyle/>
+          <a:p>
+            <a:pPr marL="0" indent="0">
+              <a:buNone/>
+            </a:pPr>
+            <a:r>
+              <a:rPr lang="en-US" sz="1050" dirty="0">
+                <a:solidFill>
+                  <a:srgbClr val="000000"/>
+                </a:solidFill>
+                <a:latin typeface="Noto Sans CJK JP" pitchFamily="34" charset="0"/>
+                <a:ea typeface="Noto Sans CJK JP" pitchFamily="34" charset="-122"/>
+                <a:cs typeface="Noto Sans CJK JP" pitchFamily="34" charset="-120"/>
+              </a:rPr>
+              <a:t>必要に応じて実行を停止</a:t>
+            </a:r>
+            <a:endParaRPr lang="en-US" sz="1050" dirty="0"/>
+          </a:p>
+        </p:txBody>
+      </p:sp>
+      <p:sp>
+        <p:nvSpPr>
+          <p:cNvPr id="17" name="Shape 15"/>
+          <p:cNvSpPr/>
+          <p:nvPr/>
+        </p:nvSpPr>
+        <p:spPr>
+          <a:xfrm>
+            <a:off x="274320" y="4206240"/>
+            <a:ext cx="2057400" cy="0"/>
+          </a:xfrm>
+          <a:prstGeom prst="line">
+            <a:avLst/>
+          </a:prstGeom>
+          <a:noFill/>
+          <a:ln w="10160">
+            <a:solidFill>
+              <a:srgbClr val="DADEE2"/>
+            </a:solidFill>
+            <a:prstDash val="solid"/>
+          </a:ln>
+        </p:spPr>
+        <p:txBody>
+          <a:bodyPr/>
+          <a:lstStyle/>
+          <a:p>
+            <a:endParaRPr lang="en-JP"/>
+          </a:p>
+        </p:txBody>
+      </p:sp>
+      <p:sp>
+        <p:nvSpPr>
+          <p:cNvPr id="18" name="Text 16"/>
+          <p:cNvSpPr txBox="1"/>
+          <p:nvPr/>
+        </p:nvSpPr>
+        <p:spPr>
+          <a:xfrm>
+            <a:off x="274320" y="4389120"/>
+            <a:ext cx="2057400" cy="219456"/>
+          </a:xfrm>
+          <a:prstGeom prst="rect">
+            <a:avLst/>
+          </a:prstGeom>
+          <a:noFill/>
+          <a:ln/>
+        </p:spPr>
+        <p:txBody>
+          <a:bodyPr wrap="square" lIns="0" tIns="0" rIns="0" bIns="0" rtlCol="0" anchor="t"/>
+          <a:lstStyle/>
+          <a:p>
+            <a:pPr marL="0" indent="0" algn="l">
+              <a:buNone/>
+            </a:pPr>
+            <a:r>
+              <a:rPr lang="en-US" sz="1300" b="1" dirty="0">
+                <a:solidFill>
+                  <a:srgbClr val="004696"/>
+                </a:solidFill>
+                <a:latin typeface="Noto Sans CJK JP" pitchFamily="34" charset="0"/>
+                <a:ea typeface="Noto Sans CJK JP" pitchFamily="34" charset="-122"/>
+                <a:cs typeface="Noto Sans CJK JP" pitchFamily="34" charset="-120"/>
+              </a:rPr>
+              <a:t>④ Tool 実行</a:t>
+            </a:r>
+            <a:endParaRPr lang="en-US" sz="1300" dirty="0"/>
+          </a:p>
+        </p:txBody>
+      </p:sp>
+      <p:sp>
+        <p:nvSpPr>
+          <p:cNvPr id="19" name="Text 17"/>
+          <p:cNvSpPr txBox="1"/>
+          <p:nvPr/>
+        </p:nvSpPr>
+        <p:spPr>
+          <a:xfrm>
+            <a:off x="292608" y="4663440"/>
+            <a:ext cx="2057400" cy="182880"/>
+          </a:xfrm>
+          <a:prstGeom prst="rect">
+            <a:avLst/>
+          </a:prstGeom>
+          <a:noFill/>
+          <a:ln/>
+        </p:spPr>
+        <p:txBody>
+          <a:bodyPr wrap="square" lIns="0" tIns="0" rIns="0" bIns="0" rtlCol="0" anchor="t"/>
+          <a:lstStyle/>
+          <a:p>
+            <a:pPr marL="0" indent="0">
+              <a:buNone/>
+            </a:pPr>
+            <a:r>
+              <a:rPr lang="en-US" sz="1050" dirty="0">
+                <a:solidFill>
+                  <a:srgbClr val="000000"/>
+                </a:solidFill>
+                <a:latin typeface="Noto Sans CJK JP" pitchFamily="34" charset="0"/>
+                <a:ea typeface="Noto Sans CJK JP" pitchFamily="34" charset="-122"/>
+                <a:cs typeface="Noto Sans CJK JP" pitchFamily="34" charset="-120"/>
+              </a:rPr>
+              <a:t>Tool を実際に実行</a:t>
+            </a:r>
+            <a:endParaRPr lang="en-US" sz="1050" dirty="0"/>
+          </a:p>
+        </p:txBody>
+      </p:sp>
+      <p:sp>
+        <p:nvSpPr>
+          <p:cNvPr id="20" name="Shape 18"/>
+          <p:cNvSpPr/>
+          <p:nvPr/>
+        </p:nvSpPr>
+        <p:spPr>
+          <a:xfrm>
+            <a:off x="274320" y="4983480"/>
+            <a:ext cx="2057400" cy="0"/>
+          </a:xfrm>
+          <a:prstGeom prst="line">
+            <a:avLst/>
+          </a:prstGeom>
+          <a:noFill/>
+          <a:ln w="10160">
+            <a:solidFill>
+              <a:srgbClr val="DADEE2"/>
+            </a:solidFill>
+            <a:prstDash val="solid"/>
+          </a:ln>
+        </p:spPr>
+        <p:txBody>
+          <a:bodyPr/>
+          <a:lstStyle/>
+          <a:p>
+            <a:endParaRPr lang="en-JP"/>
+          </a:p>
+        </p:txBody>
+      </p:sp>
+      <p:sp>
+        <p:nvSpPr>
+          <p:cNvPr id="21" name="Text 19"/>
+          <p:cNvSpPr txBox="1"/>
+          <p:nvPr/>
+        </p:nvSpPr>
+        <p:spPr>
+          <a:xfrm>
+            <a:off x="274320" y="5120640"/>
+            <a:ext cx="2057400" cy="219456"/>
+          </a:xfrm>
+          <a:prstGeom prst="rect">
+            <a:avLst/>
+          </a:prstGeom>
+          <a:noFill/>
+          <a:ln/>
+        </p:spPr>
+        <p:txBody>
+          <a:bodyPr wrap="square" lIns="0" tIns="0" rIns="0" bIns="0" rtlCol="0" anchor="t"/>
+          <a:lstStyle/>
+          <a:p>
+            <a:pPr marL="0" indent="0" algn="l">
+              <a:buNone/>
+            </a:pPr>
+            <a:r>
+              <a:rPr lang="en-US" sz="1300" b="1" dirty="0">
+                <a:solidFill>
+                  <a:srgbClr val="004696"/>
+                </a:solidFill>
+                <a:latin typeface="Noto Sans CJK JP" pitchFamily="34" charset="0"/>
+                <a:ea typeface="Noto Sans CJK JP" pitchFamily="34" charset="-122"/>
+                <a:cs typeface="Noto Sans CJK JP" pitchFamily="34" charset="-120"/>
+              </a:rPr>
+              <a:t>⑤ 実行後のガバナンス</a:t>
+            </a:r>
+            <a:endParaRPr lang="en-US" sz="1300" dirty="0"/>
+          </a:p>
+        </p:txBody>
+      </p:sp>
+      <p:sp>
+        <p:nvSpPr>
+          <p:cNvPr id="22" name="Text 20"/>
+          <p:cNvSpPr txBox="1"/>
+          <p:nvPr/>
+        </p:nvSpPr>
+        <p:spPr>
+          <a:xfrm>
+            <a:off x="292608" y="5394960"/>
+            <a:ext cx="2057400" cy="182880"/>
+          </a:xfrm>
+          <a:prstGeom prst="rect">
+            <a:avLst/>
+          </a:prstGeom>
+          <a:noFill/>
+          <a:ln/>
+        </p:spPr>
+        <p:txBody>
+          <a:bodyPr wrap="square" lIns="0" tIns="0" rIns="0" bIns="0" rtlCol="0" anchor="t"/>
+          <a:lstStyle/>
+          <a:p>
+            <a:pPr marL="0" indent="0">
+              <a:buNone/>
+            </a:pPr>
+            <a:r>
+              <a:rPr lang="en-US" sz="1050" dirty="0">
+                <a:solidFill>
+                  <a:srgbClr val="000000"/>
+                </a:solidFill>
+                <a:latin typeface="Noto Sans CJK JP" pitchFamily="34" charset="0"/>
+                <a:ea typeface="Noto Sans CJK JP" pitchFamily="34" charset="-122"/>
+                <a:cs typeface="Noto Sans CJK JP" pitchFamily="34" charset="-120"/>
+              </a:rPr>
+              <a:t>出力を検査し，</a:t>
+            </a:r>
+            <a:endParaRPr lang="en-US" sz="1050" dirty="0"/>
+          </a:p>
+        </p:txBody>
+      </p:sp>
+      <p:sp>
+        <p:nvSpPr>
+          <p:cNvPr id="23" name="Text 21"/>
+          <p:cNvSpPr txBox="1"/>
+          <p:nvPr/>
+        </p:nvSpPr>
+        <p:spPr>
+          <a:xfrm>
+            <a:off x="292608" y="5586984"/>
+            <a:ext cx="2057400" cy="182880"/>
+          </a:xfrm>
+          <a:prstGeom prst="rect">
+            <a:avLst/>
+          </a:prstGeom>
+          <a:noFill/>
+          <a:ln/>
+        </p:spPr>
+        <p:txBody>
+          <a:bodyPr wrap="square" lIns="0" tIns="0" rIns="0" bIns="0" rtlCol="0" anchor="t"/>
+          <a:lstStyle/>
+          <a:p>
+            <a:pPr marL="0" indent="0">
+              <a:buNone/>
+            </a:pPr>
+            <a:r>
+              <a:rPr lang="en-US" sz="1050" dirty="0">
+                <a:solidFill>
+                  <a:srgbClr val="000000"/>
+                </a:solidFill>
+                <a:latin typeface="Noto Sans CJK JP" pitchFamily="34" charset="0"/>
+                <a:ea typeface="Noto Sans CJK JP" pitchFamily="34" charset="-122"/>
+                <a:cs typeface="Noto Sans CJK JP" pitchFamily="34" charset="-120"/>
+              </a:rPr>
+              <a:t>必要に応じてブロックや修正</a:t>
+            </a:r>
+            <a:endParaRPr lang="en-US" sz="1050" dirty="0"/>
+          </a:p>
+        </p:txBody>
+      </p:sp>
+      <p:sp>
+        <p:nvSpPr>
+          <p:cNvPr id="24" name="Shape 22"/>
+          <p:cNvSpPr/>
+          <p:nvPr/>
+        </p:nvSpPr>
+        <p:spPr>
+          <a:xfrm>
+            <a:off x="2912364" y="1261872"/>
+            <a:ext cx="1920240" cy="310896"/>
+          </a:xfrm>
+          <a:prstGeom prst="rect">
+            <a:avLst/>
+          </a:prstGeom>
+          <a:solidFill>
+            <a:srgbClr val="FFFFFF"/>
+          </a:solidFill>
+          <a:ln w="10160">
+            <a:solidFill>
+              <a:srgbClr val="000000"/>
+            </a:solidFill>
+            <a:prstDash val="solid"/>
+          </a:ln>
+        </p:spPr>
+        <p:txBody>
+          <a:bodyPr/>
+          <a:lstStyle/>
+          <a:p>
+            <a:endParaRPr lang="en-JP"/>
+          </a:p>
+        </p:txBody>
+      </p:sp>
+      <p:sp>
+        <p:nvSpPr>
+          <p:cNvPr id="25" name="Text 23"/>
+          <p:cNvSpPr txBox="1"/>
+          <p:nvPr/>
+        </p:nvSpPr>
+        <p:spPr>
+          <a:xfrm>
+            <a:off x="2912364" y="1261872"/>
+            <a:ext cx="1920240" cy="310896"/>
+          </a:xfrm>
+          <a:prstGeom prst="rect">
+            <a:avLst/>
+          </a:prstGeom>
+          <a:noFill/>
+          <a:ln/>
+        </p:spPr>
+        <p:txBody>
+          <a:bodyPr wrap="square" lIns="0" tIns="0" rIns="0" bIns="0" rtlCol="0" anchor="ctr"/>
+          <a:lstStyle/>
+          <a:p>
+            <a:pPr marL="0" indent="0" algn="ctr">
+              <a:buNone/>
+            </a:pPr>
+            <a:r>
+              <a:rPr lang="en-US" sz="1150" b="1" dirty="0">
+                <a:solidFill>
+                  <a:srgbClr val="000000"/>
+                </a:solidFill>
+                <a:latin typeface="Noto Sans CJK JP" pitchFamily="34" charset="0"/>
+                <a:ea typeface="Noto Sans CJK JP" pitchFamily="34" charset="-122"/>
+                <a:cs typeface="Noto Sans CJK JP" pitchFamily="34" charset="-120"/>
+              </a:rPr>
+              <a:t>ユーザ</a:t>
+            </a:r>
+            <a:endParaRPr lang="en-US" sz="1150" dirty="0"/>
+          </a:p>
+        </p:txBody>
+      </p:sp>
+      <p:sp>
+        <p:nvSpPr>
+          <p:cNvPr id="26" name="Shape 24"/>
+          <p:cNvSpPr/>
+          <p:nvPr/>
+        </p:nvSpPr>
+        <p:spPr>
+          <a:xfrm>
+            <a:off x="3872484" y="1572768"/>
+            <a:ext cx="0" cy="301752"/>
+          </a:xfrm>
+          <a:prstGeom prst="line">
+            <a:avLst/>
+          </a:prstGeom>
+          <a:noFill/>
+          <a:ln w="10160">
+            <a:solidFill>
+              <a:srgbClr val="000000"/>
+            </a:solidFill>
+            <a:prstDash val="solid"/>
+          </a:ln>
+        </p:spPr>
+        <p:txBody>
+          <a:bodyPr/>
+          <a:lstStyle/>
+          <a:p>
+            <a:endParaRPr lang="en-JP"/>
+          </a:p>
+        </p:txBody>
+      </p:sp>
+      <p:sp>
+        <p:nvSpPr>
+          <p:cNvPr id="27" name="Text 25"/>
+          <p:cNvSpPr txBox="1"/>
+          <p:nvPr/>
+        </p:nvSpPr>
+        <p:spPr>
+          <a:xfrm>
+            <a:off x="3954780" y="1627632"/>
+            <a:ext cx="822960" cy="164592"/>
+          </a:xfrm>
+          <a:prstGeom prst="rect">
+            <a:avLst/>
+          </a:prstGeom>
+          <a:noFill/>
+          <a:ln/>
+        </p:spPr>
+        <p:txBody>
+          <a:bodyPr wrap="square" lIns="0" tIns="0" rIns="0" bIns="0" rtlCol="0" anchor="t"/>
+          <a:lstStyle/>
+          <a:p>
+            <a:pPr marL="0" indent="0" algn="l">
+              <a:buNone/>
+            </a:pPr>
+            <a:r>
+              <a:rPr lang="en-US" sz="950" dirty="0">
+                <a:solidFill>
+                  <a:srgbClr val="333333"/>
+                </a:solidFill>
+                <a:latin typeface="Noto Sans CJK JP" pitchFamily="34" charset="0"/>
+                <a:ea typeface="Noto Sans CJK JP" pitchFamily="34" charset="-122"/>
+                <a:cs typeface="Noto Sans CJK JP" pitchFamily="34" charset="-120"/>
+              </a:rPr>
+              <a:t>Prompt</a:t>
+            </a:r>
+            <a:endParaRPr lang="en-US" sz="950" dirty="0"/>
+          </a:p>
+        </p:txBody>
+      </p:sp>
+      <p:sp>
+        <p:nvSpPr>
+          <p:cNvPr id="28" name="Shape 26"/>
+          <p:cNvSpPr/>
+          <p:nvPr/>
+        </p:nvSpPr>
+        <p:spPr>
+          <a:xfrm>
+            <a:off x="2912364" y="1874520"/>
+            <a:ext cx="1920240" cy="310896"/>
+          </a:xfrm>
+          <a:prstGeom prst="rect">
+            <a:avLst/>
+          </a:prstGeom>
+          <a:solidFill>
+            <a:srgbClr val="FFFFFF"/>
+          </a:solidFill>
+          <a:ln w="10160">
+            <a:solidFill>
+              <a:srgbClr val="000000"/>
+            </a:solidFill>
+            <a:prstDash val="solid"/>
+          </a:ln>
+        </p:spPr>
+        <p:txBody>
+          <a:bodyPr/>
+          <a:lstStyle/>
+          <a:p>
+            <a:endParaRPr lang="en-JP"/>
+          </a:p>
+        </p:txBody>
+      </p:sp>
+      <p:sp>
+        <p:nvSpPr>
+          <p:cNvPr id="29" name="Text 27"/>
+          <p:cNvSpPr txBox="1"/>
+          <p:nvPr/>
+        </p:nvSpPr>
+        <p:spPr>
+          <a:xfrm>
+            <a:off x="2912364" y="1874520"/>
+            <a:ext cx="1920240" cy="310896"/>
+          </a:xfrm>
+          <a:prstGeom prst="rect">
+            <a:avLst/>
+          </a:prstGeom>
+          <a:noFill/>
+          <a:ln/>
+        </p:spPr>
+        <p:txBody>
+          <a:bodyPr wrap="square" lIns="0" tIns="0" rIns="0" bIns="0" rtlCol="0" anchor="ctr"/>
+          <a:lstStyle/>
+          <a:p>
+            <a:pPr marL="0" indent="0" algn="ctr">
+              <a:buNone/>
+            </a:pPr>
+            <a:r>
+              <a:rPr lang="en-US" sz="1150" b="1" dirty="0">
+                <a:solidFill>
+                  <a:srgbClr val="000000"/>
+                </a:solidFill>
+                <a:latin typeface="Noto Sans CJK JP" pitchFamily="34" charset="0"/>
+                <a:ea typeface="Noto Sans CJK JP" pitchFamily="34" charset="-122"/>
+                <a:cs typeface="Noto Sans CJK JP" pitchFamily="34" charset="-120"/>
+              </a:rPr>
+              <a:t>LLM</a:t>
+            </a:r>
+            <a:endParaRPr lang="en-US" sz="1150" dirty="0"/>
+          </a:p>
+        </p:txBody>
+      </p:sp>
+      <p:sp>
+        <p:nvSpPr>
+          <p:cNvPr id="30" name="Shape 28"/>
+          <p:cNvSpPr/>
+          <p:nvPr/>
+        </p:nvSpPr>
+        <p:spPr>
+          <a:xfrm>
+            <a:off x="3872484" y="2185416"/>
+            <a:ext cx="0" cy="329184"/>
+          </a:xfrm>
+          <a:prstGeom prst="line">
+            <a:avLst/>
+          </a:prstGeom>
+          <a:noFill/>
+          <a:ln w="10160">
+            <a:solidFill>
+              <a:srgbClr val="000000"/>
+            </a:solidFill>
+            <a:prstDash val="solid"/>
+          </a:ln>
+        </p:spPr>
+        <p:txBody>
+          <a:bodyPr/>
+          <a:lstStyle/>
+          <a:p>
+            <a:endParaRPr lang="en-JP"/>
+          </a:p>
+        </p:txBody>
+      </p:sp>
+      <p:sp>
+        <p:nvSpPr>
+          <p:cNvPr id="31" name="Text 29"/>
+          <p:cNvSpPr txBox="1"/>
+          <p:nvPr/>
+        </p:nvSpPr>
+        <p:spPr>
+          <a:xfrm>
+            <a:off x="3954780" y="2249424"/>
+            <a:ext cx="914400" cy="164592"/>
+          </a:xfrm>
+          <a:prstGeom prst="rect">
+            <a:avLst/>
+          </a:prstGeom>
+          <a:noFill/>
+          <a:ln/>
+        </p:spPr>
+        <p:txBody>
+          <a:bodyPr wrap="square" lIns="0" tIns="0" rIns="0" bIns="0" rtlCol="0" anchor="t"/>
+          <a:lstStyle/>
+          <a:p>
+            <a:pPr marL="0" indent="0" algn="l">
+              <a:buNone/>
+            </a:pPr>
+            <a:r>
+              <a:rPr lang="en-US" sz="950" dirty="0">
+                <a:solidFill>
+                  <a:srgbClr val="333333"/>
+                </a:solidFill>
+                <a:latin typeface="Noto Sans CJK JP" pitchFamily="34" charset="0"/>
+                <a:ea typeface="Noto Sans CJK JP" pitchFamily="34" charset="-122"/>
+                <a:cs typeface="Noto Sans CJK JP" pitchFamily="34" charset="-120"/>
+              </a:rPr>
+              <a:t>Tool Call</a:t>
+            </a:r>
+            <a:endParaRPr lang="en-US" sz="950" dirty="0"/>
+          </a:p>
+        </p:txBody>
+      </p:sp>
+      <p:sp>
+        <p:nvSpPr>
+          <p:cNvPr id="32" name="Shape 30"/>
+          <p:cNvSpPr/>
+          <p:nvPr/>
+        </p:nvSpPr>
+        <p:spPr>
+          <a:xfrm>
+            <a:off x="2820924" y="2514600"/>
+            <a:ext cx="2103120" cy="493776"/>
+          </a:xfrm>
+          <a:prstGeom prst="roundRect">
+            <a:avLst>
+              <a:gd name="adj" fmla="val 11111"/>
+            </a:avLst>
+          </a:prstGeom>
+          <a:solidFill>
+            <a:srgbClr val="FFFFFF"/>
+          </a:solidFill>
+          <a:ln w="15240">
+            <a:solidFill>
+              <a:srgbClr val="7030A0"/>
+            </a:solidFill>
+            <a:prstDash val="solid"/>
+          </a:ln>
+        </p:spPr>
+        <p:txBody>
+          <a:bodyPr/>
+          <a:lstStyle/>
+          <a:p>
+            <a:endParaRPr lang="en-JP"/>
+          </a:p>
+        </p:txBody>
+      </p:sp>
+      <p:sp>
+        <p:nvSpPr>
+          <p:cNvPr id="33" name="Text 31"/>
+          <p:cNvSpPr txBox="1"/>
+          <p:nvPr/>
+        </p:nvSpPr>
+        <p:spPr>
+          <a:xfrm>
+            <a:off x="2820924" y="2569464"/>
+            <a:ext cx="2103120" cy="201168"/>
+          </a:xfrm>
+          <a:prstGeom prst="rect">
+            <a:avLst/>
+          </a:prstGeom>
+          <a:noFill/>
+          <a:ln/>
+        </p:spPr>
+        <p:txBody>
+          <a:bodyPr wrap="square" lIns="0" tIns="0" rIns="0" bIns="0" rtlCol="0" anchor="t"/>
+          <a:lstStyle/>
+          <a:p>
+            <a:pPr marL="0" indent="0" algn="ctr">
+              <a:buNone/>
+            </a:pPr>
+            <a:r>
+              <a:rPr lang="en-US" sz="1150" b="1" dirty="0">
+                <a:solidFill>
+                  <a:srgbClr val="7030A0"/>
+                </a:solidFill>
+                <a:latin typeface="Noto Sans CJK JP" pitchFamily="34" charset="0"/>
+                <a:ea typeface="Noto Sans CJK JP" pitchFamily="34" charset="-122"/>
+                <a:cs typeface="Noto Sans CJK JP" pitchFamily="34" charset="-120"/>
+              </a:rPr>
+              <a:t>Function Tool</a:t>
+            </a:r>
+            <a:endParaRPr lang="en-US" sz="1150" dirty="0"/>
+          </a:p>
+        </p:txBody>
+      </p:sp>
+      <p:sp>
+        <p:nvSpPr>
+          <p:cNvPr id="34" name="Text 32"/>
+          <p:cNvSpPr txBox="1"/>
+          <p:nvPr/>
+        </p:nvSpPr>
+        <p:spPr>
+          <a:xfrm>
+            <a:off x="2820924" y="2779776"/>
+            <a:ext cx="2103120" cy="164592"/>
+          </a:xfrm>
+          <a:prstGeom prst="rect">
+            <a:avLst/>
+          </a:prstGeom>
+          <a:noFill/>
+          <a:ln/>
+        </p:spPr>
+        <p:txBody>
+          <a:bodyPr wrap="square" lIns="0" tIns="0" rIns="0" bIns="0" rtlCol="0" anchor="t"/>
+          <a:lstStyle/>
+          <a:p>
+            <a:pPr marL="0" indent="0" algn="ctr">
+              <a:buNone/>
+            </a:pPr>
+            <a:r>
+              <a:rPr lang="en-US" sz="950" dirty="0">
+                <a:solidFill>
+                  <a:srgbClr val="000000"/>
+                </a:solidFill>
+                <a:latin typeface="Noto Sans CJK JP" pitchFamily="34" charset="0"/>
+                <a:ea typeface="Noto Sans CJK JP" pitchFamily="34" charset="-122"/>
+                <a:cs typeface="Noto Sans CJK JP" pitchFamily="34" charset="-120"/>
+              </a:rPr>
+              <a:t>（LLM が呼び出した Tool）</a:t>
+            </a:r>
+            <a:endParaRPr lang="en-US" sz="950" dirty="0"/>
+          </a:p>
+        </p:txBody>
+      </p:sp>
+      <p:sp>
+        <p:nvSpPr>
+          <p:cNvPr id="35" name="Shape 33"/>
+          <p:cNvSpPr/>
+          <p:nvPr/>
+        </p:nvSpPr>
+        <p:spPr>
+          <a:xfrm>
+            <a:off x="3872484" y="3008376"/>
+            <a:ext cx="0" cy="118872"/>
+          </a:xfrm>
+          <a:prstGeom prst="line">
+            <a:avLst/>
+          </a:prstGeom>
+          <a:noFill/>
+          <a:ln w="10160">
+            <a:solidFill>
+              <a:srgbClr val="000000"/>
+            </a:solidFill>
+            <a:prstDash val="solid"/>
+          </a:ln>
+        </p:spPr>
+        <p:txBody>
+          <a:bodyPr/>
+          <a:lstStyle/>
+          <a:p>
+            <a:endParaRPr lang="en-JP"/>
+          </a:p>
+        </p:txBody>
+      </p:sp>
+      <p:sp>
+        <p:nvSpPr>
+          <p:cNvPr id="36" name="Shape 34"/>
+          <p:cNvSpPr/>
+          <p:nvPr/>
+        </p:nvSpPr>
+        <p:spPr>
+          <a:xfrm>
+            <a:off x="3081528" y="3127248"/>
+            <a:ext cx="1581912" cy="0"/>
+          </a:xfrm>
+          <a:prstGeom prst="line">
+            <a:avLst/>
+          </a:prstGeom>
+          <a:noFill/>
+          <a:ln w="10160">
+            <a:solidFill>
+              <a:srgbClr val="000000"/>
+            </a:solidFill>
+            <a:prstDash val="solid"/>
+          </a:ln>
+        </p:spPr>
+        <p:txBody>
+          <a:bodyPr/>
+          <a:lstStyle/>
+          <a:p>
+            <a:endParaRPr lang="en-JP"/>
+          </a:p>
+        </p:txBody>
+      </p:sp>
+      <p:sp>
+        <p:nvSpPr>
+          <p:cNvPr id="37" name="Shape 35"/>
+          <p:cNvSpPr/>
+          <p:nvPr/>
+        </p:nvSpPr>
+        <p:spPr>
+          <a:xfrm>
+            <a:off x="3081528" y="3127248"/>
+            <a:ext cx="0" cy="118872"/>
+          </a:xfrm>
+          <a:prstGeom prst="line">
+            <a:avLst/>
+          </a:prstGeom>
+          <a:noFill/>
+          <a:ln w="10160">
+            <a:solidFill>
+              <a:srgbClr val="000000"/>
+            </a:solidFill>
+            <a:prstDash val="solid"/>
+          </a:ln>
+        </p:spPr>
+        <p:txBody>
+          <a:bodyPr/>
+          <a:lstStyle/>
+          <a:p>
+            <a:endParaRPr lang="en-JP"/>
+          </a:p>
+        </p:txBody>
+      </p:sp>
+      <p:sp>
+        <p:nvSpPr>
+          <p:cNvPr id="38" name="Shape 36"/>
+          <p:cNvSpPr/>
+          <p:nvPr/>
+        </p:nvSpPr>
+        <p:spPr>
+          <a:xfrm>
+            <a:off x="4663440" y="3127248"/>
+            <a:ext cx="0" cy="118872"/>
+          </a:xfrm>
+          <a:prstGeom prst="line">
+            <a:avLst/>
+          </a:prstGeom>
+          <a:noFill/>
+          <a:ln w="10160">
+            <a:solidFill>
+              <a:srgbClr val="000000"/>
+            </a:solidFill>
+            <a:prstDash val="solid"/>
+          </a:ln>
+        </p:spPr>
+        <p:txBody>
+          <a:bodyPr/>
+          <a:lstStyle/>
+          <a:p>
+            <a:endParaRPr lang="en-JP"/>
+          </a:p>
+        </p:txBody>
+      </p:sp>
+      <p:sp>
+        <p:nvSpPr>
+          <p:cNvPr id="39" name="Shape 37"/>
+          <p:cNvSpPr/>
+          <p:nvPr/>
+        </p:nvSpPr>
+        <p:spPr>
+          <a:xfrm>
+            <a:off x="2359152" y="3246120"/>
+            <a:ext cx="1444752" cy="640080"/>
+          </a:xfrm>
+          <a:prstGeom prst="roundRect">
+            <a:avLst>
+              <a:gd name="adj" fmla="val 8571"/>
+            </a:avLst>
+          </a:prstGeom>
+          <a:solidFill>
+            <a:srgbClr val="FFFFFF"/>
+          </a:solidFill>
+          <a:ln w="15240">
+            <a:solidFill>
+              <a:srgbClr val="328C37"/>
+            </a:solidFill>
+            <a:prstDash val="solid"/>
+          </a:ln>
+        </p:spPr>
+        <p:txBody>
+          <a:bodyPr/>
+          <a:lstStyle/>
+          <a:p>
+            <a:endParaRPr lang="en-JP"/>
+          </a:p>
+        </p:txBody>
+      </p:sp>
+      <p:sp>
+        <p:nvSpPr>
+          <p:cNvPr id="40" name="Text 38"/>
+          <p:cNvSpPr txBox="1"/>
+          <p:nvPr/>
+        </p:nvSpPr>
+        <p:spPr>
+          <a:xfrm>
+            <a:off x="2359152" y="3300984"/>
+            <a:ext cx="1444752" cy="182880"/>
+          </a:xfrm>
+          <a:prstGeom prst="rect">
+            <a:avLst/>
+          </a:prstGeom>
+          <a:noFill/>
+          <a:ln/>
+        </p:spPr>
+        <p:txBody>
+          <a:bodyPr wrap="square" lIns="0" tIns="0" rIns="0" bIns="0" rtlCol="0" anchor="ctr"/>
+          <a:lstStyle/>
+          <a:p>
+            <a:pPr marL="0" indent="0" algn="ctr">
+              <a:buNone/>
+            </a:pPr>
+            <a:r>
+              <a:rPr lang="en-US" sz="950" b="1" dirty="0">
+                <a:solidFill>
+                  <a:srgbClr val="328C37"/>
+                </a:solidFill>
+                <a:latin typeface="DejaVu Sans Mono" pitchFamily="34" charset="0"/>
+                <a:ea typeface="DejaVu Sans Mono" pitchFamily="34" charset="-122"/>
+                <a:cs typeface="DejaVu Sans Mono" pitchFamily="34" charset="-120"/>
+              </a:rPr>
+              <a:t>needs_approval</a:t>
+            </a:r>
+            <a:endParaRPr lang="en-US" sz="950" dirty="0"/>
+          </a:p>
+        </p:txBody>
+      </p:sp>
+      <p:sp>
+        <p:nvSpPr>
+          <p:cNvPr id="41" name="Text 39"/>
+          <p:cNvSpPr txBox="1"/>
+          <p:nvPr/>
+        </p:nvSpPr>
+        <p:spPr>
+          <a:xfrm>
+            <a:off x="2359152" y="3502152"/>
+            <a:ext cx="1444752" cy="155448"/>
+          </a:xfrm>
+          <a:prstGeom prst="rect">
+            <a:avLst/>
+          </a:prstGeom>
+          <a:noFill/>
+          <a:ln/>
+        </p:spPr>
+        <p:txBody>
+          <a:bodyPr wrap="square" lIns="0" tIns="0" rIns="0" bIns="0" rtlCol="0" anchor="t"/>
+          <a:lstStyle/>
+          <a:p>
+            <a:pPr marL="0" indent="0" algn="ctr">
+              <a:buNone/>
+            </a:pPr>
+            <a:r>
+              <a:rPr lang="en-US" sz="850" dirty="0">
+                <a:solidFill>
+                  <a:srgbClr val="000000"/>
+                </a:solidFill>
+                <a:latin typeface="Noto Sans CJK JP" pitchFamily="34" charset="0"/>
+                <a:ea typeface="Noto Sans CJK JP" pitchFamily="34" charset="-122"/>
+                <a:cs typeface="Noto Sans CJK JP" pitchFamily="34" charset="-120"/>
+              </a:rPr>
+              <a:t>承認が必要か？</a:t>
+            </a:r>
+            <a:endParaRPr lang="en-US" sz="850" dirty="0"/>
+          </a:p>
+        </p:txBody>
+      </p:sp>
+      <p:sp>
+        <p:nvSpPr>
+          <p:cNvPr id="42" name="Text 40"/>
+          <p:cNvSpPr txBox="1"/>
+          <p:nvPr/>
+        </p:nvSpPr>
+        <p:spPr>
+          <a:xfrm>
+            <a:off x="2359152" y="3666744"/>
+            <a:ext cx="1444752" cy="155448"/>
+          </a:xfrm>
+          <a:prstGeom prst="rect">
+            <a:avLst/>
+          </a:prstGeom>
+          <a:noFill/>
+          <a:ln/>
+        </p:spPr>
+        <p:txBody>
+          <a:bodyPr wrap="square" lIns="0" tIns="0" rIns="0" bIns="0" rtlCol="0" anchor="t"/>
+          <a:lstStyle/>
+          <a:p>
+            <a:pPr marL="0" indent="0" algn="ctr">
+              <a:buNone/>
+            </a:pPr>
+            <a:r>
+              <a:rPr lang="en-US" sz="850" dirty="0">
+                <a:solidFill>
+                  <a:srgbClr val="000000"/>
+                </a:solidFill>
+                <a:latin typeface="Noto Sans CJK JP" pitchFamily="34" charset="0"/>
+                <a:ea typeface="Noto Sans CJK JP" pitchFamily="34" charset="-122"/>
+                <a:cs typeface="Noto Sans CJK JP" pitchFamily="34" charset="-120"/>
+              </a:rPr>
+              <a:t>（条件に応じて判定）</a:t>
+            </a:r>
+            <a:endParaRPr lang="en-US" sz="850" dirty="0"/>
+          </a:p>
+        </p:txBody>
+      </p:sp>
+      <p:sp>
+        <p:nvSpPr>
+          <p:cNvPr id="43" name="Shape 41"/>
+          <p:cNvSpPr/>
+          <p:nvPr/>
+        </p:nvSpPr>
+        <p:spPr>
+          <a:xfrm>
+            <a:off x="3941064" y="3246120"/>
+            <a:ext cx="1444752" cy="640080"/>
+          </a:xfrm>
+          <a:prstGeom prst="roundRect">
+            <a:avLst>
+              <a:gd name="adj" fmla="val 8571"/>
+            </a:avLst>
+          </a:prstGeom>
+          <a:solidFill>
+            <a:srgbClr val="FFFFFF"/>
+          </a:solidFill>
+          <a:ln w="15240">
+            <a:solidFill>
+              <a:srgbClr val="648CC8"/>
+            </a:solidFill>
+            <a:prstDash val="solid"/>
+          </a:ln>
+        </p:spPr>
+        <p:txBody>
+          <a:bodyPr/>
+          <a:lstStyle/>
+          <a:p>
+            <a:endParaRPr lang="en-JP"/>
+          </a:p>
+        </p:txBody>
+      </p:sp>
+      <p:sp>
+        <p:nvSpPr>
+          <p:cNvPr id="44" name="Text 42"/>
+          <p:cNvSpPr txBox="1"/>
+          <p:nvPr/>
+        </p:nvSpPr>
+        <p:spPr>
+          <a:xfrm>
+            <a:off x="3941064" y="3300984"/>
+            <a:ext cx="1444752" cy="182880"/>
+          </a:xfrm>
+          <a:prstGeom prst="rect">
+            <a:avLst/>
+          </a:prstGeom>
+          <a:noFill/>
+          <a:ln/>
+        </p:spPr>
+        <p:txBody>
+          <a:bodyPr wrap="square" lIns="0" tIns="0" rIns="0" bIns="0" rtlCol="0" anchor="t"/>
+          <a:lstStyle/>
+          <a:p>
+            <a:pPr marL="0" indent="0" algn="ctr">
+              <a:buNone/>
+            </a:pPr>
+            <a:r>
+              <a:rPr lang="en-US" sz="1000" b="1" dirty="0">
+                <a:solidFill>
+                  <a:srgbClr val="00377D"/>
+                </a:solidFill>
+                <a:latin typeface="Noto Sans CJK JP" pitchFamily="34" charset="0"/>
+                <a:ea typeface="Noto Sans CJK JP" pitchFamily="34" charset="-122"/>
+                <a:cs typeface="Noto Sans CJK JP" pitchFamily="34" charset="-120"/>
+              </a:rPr>
+              <a:t>Tool Input Guardrail</a:t>
+            </a:r>
+            <a:endParaRPr lang="en-US" sz="1000" dirty="0"/>
+          </a:p>
+        </p:txBody>
+      </p:sp>
+      <p:sp>
+        <p:nvSpPr>
+          <p:cNvPr id="45" name="Text 43"/>
+          <p:cNvSpPr txBox="1"/>
+          <p:nvPr/>
+        </p:nvSpPr>
+        <p:spPr>
+          <a:xfrm>
+            <a:off x="3941064" y="3502152"/>
+            <a:ext cx="1444752" cy="155448"/>
+          </a:xfrm>
+          <a:prstGeom prst="rect">
+            <a:avLst/>
+          </a:prstGeom>
+          <a:noFill/>
+          <a:ln/>
+        </p:spPr>
+        <p:txBody>
+          <a:bodyPr wrap="square" lIns="0" tIns="0" rIns="0" bIns="0" rtlCol="0" anchor="t"/>
+          <a:lstStyle/>
+          <a:p>
+            <a:pPr marL="0" indent="0" algn="ctr">
+              <a:buNone/>
+            </a:pPr>
+            <a:r>
+              <a:rPr lang="en-US" sz="850" dirty="0">
+                <a:solidFill>
+                  <a:srgbClr val="000000"/>
+                </a:solidFill>
+                <a:latin typeface="Noto Sans CJK JP" pitchFamily="34" charset="0"/>
+                <a:ea typeface="Noto Sans CJK JP" pitchFamily="34" charset="-122"/>
+                <a:cs typeface="Noto Sans CJK JP" pitchFamily="34" charset="-120"/>
+              </a:rPr>
+              <a:t>入力を検査</a:t>
+            </a:r>
+            <a:endParaRPr lang="en-US" sz="850" dirty="0"/>
+          </a:p>
+        </p:txBody>
+      </p:sp>
+      <p:sp>
+        <p:nvSpPr>
+          <p:cNvPr id="46" name="Text 44"/>
+          <p:cNvSpPr txBox="1"/>
+          <p:nvPr/>
+        </p:nvSpPr>
+        <p:spPr>
+          <a:xfrm>
+            <a:off x="3941064" y="3666744"/>
+            <a:ext cx="1444752" cy="155448"/>
+          </a:xfrm>
+          <a:prstGeom prst="rect">
+            <a:avLst/>
+          </a:prstGeom>
+          <a:noFill/>
+          <a:ln/>
+        </p:spPr>
+        <p:txBody>
+          <a:bodyPr wrap="square" lIns="0" tIns="0" rIns="0" bIns="0" rtlCol="0" anchor="t"/>
+          <a:lstStyle/>
+          <a:p>
+            <a:pPr marL="0" indent="0" algn="ctr">
+              <a:buNone/>
+            </a:pPr>
+            <a:r>
+              <a:rPr lang="en-US" sz="850" dirty="0">
+                <a:solidFill>
+                  <a:srgbClr val="000000"/>
+                </a:solidFill>
+                <a:latin typeface="Noto Sans CJK JP" pitchFamily="34" charset="0"/>
+                <a:ea typeface="Noto Sans CJK JP" pitchFamily="34" charset="-122"/>
+                <a:cs typeface="Noto Sans CJK JP" pitchFamily="34" charset="-120"/>
+              </a:rPr>
+              <a:t>（違反すれば Block）</a:t>
+            </a:r>
+            <a:endParaRPr lang="en-US" sz="850" dirty="0"/>
+          </a:p>
+        </p:txBody>
+      </p:sp>
+      <p:sp>
+        <p:nvSpPr>
+          <p:cNvPr id="47" name="Shape 45"/>
+          <p:cNvSpPr/>
+          <p:nvPr/>
+        </p:nvSpPr>
+        <p:spPr>
+          <a:xfrm>
+            <a:off x="3081528" y="3886200"/>
+            <a:ext cx="0" cy="137160"/>
+          </a:xfrm>
+          <a:prstGeom prst="line">
+            <a:avLst/>
+          </a:prstGeom>
+          <a:noFill/>
+          <a:ln w="10160">
+            <a:solidFill>
+              <a:srgbClr val="000000"/>
+            </a:solidFill>
+            <a:prstDash val="solid"/>
+          </a:ln>
+        </p:spPr>
+        <p:txBody>
+          <a:bodyPr/>
+          <a:lstStyle/>
+          <a:p>
+            <a:endParaRPr lang="en-JP"/>
+          </a:p>
+        </p:txBody>
+      </p:sp>
+      <p:sp>
+        <p:nvSpPr>
+          <p:cNvPr id="48" name="Text 46"/>
+          <p:cNvSpPr txBox="1"/>
+          <p:nvPr/>
+        </p:nvSpPr>
+        <p:spPr>
+          <a:xfrm>
+            <a:off x="2359152" y="4032504"/>
+            <a:ext cx="1444752" cy="164592"/>
+          </a:xfrm>
+          <a:prstGeom prst="rect">
+            <a:avLst/>
+          </a:prstGeom>
+          <a:noFill/>
+          <a:ln/>
+        </p:spPr>
+        <p:txBody>
+          <a:bodyPr wrap="square" lIns="0" tIns="0" rIns="0" bIns="0" rtlCol="0" anchor="t"/>
+          <a:lstStyle/>
+          <a:p>
+            <a:pPr marL="0" indent="0" algn="ctr">
+              <a:buNone/>
+            </a:pPr>
+            <a:r>
+              <a:rPr lang="en-US" sz="950" dirty="0">
+                <a:solidFill>
+                  <a:srgbClr val="333333"/>
+                </a:solidFill>
+                <a:latin typeface="Noto Sans CJK JP" pitchFamily="34" charset="0"/>
+                <a:ea typeface="Noto Sans CJK JP" pitchFamily="34" charset="-122"/>
+                <a:cs typeface="Noto Sans CJK JP" pitchFamily="34" charset="-120"/>
+              </a:rPr>
+              <a:t>Approve / Reject</a:t>
+            </a:r>
+            <a:endParaRPr lang="en-US" sz="950" dirty="0"/>
+          </a:p>
+        </p:txBody>
+      </p:sp>
+      <p:sp>
+        <p:nvSpPr>
+          <p:cNvPr id="49" name="Text 47"/>
+          <p:cNvSpPr txBox="1"/>
+          <p:nvPr/>
+        </p:nvSpPr>
+        <p:spPr>
+          <a:xfrm>
+            <a:off x="2359152" y="4197096"/>
+            <a:ext cx="1444752" cy="164592"/>
+          </a:xfrm>
+          <a:prstGeom prst="rect">
+            <a:avLst/>
+          </a:prstGeom>
+          <a:noFill/>
+          <a:ln/>
+        </p:spPr>
+        <p:txBody>
+          <a:bodyPr wrap="square" lIns="0" tIns="0" rIns="0" bIns="0" rtlCol="0" anchor="t"/>
+          <a:lstStyle/>
+          <a:p>
+            <a:pPr marL="0" indent="0" algn="ctr">
+              <a:buNone/>
+            </a:pPr>
+            <a:r>
+              <a:rPr lang="en-US" sz="950" dirty="0">
+                <a:solidFill>
+                  <a:srgbClr val="333333"/>
+                </a:solidFill>
+                <a:latin typeface="Noto Sans CJK JP" pitchFamily="34" charset="0"/>
+                <a:ea typeface="Noto Sans CJK JP" pitchFamily="34" charset="-122"/>
+                <a:cs typeface="Noto Sans CJK JP" pitchFamily="34" charset="-120"/>
+              </a:rPr>
+              <a:t>(Human Approval)</a:t>
+            </a:r>
+            <a:endParaRPr lang="en-US" sz="950" dirty="0"/>
+          </a:p>
+        </p:txBody>
+      </p:sp>
+      <p:sp>
+        <p:nvSpPr>
+          <p:cNvPr id="50" name="Shape 48"/>
+          <p:cNvSpPr/>
+          <p:nvPr/>
+        </p:nvSpPr>
+        <p:spPr>
+          <a:xfrm>
+            <a:off x="3081528" y="4379976"/>
+            <a:ext cx="0" cy="146304"/>
+          </a:xfrm>
+          <a:prstGeom prst="line">
+            <a:avLst/>
+          </a:prstGeom>
+          <a:noFill/>
+          <a:ln w="10160">
+            <a:solidFill>
+              <a:srgbClr val="000000"/>
+            </a:solidFill>
+            <a:prstDash val="solid"/>
+          </a:ln>
+        </p:spPr>
+        <p:txBody>
+          <a:bodyPr/>
+          <a:lstStyle/>
+          <a:p>
+            <a:endParaRPr lang="en-JP"/>
+          </a:p>
+        </p:txBody>
+      </p:sp>
+      <p:sp>
+        <p:nvSpPr>
+          <p:cNvPr id="51" name="Shape 49"/>
+          <p:cNvSpPr/>
+          <p:nvPr/>
+        </p:nvSpPr>
+        <p:spPr>
+          <a:xfrm>
+            <a:off x="4663440" y="3886200"/>
+            <a:ext cx="0" cy="210312"/>
+          </a:xfrm>
+          <a:prstGeom prst="line">
+            <a:avLst/>
+          </a:prstGeom>
+          <a:noFill/>
+          <a:ln w="10160">
+            <a:solidFill>
+              <a:srgbClr val="000000"/>
+            </a:solidFill>
+            <a:prstDash val="solid"/>
+          </a:ln>
+        </p:spPr>
+        <p:txBody>
+          <a:bodyPr/>
+          <a:lstStyle/>
+          <a:p>
+            <a:endParaRPr lang="en-JP"/>
+          </a:p>
+        </p:txBody>
+      </p:sp>
+      <p:sp>
+        <p:nvSpPr>
+          <p:cNvPr id="52" name="Text 50"/>
+          <p:cNvSpPr txBox="1"/>
+          <p:nvPr/>
+        </p:nvSpPr>
+        <p:spPr>
+          <a:xfrm>
+            <a:off x="3941064" y="4114800"/>
+            <a:ext cx="1444752" cy="164592"/>
+          </a:xfrm>
+          <a:prstGeom prst="rect">
+            <a:avLst/>
+          </a:prstGeom>
+          <a:noFill/>
+          <a:ln/>
+        </p:spPr>
+        <p:txBody>
+          <a:bodyPr wrap="square" lIns="0" tIns="0" rIns="0" bIns="0" rtlCol="0" anchor="t"/>
+          <a:lstStyle/>
+          <a:p>
+            <a:pPr marL="0" indent="0" algn="ctr">
+              <a:buNone/>
+            </a:pPr>
+            <a:r>
+              <a:rPr lang="en-US" sz="950" dirty="0">
+                <a:solidFill>
+                  <a:srgbClr val="333333"/>
+                </a:solidFill>
+                <a:latin typeface="Noto Sans CJK JP" pitchFamily="34" charset="0"/>
+                <a:ea typeface="Noto Sans CJK JP" pitchFamily="34" charset="-122"/>
+                <a:cs typeface="Noto Sans CJK JP" pitchFamily="34" charset="-120"/>
+              </a:rPr>
+              <a:t>Allow / Block</a:t>
+            </a:r>
+            <a:endParaRPr lang="en-US" sz="950" dirty="0"/>
+          </a:p>
+        </p:txBody>
+      </p:sp>
+      <p:sp>
+        <p:nvSpPr>
+          <p:cNvPr id="53" name="Shape 51"/>
+          <p:cNvSpPr/>
+          <p:nvPr/>
+        </p:nvSpPr>
+        <p:spPr>
+          <a:xfrm>
+            <a:off x="4663440" y="4297680"/>
+            <a:ext cx="0" cy="228600"/>
+          </a:xfrm>
+          <a:prstGeom prst="line">
+            <a:avLst/>
+          </a:prstGeom>
+          <a:noFill/>
+          <a:ln w="10160">
+            <a:solidFill>
+              <a:srgbClr val="000000"/>
+            </a:solidFill>
+            <a:prstDash val="solid"/>
+          </a:ln>
+        </p:spPr>
+        <p:txBody>
+          <a:bodyPr/>
+          <a:lstStyle/>
+          <a:p>
+            <a:endParaRPr lang="en-JP"/>
+          </a:p>
+        </p:txBody>
+      </p:sp>
+      <p:sp>
+        <p:nvSpPr>
+          <p:cNvPr id="54" name="Shape 52"/>
+          <p:cNvSpPr/>
+          <p:nvPr/>
+        </p:nvSpPr>
+        <p:spPr>
+          <a:xfrm>
+            <a:off x="2336292" y="4526280"/>
+            <a:ext cx="3072384" cy="420624"/>
+          </a:xfrm>
+          <a:prstGeom prst="rect">
+            <a:avLst/>
+          </a:prstGeom>
+          <a:solidFill>
+            <a:srgbClr val="FFFFFF"/>
+          </a:solidFill>
+          <a:ln w="10160">
+            <a:solidFill>
+              <a:srgbClr val="000000"/>
+            </a:solidFill>
+            <a:prstDash val="solid"/>
+          </a:ln>
+        </p:spPr>
+        <p:txBody>
+          <a:bodyPr/>
+          <a:lstStyle/>
+          <a:p>
+            <a:endParaRPr lang="en-JP"/>
+          </a:p>
+        </p:txBody>
+      </p:sp>
+      <p:sp>
+        <p:nvSpPr>
+          <p:cNvPr id="55" name="Text 53"/>
+          <p:cNvSpPr txBox="1"/>
+          <p:nvPr/>
+        </p:nvSpPr>
+        <p:spPr>
+          <a:xfrm>
+            <a:off x="2336292" y="4572000"/>
+            <a:ext cx="3072384" cy="201168"/>
+          </a:xfrm>
+          <a:prstGeom prst="rect">
+            <a:avLst/>
+          </a:prstGeom>
+          <a:noFill/>
+          <a:ln/>
+        </p:spPr>
+        <p:txBody>
+          <a:bodyPr wrap="square" lIns="0" tIns="0" rIns="0" bIns="0" rtlCol="0" anchor="t"/>
+          <a:lstStyle/>
+          <a:p>
+            <a:pPr marL="0" indent="0" algn="ctr">
+              <a:buNone/>
+            </a:pPr>
+            <a:r>
+              <a:rPr lang="en-US" sz="1150" b="1" dirty="0">
+                <a:solidFill>
+                  <a:srgbClr val="000000"/>
+                </a:solidFill>
+                <a:latin typeface="Noto Sans CJK JP" pitchFamily="34" charset="0"/>
+                <a:ea typeface="Noto Sans CJK JP" pitchFamily="34" charset="-122"/>
+                <a:cs typeface="Noto Sans CJK JP" pitchFamily="34" charset="-120"/>
+              </a:rPr>
+              <a:t>Tool Execution</a:t>
+            </a:r>
+            <a:endParaRPr lang="en-US" sz="1150" dirty="0"/>
+          </a:p>
+        </p:txBody>
+      </p:sp>
+      <p:sp>
+        <p:nvSpPr>
+          <p:cNvPr id="56" name="Text 54"/>
+          <p:cNvSpPr txBox="1"/>
+          <p:nvPr/>
+        </p:nvSpPr>
+        <p:spPr>
+          <a:xfrm>
+            <a:off x="2336292" y="4745736"/>
+            <a:ext cx="3072384" cy="164592"/>
+          </a:xfrm>
+          <a:prstGeom prst="rect">
+            <a:avLst/>
+          </a:prstGeom>
+          <a:noFill/>
+          <a:ln/>
+        </p:spPr>
+        <p:txBody>
+          <a:bodyPr wrap="square" lIns="0" tIns="0" rIns="0" bIns="0" rtlCol="0" anchor="t"/>
+          <a:lstStyle/>
+          <a:p>
+            <a:pPr marL="0" indent="0" algn="ctr">
+              <a:buNone/>
+            </a:pPr>
+            <a:r>
+              <a:rPr lang="en-US" sz="950" dirty="0">
+                <a:solidFill>
+                  <a:srgbClr val="000000"/>
+                </a:solidFill>
+                <a:latin typeface="Noto Sans CJK JP" pitchFamily="34" charset="0"/>
+                <a:ea typeface="Noto Sans CJK JP" pitchFamily="34" charset="-122"/>
+                <a:cs typeface="Noto Sans CJK JP" pitchFamily="34" charset="-120"/>
+              </a:rPr>
+              <a:t>（Tool 実行）</a:t>
+            </a:r>
+            <a:endParaRPr lang="en-US" sz="950" dirty="0"/>
+          </a:p>
+        </p:txBody>
+      </p:sp>
+      <p:sp>
+        <p:nvSpPr>
+          <p:cNvPr id="57" name="Shape 55"/>
+          <p:cNvSpPr/>
+          <p:nvPr/>
+        </p:nvSpPr>
+        <p:spPr>
+          <a:xfrm>
+            <a:off x="3872484" y="4946904"/>
+            <a:ext cx="0" cy="155448"/>
+          </a:xfrm>
+          <a:prstGeom prst="line">
+            <a:avLst/>
+          </a:prstGeom>
+          <a:noFill/>
+          <a:ln w="10160">
+            <a:solidFill>
+              <a:srgbClr val="000000"/>
+            </a:solidFill>
+            <a:prstDash val="solid"/>
+          </a:ln>
+        </p:spPr>
+        <p:txBody>
+          <a:bodyPr/>
+          <a:lstStyle/>
+          <a:p>
+            <a:endParaRPr lang="en-JP"/>
+          </a:p>
+        </p:txBody>
+      </p:sp>
+      <p:sp>
+        <p:nvSpPr>
+          <p:cNvPr id="58" name="Shape 56"/>
+          <p:cNvSpPr/>
+          <p:nvPr/>
+        </p:nvSpPr>
+        <p:spPr>
+          <a:xfrm>
+            <a:off x="2729484" y="5102352"/>
+            <a:ext cx="2286000" cy="603504"/>
+          </a:xfrm>
+          <a:prstGeom prst="roundRect">
+            <a:avLst>
+              <a:gd name="adj" fmla="val 9091"/>
+            </a:avLst>
+          </a:prstGeom>
+          <a:solidFill>
+            <a:srgbClr val="FFFFFF"/>
+          </a:solidFill>
+          <a:ln w="15240">
+            <a:solidFill>
+              <a:srgbClr val="648CC8"/>
+            </a:solidFill>
+            <a:prstDash val="solid"/>
+          </a:ln>
+        </p:spPr>
+        <p:txBody>
+          <a:bodyPr/>
+          <a:lstStyle/>
+          <a:p>
+            <a:endParaRPr lang="en-JP"/>
+          </a:p>
+        </p:txBody>
+      </p:sp>
+      <p:sp>
+        <p:nvSpPr>
+          <p:cNvPr id="59" name="Text 57"/>
+          <p:cNvSpPr txBox="1"/>
+          <p:nvPr/>
+        </p:nvSpPr>
+        <p:spPr>
+          <a:xfrm>
+            <a:off x="2729484" y="5148072"/>
+            <a:ext cx="2286000" cy="182880"/>
+          </a:xfrm>
+          <a:prstGeom prst="rect">
+            <a:avLst/>
+          </a:prstGeom>
+          <a:noFill/>
+          <a:ln/>
+        </p:spPr>
+        <p:txBody>
+          <a:bodyPr wrap="square" lIns="0" tIns="0" rIns="0" bIns="0" rtlCol="0" anchor="t"/>
+          <a:lstStyle/>
+          <a:p>
+            <a:pPr marL="0" indent="0" algn="ctr">
+              <a:buNone/>
+            </a:pPr>
+            <a:r>
+              <a:rPr lang="en-US" sz="1050" b="1" dirty="0">
+                <a:solidFill>
+                  <a:srgbClr val="00377D"/>
+                </a:solidFill>
+                <a:latin typeface="Noto Sans CJK JP" pitchFamily="34" charset="0"/>
+                <a:ea typeface="Noto Sans CJK JP" pitchFamily="34" charset="-122"/>
+                <a:cs typeface="Noto Sans CJK JP" pitchFamily="34" charset="-120"/>
+              </a:rPr>
+              <a:t>Tool Output Guardrail</a:t>
+            </a:r>
+            <a:endParaRPr lang="en-US" sz="1050" dirty="0"/>
+          </a:p>
+        </p:txBody>
+      </p:sp>
+      <p:sp>
+        <p:nvSpPr>
+          <p:cNvPr id="60" name="Text 58"/>
+          <p:cNvSpPr txBox="1"/>
+          <p:nvPr/>
+        </p:nvSpPr>
+        <p:spPr>
+          <a:xfrm>
+            <a:off x="2729484" y="5340096"/>
+            <a:ext cx="2286000" cy="155448"/>
+          </a:xfrm>
+          <a:prstGeom prst="rect">
+            <a:avLst/>
+          </a:prstGeom>
+          <a:noFill/>
+          <a:ln/>
+        </p:spPr>
+        <p:txBody>
+          <a:bodyPr wrap="square" lIns="0" tIns="0" rIns="0" bIns="0" rtlCol="0" anchor="t"/>
+          <a:lstStyle/>
+          <a:p>
+            <a:pPr marL="0" indent="0" algn="ctr">
+              <a:buNone/>
+            </a:pPr>
+            <a:r>
+              <a:rPr lang="en-US" sz="850" dirty="0">
+                <a:solidFill>
+                  <a:srgbClr val="000000"/>
+                </a:solidFill>
+                <a:latin typeface="Noto Sans CJK JP" pitchFamily="34" charset="0"/>
+                <a:ea typeface="Noto Sans CJK JP" pitchFamily="34" charset="-122"/>
+                <a:cs typeface="Noto Sans CJK JP" pitchFamily="34" charset="-120"/>
+              </a:rPr>
+              <a:t>出力を検査</a:t>
+            </a:r>
+            <a:endParaRPr lang="en-US" sz="850" dirty="0"/>
+          </a:p>
+        </p:txBody>
+      </p:sp>
+      <p:sp>
+        <p:nvSpPr>
+          <p:cNvPr id="61" name="Text 59"/>
+          <p:cNvSpPr txBox="1"/>
+          <p:nvPr/>
+        </p:nvSpPr>
+        <p:spPr>
+          <a:xfrm>
+            <a:off x="2729484" y="5504688"/>
+            <a:ext cx="2286000" cy="155448"/>
+          </a:xfrm>
+          <a:prstGeom prst="rect">
+            <a:avLst/>
+          </a:prstGeom>
+          <a:noFill/>
+          <a:ln/>
+        </p:spPr>
+        <p:txBody>
+          <a:bodyPr wrap="square" lIns="0" tIns="0" rIns="0" bIns="0" rtlCol="0" anchor="t"/>
+          <a:lstStyle/>
+          <a:p>
+            <a:pPr marL="0" indent="0" algn="ctr">
+              <a:buNone/>
+            </a:pPr>
+            <a:r>
+              <a:rPr lang="en-US" sz="850" dirty="0">
+                <a:solidFill>
+                  <a:srgbClr val="000000"/>
+                </a:solidFill>
+                <a:latin typeface="Noto Sans CJK JP" pitchFamily="34" charset="0"/>
+                <a:ea typeface="Noto Sans CJK JP" pitchFamily="34" charset="-122"/>
+                <a:cs typeface="Noto Sans CJK JP" pitchFamily="34" charset="-120"/>
+              </a:rPr>
+              <a:t>（違反すれば Block / 修正）</a:t>
+            </a:r>
+            <a:endParaRPr lang="en-US" sz="850" dirty="0"/>
+          </a:p>
+        </p:txBody>
+      </p:sp>
+      <p:sp>
+        <p:nvSpPr>
+          <p:cNvPr id="62" name="Shape 60"/>
+          <p:cNvSpPr/>
+          <p:nvPr/>
+        </p:nvSpPr>
+        <p:spPr>
+          <a:xfrm>
+            <a:off x="3872484" y="5705856"/>
+            <a:ext cx="0" cy="128016"/>
+          </a:xfrm>
+          <a:prstGeom prst="line">
+            <a:avLst/>
+          </a:prstGeom>
+          <a:noFill/>
+          <a:ln w="10160">
+            <a:solidFill>
+              <a:srgbClr val="000000"/>
+            </a:solidFill>
+            <a:prstDash val="solid"/>
+          </a:ln>
+        </p:spPr>
+        <p:txBody>
+          <a:bodyPr/>
+          <a:lstStyle/>
+          <a:p>
+            <a:endParaRPr lang="en-JP"/>
+          </a:p>
+        </p:txBody>
+      </p:sp>
+      <p:sp>
+        <p:nvSpPr>
+          <p:cNvPr id="63" name="Shape 61"/>
+          <p:cNvSpPr/>
+          <p:nvPr/>
+        </p:nvSpPr>
+        <p:spPr>
+          <a:xfrm>
+            <a:off x="2820924" y="5833872"/>
+            <a:ext cx="2103120" cy="292608"/>
+          </a:xfrm>
+          <a:prstGeom prst="rect">
+            <a:avLst/>
+          </a:prstGeom>
+          <a:solidFill>
+            <a:srgbClr val="FFFFFF"/>
+          </a:solidFill>
+          <a:ln w="10160">
+            <a:solidFill>
+              <a:srgbClr val="000000"/>
+            </a:solidFill>
+            <a:prstDash val="solid"/>
+          </a:ln>
+        </p:spPr>
+        <p:txBody>
+          <a:bodyPr/>
+          <a:lstStyle/>
+          <a:p>
+            <a:endParaRPr lang="en-JP"/>
+          </a:p>
+        </p:txBody>
+      </p:sp>
+      <p:sp>
+        <p:nvSpPr>
+          <p:cNvPr id="64" name="Text 62"/>
+          <p:cNvSpPr txBox="1"/>
+          <p:nvPr/>
+        </p:nvSpPr>
+        <p:spPr>
+          <a:xfrm>
+            <a:off x="2820924" y="5833872"/>
+            <a:ext cx="2103120" cy="292608"/>
+          </a:xfrm>
+          <a:prstGeom prst="rect">
+            <a:avLst/>
+          </a:prstGeom>
+          <a:noFill/>
+          <a:ln/>
+        </p:spPr>
+        <p:txBody>
+          <a:bodyPr wrap="square" lIns="0" tIns="0" rIns="0" bIns="0" rtlCol="0" anchor="ctr"/>
+          <a:lstStyle/>
+          <a:p>
+            <a:pPr marL="0" indent="0" algn="ctr">
+              <a:buNone/>
+            </a:pPr>
+            <a:r>
+              <a:rPr lang="en-US" sz="1100" b="1" dirty="0">
+                <a:solidFill>
+                  <a:srgbClr val="000000"/>
+                </a:solidFill>
+                <a:latin typeface="Noto Sans CJK JP" pitchFamily="34" charset="0"/>
+                <a:ea typeface="Noto Sans CJK JP" pitchFamily="34" charset="-122"/>
+                <a:cs typeface="Noto Sans CJK JP" pitchFamily="34" charset="-120"/>
+              </a:rPr>
+              <a:t>結果を LLM に返す</a:t>
+            </a:r>
+            <a:endParaRPr lang="en-US" sz="1100" dirty="0"/>
+          </a:p>
+        </p:txBody>
+      </p:sp>
+      <p:sp>
+        <p:nvSpPr>
+          <p:cNvPr id="65" name="Text 63"/>
+          <p:cNvSpPr txBox="1"/>
+          <p:nvPr/>
+        </p:nvSpPr>
+        <p:spPr>
+          <a:xfrm>
+            <a:off x="5577840" y="1216152"/>
+            <a:ext cx="6309360" cy="201168"/>
+          </a:xfrm>
+          <a:prstGeom prst="rect">
+            <a:avLst/>
+          </a:prstGeom>
+          <a:noFill/>
+          <a:ln/>
+        </p:spPr>
+        <p:txBody>
+          <a:bodyPr wrap="square" lIns="0" tIns="0" rIns="0" bIns="0" rtlCol="0" anchor="t"/>
+          <a:lstStyle/>
+          <a:p>
+            <a:pPr marL="0" indent="0" algn="l">
+              <a:buNone/>
+            </a:pPr>
+            <a:r>
+              <a:rPr lang="en-US" sz="1050" b="1" dirty="0">
+                <a:solidFill>
+                  <a:srgbClr val="000000"/>
+                </a:solidFill>
+                <a:latin typeface="Noto Sans CJK JP" pitchFamily="34" charset="0"/>
+                <a:ea typeface="Noto Sans CJK JP" pitchFamily="34" charset="-122"/>
+                <a:cs typeface="Noto Sans CJK JP" pitchFamily="34" charset="-120"/>
+              </a:rPr>
+              <a:t>write_file：重要ファイルの書き込みは承認が必要</a:t>
+            </a:r>
+            <a:endParaRPr lang="en-US" sz="1050" dirty="0"/>
+          </a:p>
+        </p:txBody>
+      </p:sp>
+      <p:sp>
+        <p:nvSpPr>
+          <p:cNvPr id="66" name="Shape 64"/>
+          <p:cNvSpPr/>
+          <p:nvPr/>
+        </p:nvSpPr>
+        <p:spPr>
+          <a:xfrm>
+            <a:off x="5532120" y="1417320"/>
+            <a:ext cx="6382512" cy="2533904"/>
+          </a:xfrm>
+          <a:prstGeom prst="roundRect">
+            <a:avLst>
+              <a:gd name="adj" fmla="val 2165"/>
+            </a:avLst>
+          </a:prstGeom>
+          <a:solidFill>
+            <a:srgbClr val="FAFBF8"/>
+          </a:solidFill>
+          <a:ln w="10160">
+            <a:solidFill>
+              <a:srgbClr val="B1CEA0"/>
+            </a:solidFill>
+            <a:prstDash val="solid"/>
+          </a:ln>
+        </p:spPr>
+        <p:txBody>
+          <a:bodyPr/>
+          <a:lstStyle/>
+          <a:p>
+            <a:endParaRPr lang="en-JP"/>
+          </a:p>
+        </p:txBody>
+      </p:sp>
+      <p:sp>
+        <p:nvSpPr>
+          <p:cNvPr id="67" name="Text 65"/>
+          <p:cNvSpPr txBox="1"/>
+          <p:nvPr/>
+        </p:nvSpPr>
+        <p:spPr>
+          <a:xfrm>
+            <a:off x="5660136" y="1527048"/>
+            <a:ext cx="6144768" cy="2314448"/>
+          </a:xfrm>
+          <a:prstGeom prst="rect">
+            <a:avLst/>
+          </a:prstGeom>
+          <a:noFill/>
+          <a:ln/>
+        </p:spPr>
+        <p:txBody>
+          <a:bodyPr wrap="square" lIns="0" tIns="0" rIns="0" bIns="0" rtlCol="0" anchor="t"/>
+          <a:lstStyle/>
+          <a:p>
+            <a:pPr marL="0" indent="0" algn="l">
+              <a:lnSpc>
+                <a:spcPts val="1130"/>
+              </a:lnSpc>
+              <a:buNone/>
+            </a:pPr>
+            <a:r>
+              <a:rPr lang="en-US" sz="920" dirty="0">
+                <a:solidFill>
+                  <a:srgbClr val="0000A0"/>
+                </a:solidFill>
+                <a:latin typeface="DejaVu Sans Mono" pitchFamily="34" charset="0"/>
+                <a:ea typeface="DejaVu Sans Mono" pitchFamily="34" charset="-122"/>
+                <a:cs typeface="DejaVu Sans Mono" pitchFamily="34" charset="-120"/>
+              </a:rPr>
+              <a:t>@function_tool</a:t>
+            </a:r>
+            <a:r>
+              <a:rPr lang="en-US" sz="920" dirty="0">
+                <a:solidFill>
+                  <a:srgbClr val="282D34"/>
+                </a:solidFill>
+                <a:latin typeface="DejaVu Sans Mono" pitchFamily="34" charset="0"/>
+                <a:ea typeface="DejaVu Sans Mono" pitchFamily="34" charset="-122"/>
+                <a:cs typeface="DejaVu Sans Mono" pitchFamily="34" charset="-120"/>
+              </a:rPr>
+              <a:t>(</a:t>
+            </a:r>
+            <a:endParaRPr lang="en-US" sz="920" dirty="0"/>
+          </a:p>
+          <a:p>
+            <a:pPr marL="0" indent="0" algn="l">
+              <a:lnSpc>
+                <a:spcPts val="1130"/>
+              </a:lnSpc>
+              <a:buNone/>
+            </a:pPr>
+            <a:r>
+              <a:rPr lang="en-US" sz="920" dirty="0">
+                <a:solidFill>
+                  <a:srgbClr val="282D34"/>
+                </a:solidFill>
+                <a:latin typeface="DejaVu Sans Mono" pitchFamily="34" charset="0"/>
+                <a:ea typeface="DejaVu Sans Mono" pitchFamily="34" charset="-122"/>
+                <a:cs typeface="DejaVu Sans Mono" pitchFamily="34" charset="-120"/>
+              </a:rPr>
+              <a:t>    needs_approval=needs_approval,            </a:t>
+            </a:r>
+            <a:r>
+              <a:rPr lang="en-US" sz="920" dirty="0">
+                <a:solidFill>
+                  <a:srgbClr val="26782A"/>
+                </a:solidFill>
+                <a:latin typeface="DejaVu Sans Mono" pitchFamily="34" charset="0"/>
+                <a:ea typeface="DejaVu Sans Mono" pitchFamily="34" charset="-122"/>
+                <a:cs typeface="DejaVu Sans Mono" pitchFamily="34" charset="-120"/>
+              </a:rPr>
+              <a:t># 承認チェック</a:t>
+            </a:r>
+            <a:endParaRPr lang="en-US" sz="920" dirty="0"/>
+          </a:p>
+          <a:p>
+            <a:pPr marL="0" indent="0" algn="l">
+              <a:lnSpc>
+                <a:spcPts val="1130"/>
+              </a:lnSpc>
+              <a:buNone/>
+            </a:pPr>
+            <a:r>
+              <a:rPr lang="en-US" sz="920" dirty="0">
+                <a:solidFill>
+                  <a:srgbClr val="282D34"/>
+                </a:solidFill>
+                <a:latin typeface="DejaVu Sans Mono" pitchFamily="34" charset="0"/>
+                <a:ea typeface="DejaVu Sans Mono" pitchFamily="34" charset="-122"/>
+                <a:cs typeface="DejaVu Sans Mono" pitchFamily="34" charset="-120"/>
+              </a:rPr>
+              <a:t>    tool_input_guardrails=[write_guardrail],  </a:t>
+            </a:r>
+            <a:r>
+              <a:rPr lang="en-US" sz="920" dirty="0">
+                <a:solidFill>
+                  <a:srgbClr val="26782A"/>
+                </a:solidFill>
+                <a:latin typeface="DejaVu Sans Mono" pitchFamily="34" charset="0"/>
+                <a:ea typeface="DejaVu Sans Mono" pitchFamily="34" charset="-122"/>
+                <a:cs typeface="DejaVu Sans Mono" pitchFamily="34" charset="-120"/>
+              </a:rPr>
+              <a:t># 入力ガードレール</a:t>
+            </a:r>
+            <a:endParaRPr lang="en-US" sz="920" dirty="0"/>
+          </a:p>
+          <a:p>
+            <a:pPr marL="0" indent="0" algn="l">
+              <a:lnSpc>
+                <a:spcPts val="1130"/>
+              </a:lnSpc>
+              <a:buNone/>
+            </a:pPr>
+            <a:r>
+              <a:rPr lang="en-US" sz="920" dirty="0">
+                <a:solidFill>
+                  <a:srgbClr val="282D34"/>
+                </a:solidFill>
+                <a:latin typeface="DejaVu Sans Mono" pitchFamily="34" charset="0"/>
+                <a:ea typeface="DejaVu Sans Mono" pitchFamily="34" charset="-122"/>
+                <a:cs typeface="DejaVu Sans Mono" pitchFamily="34" charset="-120"/>
+              </a:rPr>
+              <a:t>)</a:t>
+            </a:r>
+            <a:endParaRPr lang="en-US" sz="920" dirty="0"/>
+          </a:p>
+          <a:p>
+            <a:pPr marL="0" indent="0" algn="l">
+              <a:lnSpc>
+                <a:spcPts val="1130"/>
+              </a:lnSpc>
+              <a:buNone/>
+            </a:pPr>
+            <a:r>
+              <a:rPr lang="en-US" sz="920" b="1" dirty="0">
+                <a:solidFill>
+                  <a:srgbClr val="0000A0"/>
+                </a:solidFill>
+                <a:latin typeface="DejaVu Sans Mono" pitchFamily="34" charset="0"/>
+                <a:ea typeface="DejaVu Sans Mono" pitchFamily="34" charset="-122"/>
+                <a:cs typeface="DejaVu Sans Mono" pitchFamily="34" charset="-120"/>
+              </a:rPr>
+              <a:t>def</a:t>
+            </a:r>
+            <a:r>
+              <a:rPr lang="en-US" sz="920" dirty="0">
+                <a:solidFill>
+                  <a:srgbClr val="282D34"/>
+                </a:solidFill>
+                <a:latin typeface="DejaVu Sans Mono" pitchFamily="34" charset="0"/>
+                <a:ea typeface="DejaVu Sans Mono" pitchFamily="34" charset="-122"/>
+                <a:cs typeface="DejaVu Sans Mono" pitchFamily="34" charset="-120"/>
+              </a:rPr>
+              <a:t> </a:t>
+            </a:r>
+            <a:r>
+              <a:rPr lang="en-US" sz="920" b="1" dirty="0">
+                <a:solidFill>
+                  <a:srgbClr val="0000A0"/>
+                </a:solidFill>
+                <a:latin typeface="DejaVu Sans Mono" pitchFamily="34" charset="0"/>
+                <a:ea typeface="DejaVu Sans Mono" pitchFamily="34" charset="-122"/>
+                <a:cs typeface="DejaVu Sans Mono" pitchFamily="34" charset="-120"/>
+              </a:rPr>
+              <a:t>write_file</a:t>
+            </a:r>
+            <a:r>
+              <a:rPr lang="en-US" sz="920" dirty="0">
+                <a:solidFill>
+                  <a:srgbClr val="282D34"/>
+                </a:solidFill>
+                <a:latin typeface="DejaVu Sans Mono" pitchFamily="34" charset="0"/>
+                <a:ea typeface="DejaVu Sans Mono" pitchFamily="34" charset="-122"/>
+                <a:cs typeface="DejaVu Sans Mono" pitchFamily="34" charset="-120"/>
+              </a:rPr>
+              <a:t>(filename: str, content: str): ...</a:t>
+            </a:r>
+            <a:endParaRPr lang="en-US" sz="920" dirty="0"/>
+          </a:p>
+          <a:p>
+            <a:pPr marL="0" indent="0" algn="l">
+              <a:lnSpc>
+                <a:spcPts val="1130"/>
+              </a:lnSpc>
+              <a:buNone/>
+            </a:pPr>
+            <a:r>
+              <a:rPr lang="en-US" sz="920" dirty="0">
+                <a:solidFill>
+                  <a:srgbClr val="282D34"/>
+                </a:solidFill>
+                <a:latin typeface="DejaVu Sans Mono" pitchFamily="34" charset="0"/>
+                <a:ea typeface="DejaVu Sans Mono" pitchFamily="34" charset="-122"/>
+                <a:cs typeface="DejaVu Sans Mono" pitchFamily="34" charset="-120"/>
+              </a:rPr>
+              <a:t> </a:t>
+            </a:r>
+            <a:endParaRPr lang="en-US" sz="920" dirty="0"/>
+          </a:p>
+          <a:p>
+            <a:pPr marL="0" indent="0" algn="l">
+              <a:lnSpc>
+                <a:spcPts val="1130"/>
+              </a:lnSpc>
+              <a:buNone/>
+            </a:pPr>
+            <a:r>
+              <a:rPr lang="en-US" sz="920" b="1" dirty="0">
+                <a:solidFill>
+                  <a:srgbClr val="0000A0"/>
+                </a:solidFill>
+                <a:latin typeface="DejaVu Sans Mono" pitchFamily="34" charset="0"/>
+                <a:ea typeface="DejaVu Sans Mono" pitchFamily="34" charset="-122"/>
+                <a:cs typeface="DejaVu Sans Mono" pitchFamily="34" charset="-120"/>
+              </a:rPr>
+              <a:t>async</a:t>
+            </a:r>
+            <a:r>
+              <a:rPr lang="en-US" sz="920" dirty="0">
+                <a:solidFill>
+                  <a:srgbClr val="282D34"/>
+                </a:solidFill>
+                <a:latin typeface="DejaVu Sans Mono" pitchFamily="34" charset="0"/>
+                <a:ea typeface="DejaVu Sans Mono" pitchFamily="34" charset="-122"/>
+                <a:cs typeface="DejaVu Sans Mono" pitchFamily="34" charset="-120"/>
+              </a:rPr>
+              <a:t> </a:t>
+            </a:r>
+            <a:r>
+              <a:rPr lang="en-US" sz="920" b="1" dirty="0">
+                <a:solidFill>
+                  <a:srgbClr val="0000A0"/>
+                </a:solidFill>
+                <a:latin typeface="DejaVu Sans Mono" pitchFamily="34" charset="0"/>
+                <a:ea typeface="DejaVu Sans Mono" pitchFamily="34" charset="-122"/>
+                <a:cs typeface="DejaVu Sans Mono" pitchFamily="34" charset="-120"/>
+              </a:rPr>
+              <a:t>def</a:t>
+            </a:r>
+            <a:r>
+              <a:rPr lang="en-US" sz="920" dirty="0">
+                <a:solidFill>
+                  <a:srgbClr val="282D34"/>
+                </a:solidFill>
+                <a:latin typeface="DejaVu Sans Mono" pitchFamily="34" charset="0"/>
+                <a:ea typeface="DejaVu Sans Mono" pitchFamily="34" charset="-122"/>
+                <a:cs typeface="DejaVu Sans Mono" pitchFamily="34" charset="-120"/>
+              </a:rPr>
+              <a:t> </a:t>
+            </a:r>
+            <a:r>
+              <a:rPr lang="en-US" sz="920" b="1" dirty="0">
+                <a:solidFill>
+                  <a:srgbClr val="0000A0"/>
+                </a:solidFill>
+                <a:latin typeface="DejaVu Sans Mono" pitchFamily="34" charset="0"/>
+                <a:ea typeface="DejaVu Sans Mono" pitchFamily="34" charset="-122"/>
+                <a:cs typeface="DejaVu Sans Mono" pitchFamily="34" charset="-120"/>
+              </a:rPr>
+              <a:t>needs_approval</a:t>
+            </a:r>
+            <a:r>
+              <a:rPr lang="en-US" sz="920" dirty="0">
+                <a:solidFill>
+                  <a:srgbClr val="282D34"/>
+                </a:solidFill>
+                <a:latin typeface="DejaVu Sans Mono" pitchFamily="34" charset="0"/>
+                <a:ea typeface="DejaVu Sans Mono" pitchFamily="34" charset="-122"/>
+                <a:cs typeface="DejaVu Sans Mono" pitchFamily="34" charset="-120"/>
+              </a:rPr>
+              <a:t>(ctx, params, tool) -&gt; bool:</a:t>
+            </a:r>
+            <a:endParaRPr lang="en-US" sz="920" dirty="0"/>
+          </a:p>
+          <a:p>
+            <a:pPr marL="0" indent="0" algn="l">
+              <a:lnSpc>
+                <a:spcPts val="1130"/>
+              </a:lnSpc>
+              <a:buNone/>
+            </a:pPr>
+            <a:r>
+              <a:rPr lang="en-US" sz="920" dirty="0">
+                <a:solidFill>
+                  <a:srgbClr val="282D34"/>
+                </a:solidFill>
+                <a:latin typeface="DejaVu Sans Mono" pitchFamily="34" charset="0"/>
+                <a:ea typeface="DejaVu Sans Mono" pitchFamily="34" charset="-122"/>
+                <a:cs typeface="DejaVu Sans Mono" pitchFamily="34" charset="-120"/>
+              </a:rPr>
+              <a:t>    </a:t>
+            </a:r>
+            <a:r>
+              <a:rPr lang="en-US" sz="920" dirty="0">
+                <a:solidFill>
+                  <a:srgbClr val="26782A"/>
+                </a:solidFill>
+                <a:latin typeface="DejaVu Sans Mono" pitchFamily="34" charset="0"/>
+                <a:ea typeface="DejaVu Sans Mono" pitchFamily="34" charset="-122"/>
+                <a:cs typeface="DejaVu Sans Mono" pitchFamily="34" charset="-120"/>
+              </a:rPr>
+              <a:t># 例：important.txt の場合のみ承認を要求</a:t>
+            </a:r>
+            <a:endParaRPr lang="en-US" sz="920" dirty="0"/>
+          </a:p>
+          <a:p>
+            <a:pPr marL="0" indent="0" algn="l">
+              <a:lnSpc>
+                <a:spcPts val="1130"/>
+              </a:lnSpc>
+              <a:buNone/>
+            </a:pPr>
+            <a:r>
+              <a:rPr lang="en-US" sz="920" dirty="0">
+                <a:solidFill>
+                  <a:srgbClr val="282D34"/>
+                </a:solidFill>
+                <a:latin typeface="DejaVu Sans Mono" pitchFamily="34" charset="0"/>
+                <a:ea typeface="DejaVu Sans Mono" pitchFamily="34" charset="-122"/>
+                <a:cs typeface="DejaVu Sans Mono" pitchFamily="34" charset="-120"/>
+              </a:rPr>
+              <a:t>    </a:t>
+            </a:r>
+            <a:r>
+              <a:rPr lang="en-US" sz="920" b="1" dirty="0">
+                <a:solidFill>
+                  <a:srgbClr val="0000A0"/>
+                </a:solidFill>
+                <a:latin typeface="DejaVu Sans Mono" pitchFamily="34" charset="0"/>
+                <a:ea typeface="DejaVu Sans Mono" pitchFamily="34" charset="-122"/>
+                <a:cs typeface="DejaVu Sans Mono" pitchFamily="34" charset="-120"/>
+              </a:rPr>
+              <a:t>return</a:t>
+            </a:r>
+            <a:r>
+              <a:rPr lang="en-US" sz="920" dirty="0">
+                <a:solidFill>
+                  <a:srgbClr val="282D34"/>
+                </a:solidFill>
+                <a:latin typeface="DejaVu Sans Mono" pitchFamily="34" charset="0"/>
+                <a:ea typeface="DejaVu Sans Mono" pitchFamily="34" charset="-122"/>
+                <a:cs typeface="DejaVu Sans Mono" pitchFamily="34" charset="-120"/>
+              </a:rPr>
+              <a:t> params[</a:t>
+            </a:r>
+            <a:r>
+              <a:rPr lang="en-US" sz="920" dirty="0">
+                <a:solidFill>
+                  <a:srgbClr val="910000"/>
+                </a:solidFill>
+                <a:latin typeface="DejaVu Sans Mono" pitchFamily="34" charset="0"/>
+                <a:ea typeface="DejaVu Sans Mono" pitchFamily="34" charset="-122"/>
+                <a:cs typeface="DejaVu Sans Mono" pitchFamily="34" charset="-120"/>
+              </a:rPr>
+              <a:t>"filename"</a:t>
+            </a:r>
+            <a:r>
+              <a:rPr lang="en-US" sz="920" dirty="0">
+                <a:solidFill>
+                  <a:srgbClr val="282D34"/>
+                </a:solidFill>
+                <a:latin typeface="DejaVu Sans Mono" pitchFamily="34" charset="0"/>
+                <a:ea typeface="DejaVu Sans Mono" pitchFamily="34" charset="-122"/>
+                <a:cs typeface="DejaVu Sans Mono" pitchFamily="34" charset="-120"/>
+              </a:rPr>
+              <a:t>] == </a:t>
+            </a:r>
+            <a:r>
+              <a:rPr lang="en-US" sz="920" dirty="0">
+                <a:solidFill>
+                  <a:srgbClr val="910000"/>
+                </a:solidFill>
+                <a:latin typeface="DejaVu Sans Mono" pitchFamily="34" charset="0"/>
+                <a:ea typeface="DejaVu Sans Mono" pitchFamily="34" charset="-122"/>
+                <a:cs typeface="DejaVu Sans Mono" pitchFamily="34" charset="-120"/>
+              </a:rPr>
+              <a:t>"important.txt"</a:t>
+            </a:r>
+            <a:endParaRPr lang="en-US" sz="920" dirty="0"/>
+          </a:p>
+          <a:p>
+            <a:pPr marL="0" indent="0" algn="l">
+              <a:lnSpc>
+                <a:spcPts val="1130"/>
+              </a:lnSpc>
+              <a:buNone/>
+            </a:pPr>
+            <a:r>
+              <a:rPr lang="en-US" sz="920" dirty="0">
+                <a:solidFill>
+                  <a:srgbClr val="282D34"/>
+                </a:solidFill>
+                <a:latin typeface="DejaVu Sans Mono" pitchFamily="34" charset="0"/>
+                <a:ea typeface="DejaVu Sans Mono" pitchFamily="34" charset="-122"/>
+                <a:cs typeface="DejaVu Sans Mono" pitchFamily="34" charset="-120"/>
+              </a:rPr>
+              <a:t> </a:t>
+            </a:r>
+            <a:endParaRPr lang="en-US" sz="920" dirty="0"/>
+          </a:p>
+          <a:p>
+            <a:pPr marL="0" indent="0" algn="l">
+              <a:lnSpc>
+                <a:spcPts val="1130"/>
+              </a:lnSpc>
+              <a:buNone/>
+            </a:pPr>
+            <a:r>
+              <a:rPr lang="en-US" sz="920" dirty="0">
+                <a:solidFill>
+                  <a:srgbClr val="0000A0"/>
+                </a:solidFill>
+                <a:latin typeface="DejaVu Sans Mono" pitchFamily="34" charset="0"/>
+                <a:ea typeface="DejaVu Sans Mono" pitchFamily="34" charset="-122"/>
+                <a:cs typeface="DejaVu Sans Mono" pitchFamily="34" charset="-120"/>
+              </a:rPr>
+              <a:t>@tool_input_guardrail</a:t>
+            </a:r>
+            <a:endParaRPr lang="en-US" sz="920" dirty="0"/>
+          </a:p>
+          <a:p>
+            <a:pPr marL="0" indent="0" algn="l">
+              <a:lnSpc>
+                <a:spcPts val="1130"/>
+              </a:lnSpc>
+              <a:buNone/>
+            </a:pPr>
+            <a:r>
+              <a:rPr lang="en-US" sz="920" b="1" dirty="0">
+                <a:solidFill>
+                  <a:srgbClr val="0000A0"/>
+                </a:solidFill>
+                <a:latin typeface="DejaVu Sans Mono" pitchFamily="34" charset="0"/>
+                <a:ea typeface="DejaVu Sans Mono" pitchFamily="34" charset="-122"/>
+                <a:cs typeface="DejaVu Sans Mono" pitchFamily="34" charset="-120"/>
+              </a:rPr>
+              <a:t>def</a:t>
+            </a:r>
+            <a:r>
+              <a:rPr lang="en-US" sz="920" dirty="0">
+                <a:solidFill>
+                  <a:srgbClr val="282D34"/>
+                </a:solidFill>
+                <a:latin typeface="DejaVu Sans Mono" pitchFamily="34" charset="0"/>
+                <a:ea typeface="DejaVu Sans Mono" pitchFamily="34" charset="-122"/>
+                <a:cs typeface="DejaVu Sans Mono" pitchFamily="34" charset="-120"/>
+              </a:rPr>
+              <a:t> </a:t>
+            </a:r>
+            <a:r>
+              <a:rPr lang="en-US" sz="920" b="1" dirty="0">
+                <a:solidFill>
+                  <a:srgbClr val="0000A0"/>
+                </a:solidFill>
+                <a:latin typeface="DejaVu Sans Mono" pitchFamily="34" charset="0"/>
+                <a:ea typeface="DejaVu Sans Mono" pitchFamily="34" charset="-122"/>
+                <a:cs typeface="DejaVu Sans Mono" pitchFamily="34" charset="-120"/>
+              </a:rPr>
+              <a:t>write_guardrail</a:t>
+            </a:r>
+            <a:r>
+              <a:rPr lang="en-US" sz="920" dirty="0">
+                <a:solidFill>
+                  <a:srgbClr val="282D34"/>
+                </a:solidFill>
+                <a:latin typeface="DejaVu Sans Mono" pitchFamily="34" charset="0"/>
+                <a:ea typeface="DejaVu Sans Mono" pitchFamily="34" charset="-122"/>
+                <a:cs typeface="DejaVu Sans Mono" pitchFamily="34" charset="-120"/>
+              </a:rPr>
+              <a:t>(ctx, tool, input_data):</a:t>
+            </a:r>
+            <a:endParaRPr lang="en-US" sz="920" dirty="0"/>
+          </a:p>
+          <a:p>
+            <a:pPr marL="0" indent="0" algn="l">
+              <a:lnSpc>
+                <a:spcPts val="1130"/>
+              </a:lnSpc>
+              <a:buNone/>
+            </a:pPr>
+            <a:r>
+              <a:rPr lang="en-US" sz="920" dirty="0">
+                <a:solidFill>
+                  <a:srgbClr val="282D34"/>
+                </a:solidFill>
+                <a:latin typeface="DejaVu Sans Mono" pitchFamily="34" charset="0"/>
+                <a:ea typeface="DejaVu Sans Mono" pitchFamily="34" charset="-122"/>
+                <a:cs typeface="DejaVu Sans Mono" pitchFamily="34" charset="-120"/>
+              </a:rPr>
+              <a:t>    </a:t>
+            </a:r>
+            <a:r>
+              <a:rPr lang="en-US" sz="920" dirty="0">
+                <a:solidFill>
+                  <a:srgbClr val="26782A"/>
+                </a:solidFill>
+                <a:latin typeface="DejaVu Sans Mono" pitchFamily="34" charset="0"/>
+                <a:ea typeface="DejaVu Sans Mono" pitchFamily="34" charset="-122"/>
+                <a:cs typeface="DejaVu Sans Mono" pitchFamily="34" charset="-120"/>
+              </a:rPr>
+              <a:t># 例：ファイル名の形式やサイズを検査</a:t>
+            </a:r>
+            <a:endParaRPr lang="en-US" sz="920" dirty="0"/>
+          </a:p>
+          <a:p>
+            <a:pPr marL="0" indent="0" algn="l">
+              <a:lnSpc>
+                <a:spcPts val="1130"/>
+              </a:lnSpc>
+              <a:buNone/>
+            </a:pPr>
+            <a:r>
+              <a:rPr lang="en-US" sz="920" dirty="0">
+                <a:solidFill>
+                  <a:srgbClr val="282D34"/>
+                </a:solidFill>
+                <a:latin typeface="DejaVu Sans Mono" pitchFamily="34" charset="0"/>
+                <a:ea typeface="DejaVu Sans Mono" pitchFamily="34" charset="-122"/>
+                <a:cs typeface="DejaVu Sans Mono" pitchFamily="34" charset="-120"/>
+              </a:rPr>
+              <a:t>    </a:t>
+            </a:r>
+            <a:r>
+              <a:rPr lang="en-US" sz="920" b="1" dirty="0">
+                <a:solidFill>
+                  <a:srgbClr val="0000A0"/>
+                </a:solidFill>
+                <a:latin typeface="DejaVu Sans Mono" pitchFamily="34" charset="0"/>
+                <a:ea typeface="DejaVu Sans Mono" pitchFamily="34" charset="-122"/>
+                <a:cs typeface="DejaVu Sans Mono" pitchFamily="34" charset="-120"/>
+              </a:rPr>
+              <a:t>if</a:t>
+            </a:r>
+            <a:r>
+              <a:rPr lang="en-US" sz="920" dirty="0">
+                <a:solidFill>
+                  <a:srgbClr val="282D34"/>
+                </a:solidFill>
+                <a:latin typeface="DejaVu Sans Mono" pitchFamily="34" charset="0"/>
+                <a:ea typeface="DejaVu Sans Mono" pitchFamily="34" charset="-122"/>
+                <a:cs typeface="DejaVu Sans Mono" pitchFamily="34" charset="-120"/>
+              </a:rPr>
+              <a:t> </a:t>
+            </a:r>
+            <a:r>
+              <a:rPr lang="en-US" sz="920" b="1" dirty="0">
+                <a:solidFill>
+                  <a:srgbClr val="0000A0"/>
+                </a:solidFill>
+                <a:latin typeface="DejaVu Sans Mono" pitchFamily="34" charset="0"/>
+                <a:ea typeface="DejaVu Sans Mono" pitchFamily="34" charset="-122"/>
+                <a:cs typeface="DejaVu Sans Mono" pitchFamily="34" charset="-120"/>
+              </a:rPr>
+              <a:t>not</a:t>
+            </a:r>
+            <a:r>
+              <a:rPr lang="en-US" sz="920" dirty="0">
+                <a:solidFill>
+                  <a:srgbClr val="282D34"/>
+                </a:solidFill>
+                <a:latin typeface="DejaVu Sans Mono" pitchFamily="34" charset="0"/>
+                <a:ea typeface="DejaVu Sans Mono" pitchFamily="34" charset="-122"/>
+                <a:cs typeface="DejaVu Sans Mono" pitchFamily="34" charset="-120"/>
+              </a:rPr>
+              <a:t> input_data.get(</a:t>
+            </a:r>
+            <a:r>
+              <a:rPr lang="en-US" sz="920" dirty="0">
+                <a:solidFill>
+                  <a:srgbClr val="910000"/>
+                </a:solidFill>
+                <a:latin typeface="DejaVu Sans Mono" pitchFamily="34" charset="0"/>
+                <a:ea typeface="DejaVu Sans Mono" pitchFamily="34" charset="-122"/>
+                <a:cs typeface="DejaVu Sans Mono" pitchFamily="34" charset="-120"/>
+              </a:rPr>
+              <a:t>"filename"</a:t>
+            </a:r>
+            <a:r>
+              <a:rPr lang="en-US" sz="920" dirty="0">
+                <a:solidFill>
+                  <a:srgbClr val="282D34"/>
+                </a:solidFill>
+                <a:latin typeface="DejaVu Sans Mono" pitchFamily="34" charset="0"/>
+                <a:ea typeface="DejaVu Sans Mono" pitchFamily="34" charset="-122"/>
+                <a:cs typeface="DejaVu Sans Mono" pitchFamily="34" charset="-120"/>
+              </a:rPr>
+              <a:t>):</a:t>
+            </a:r>
+            <a:endParaRPr lang="en-US" sz="920" dirty="0"/>
+          </a:p>
+          <a:p>
+            <a:pPr marL="0" indent="0" algn="l">
+              <a:lnSpc>
+                <a:spcPts val="1130"/>
+              </a:lnSpc>
+              <a:buNone/>
+            </a:pPr>
+            <a:r>
+              <a:rPr lang="en-US" sz="920" dirty="0">
+                <a:solidFill>
+                  <a:srgbClr val="282D34"/>
+                </a:solidFill>
+                <a:latin typeface="DejaVu Sans Mono" pitchFamily="34" charset="0"/>
+                <a:ea typeface="DejaVu Sans Mono" pitchFamily="34" charset="-122"/>
+                <a:cs typeface="DejaVu Sans Mono" pitchFamily="34" charset="-120"/>
+              </a:rPr>
+              <a:t>        </a:t>
+            </a:r>
+            <a:r>
+              <a:rPr lang="en-US" sz="920" b="1" dirty="0">
+                <a:solidFill>
+                  <a:srgbClr val="0000A0"/>
+                </a:solidFill>
+                <a:latin typeface="DejaVu Sans Mono" pitchFamily="34" charset="0"/>
+                <a:ea typeface="DejaVu Sans Mono" pitchFamily="34" charset="-122"/>
+                <a:cs typeface="DejaVu Sans Mono" pitchFamily="34" charset="-120"/>
+              </a:rPr>
+              <a:t>return</a:t>
+            </a:r>
+            <a:r>
+              <a:rPr lang="en-US" sz="920" dirty="0">
+                <a:solidFill>
+                  <a:srgbClr val="282D34"/>
+                </a:solidFill>
+                <a:latin typeface="DejaVu Sans Mono" pitchFamily="34" charset="0"/>
+                <a:ea typeface="DejaVu Sans Mono" pitchFamily="34" charset="-122"/>
+                <a:cs typeface="DejaVu Sans Mono" pitchFamily="34" charset="-120"/>
+              </a:rPr>
+              <a:t> reject_content(</a:t>
+            </a:r>
+            <a:r>
+              <a:rPr lang="en-US" sz="920" dirty="0">
+                <a:solidFill>
+                  <a:srgbClr val="910000"/>
+                </a:solidFill>
+                <a:latin typeface="DejaVu Sans Mono" pitchFamily="34" charset="0"/>
+                <a:ea typeface="DejaVu Sans Mono" pitchFamily="34" charset="-122"/>
+                <a:cs typeface="DejaVu Sans Mono" pitchFamily="34" charset="-120"/>
+              </a:rPr>
+              <a:t>"filename is required"</a:t>
+            </a:r>
+            <a:r>
+              <a:rPr lang="en-US" sz="920" dirty="0">
+                <a:solidFill>
+                  <a:srgbClr val="282D34"/>
+                </a:solidFill>
+                <a:latin typeface="DejaVu Sans Mono" pitchFamily="34" charset="0"/>
+                <a:ea typeface="DejaVu Sans Mono" pitchFamily="34" charset="-122"/>
+                <a:cs typeface="DejaVu Sans Mono" pitchFamily="34" charset="-120"/>
+              </a:rPr>
+              <a:t>)</a:t>
+            </a:r>
+            <a:endParaRPr lang="en-US" sz="920" dirty="0"/>
+          </a:p>
+          <a:p>
+            <a:pPr marL="0" indent="0" algn="l">
+              <a:lnSpc>
+                <a:spcPts val="1130"/>
+              </a:lnSpc>
+              <a:buNone/>
+            </a:pPr>
+            <a:r>
+              <a:rPr lang="en-US" sz="920" dirty="0">
+                <a:solidFill>
+                  <a:srgbClr val="282D34"/>
+                </a:solidFill>
+                <a:latin typeface="DejaVu Sans Mono" pitchFamily="34" charset="0"/>
+                <a:ea typeface="DejaVu Sans Mono" pitchFamily="34" charset="-122"/>
+                <a:cs typeface="DejaVu Sans Mono" pitchFamily="34" charset="-120"/>
+              </a:rPr>
+              <a:t>    </a:t>
+            </a:r>
+            <a:r>
+              <a:rPr lang="en-US" sz="920" b="1" dirty="0">
+                <a:solidFill>
+                  <a:srgbClr val="0000A0"/>
+                </a:solidFill>
+                <a:latin typeface="DejaVu Sans Mono" pitchFamily="34" charset="0"/>
+                <a:ea typeface="DejaVu Sans Mono" pitchFamily="34" charset="-122"/>
+                <a:cs typeface="DejaVu Sans Mono" pitchFamily="34" charset="-120"/>
+              </a:rPr>
+              <a:t>return</a:t>
+            </a:r>
+            <a:r>
+              <a:rPr lang="en-US" sz="920" dirty="0">
+                <a:solidFill>
+                  <a:srgbClr val="282D34"/>
+                </a:solidFill>
+                <a:latin typeface="DejaVu Sans Mono" pitchFamily="34" charset="0"/>
+                <a:ea typeface="DejaVu Sans Mono" pitchFamily="34" charset="-122"/>
+                <a:cs typeface="DejaVu Sans Mono" pitchFamily="34" charset="-120"/>
+              </a:rPr>
+              <a:t> allow()</a:t>
+            </a:r>
+            <a:endParaRPr lang="en-US" sz="920" dirty="0"/>
+          </a:p>
+        </p:txBody>
+      </p:sp>
+      <p:sp>
+        <p:nvSpPr>
+          <p:cNvPr id="68" name="Text 66"/>
+          <p:cNvSpPr txBox="1"/>
+          <p:nvPr/>
+        </p:nvSpPr>
+        <p:spPr>
+          <a:xfrm>
+            <a:off x="5577840" y="4079240"/>
+            <a:ext cx="6309360" cy="201168"/>
+          </a:xfrm>
+          <a:prstGeom prst="rect">
+            <a:avLst/>
+          </a:prstGeom>
+          <a:noFill/>
+          <a:ln/>
+        </p:spPr>
+        <p:txBody>
+          <a:bodyPr wrap="square" lIns="0" tIns="0" rIns="0" bIns="0" rtlCol="0" anchor="t"/>
+          <a:lstStyle/>
+          <a:p>
+            <a:pPr marL="0" indent="0" algn="l">
+              <a:buNone/>
+            </a:pPr>
+            <a:r>
+              <a:rPr lang="en-US" sz="1050" b="1" dirty="0">
+                <a:solidFill>
+                  <a:srgbClr val="000000"/>
+                </a:solidFill>
+                <a:latin typeface="Noto Sans CJK JP" pitchFamily="34" charset="0"/>
+                <a:ea typeface="Noto Sans CJK JP" pitchFamily="34" charset="-122"/>
+                <a:cs typeface="Noto Sans CJK JP" pitchFamily="34" charset="-120"/>
+              </a:rPr>
+              <a:t>delete_file：重要ファイルの削除は禁止</a:t>
+            </a:r>
+            <a:endParaRPr lang="en-US" sz="1050" dirty="0"/>
+          </a:p>
+        </p:txBody>
+      </p:sp>
+      <p:sp>
+        <p:nvSpPr>
+          <p:cNvPr id="69" name="Shape 67"/>
+          <p:cNvSpPr/>
+          <p:nvPr/>
+        </p:nvSpPr>
+        <p:spPr>
+          <a:xfrm>
+            <a:off x="5532120" y="4298696"/>
+            <a:ext cx="6382512" cy="1816354"/>
+          </a:xfrm>
+          <a:prstGeom prst="roundRect">
+            <a:avLst>
+              <a:gd name="adj" fmla="val 3021"/>
+            </a:avLst>
+          </a:prstGeom>
+          <a:solidFill>
+            <a:srgbClr val="FAFBF8"/>
+          </a:solidFill>
+          <a:ln w="10160">
+            <a:solidFill>
+              <a:srgbClr val="B1CEA0"/>
+            </a:solidFill>
+            <a:prstDash val="solid"/>
+          </a:ln>
+        </p:spPr>
+        <p:txBody>
+          <a:bodyPr/>
+          <a:lstStyle/>
+          <a:p>
+            <a:endParaRPr lang="en-JP"/>
+          </a:p>
+        </p:txBody>
+      </p:sp>
+      <p:sp>
+        <p:nvSpPr>
+          <p:cNvPr id="70" name="Text 68"/>
+          <p:cNvSpPr txBox="1"/>
+          <p:nvPr/>
+        </p:nvSpPr>
+        <p:spPr>
+          <a:xfrm>
+            <a:off x="5660136" y="4408424"/>
+            <a:ext cx="6144768" cy="1596898"/>
+          </a:xfrm>
+          <a:prstGeom prst="rect">
+            <a:avLst/>
+          </a:prstGeom>
+          <a:noFill/>
+          <a:ln/>
+        </p:spPr>
+        <p:txBody>
+          <a:bodyPr wrap="square" lIns="0" tIns="0" rIns="0" bIns="0" rtlCol="0" anchor="t"/>
+          <a:lstStyle/>
+          <a:p>
+            <a:pPr marL="0" indent="0" algn="l">
+              <a:lnSpc>
+                <a:spcPts val="1130"/>
+              </a:lnSpc>
+              <a:buNone/>
+            </a:pPr>
+            <a:r>
+              <a:rPr lang="en-US" sz="920" dirty="0">
+                <a:solidFill>
+                  <a:srgbClr val="0000A0"/>
+                </a:solidFill>
+                <a:latin typeface="DejaVu Sans Mono" pitchFamily="34" charset="0"/>
+                <a:ea typeface="DejaVu Sans Mono" pitchFamily="34" charset="-122"/>
+                <a:cs typeface="DejaVu Sans Mono" pitchFamily="34" charset="-120"/>
+              </a:rPr>
+              <a:t>@function_tool</a:t>
+            </a:r>
+            <a:r>
+              <a:rPr lang="en-US" sz="920" dirty="0">
+                <a:solidFill>
+                  <a:srgbClr val="282D34"/>
+                </a:solidFill>
+                <a:latin typeface="DejaVu Sans Mono" pitchFamily="34" charset="0"/>
+                <a:ea typeface="DejaVu Sans Mono" pitchFamily="34" charset="-122"/>
+                <a:cs typeface="DejaVu Sans Mono" pitchFamily="34" charset="-120"/>
+              </a:rPr>
+              <a:t>(</a:t>
+            </a:r>
+            <a:endParaRPr lang="en-US" sz="920" dirty="0"/>
+          </a:p>
+          <a:p>
+            <a:pPr marL="0" indent="0" algn="l">
+              <a:lnSpc>
+                <a:spcPts val="1130"/>
+              </a:lnSpc>
+              <a:buNone/>
+            </a:pPr>
+            <a:r>
+              <a:rPr lang="en-US" sz="920" dirty="0">
+                <a:solidFill>
+                  <a:srgbClr val="282D34"/>
+                </a:solidFill>
+                <a:latin typeface="DejaVu Sans Mono" pitchFamily="34" charset="0"/>
+                <a:ea typeface="DejaVu Sans Mono" pitchFamily="34" charset="-122"/>
+                <a:cs typeface="DejaVu Sans Mono" pitchFamily="34" charset="-120"/>
+              </a:rPr>
+              <a:t>    tool_input_guardrails=[delete_guardrail],  </a:t>
+            </a:r>
+            <a:r>
+              <a:rPr lang="en-US" sz="920" dirty="0">
+                <a:solidFill>
+                  <a:srgbClr val="26782A"/>
+                </a:solidFill>
+                <a:latin typeface="DejaVu Sans Mono" pitchFamily="34" charset="0"/>
+                <a:ea typeface="DejaVu Sans Mono" pitchFamily="34" charset="-122"/>
+                <a:cs typeface="DejaVu Sans Mono" pitchFamily="34" charset="-120"/>
+              </a:rPr>
+              <a:t># 入力ガードレールのみ設定</a:t>
+            </a:r>
+            <a:endParaRPr lang="en-US" sz="920" dirty="0"/>
+          </a:p>
+          <a:p>
+            <a:pPr marL="0" indent="0" algn="l">
+              <a:lnSpc>
+                <a:spcPts val="1130"/>
+              </a:lnSpc>
+              <a:buNone/>
+            </a:pPr>
+            <a:r>
+              <a:rPr lang="en-US" sz="920" dirty="0">
+                <a:solidFill>
+                  <a:srgbClr val="282D34"/>
+                </a:solidFill>
+                <a:latin typeface="DejaVu Sans Mono" pitchFamily="34" charset="0"/>
+                <a:ea typeface="DejaVu Sans Mono" pitchFamily="34" charset="-122"/>
+                <a:cs typeface="DejaVu Sans Mono" pitchFamily="34" charset="-120"/>
+              </a:rPr>
+              <a:t>)</a:t>
+            </a:r>
+            <a:endParaRPr lang="en-US" sz="920" dirty="0"/>
+          </a:p>
+          <a:p>
+            <a:pPr marL="0" indent="0" algn="l">
+              <a:lnSpc>
+                <a:spcPts val="1130"/>
+              </a:lnSpc>
+              <a:buNone/>
+            </a:pPr>
+            <a:r>
+              <a:rPr lang="en-US" sz="920" b="1" dirty="0">
+                <a:solidFill>
+                  <a:srgbClr val="0000A0"/>
+                </a:solidFill>
+                <a:latin typeface="DejaVu Sans Mono" pitchFamily="34" charset="0"/>
+                <a:ea typeface="DejaVu Sans Mono" pitchFamily="34" charset="-122"/>
+                <a:cs typeface="DejaVu Sans Mono" pitchFamily="34" charset="-120"/>
+              </a:rPr>
+              <a:t>def</a:t>
+            </a:r>
+            <a:r>
+              <a:rPr lang="en-US" sz="920" dirty="0">
+                <a:solidFill>
+                  <a:srgbClr val="282D34"/>
+                </a:solidFill>
+                <a:latin typeface="DejaVu Sans Mono" pitchFamily="34" charset="0"/>
+                <a:ea typeface="DejaVu Sans Mono" pitchFamily="34" charset="-122"/>
+                <a:cs typeface="DejaVu Sans Mono" pitchFamily="34" charset="-120"/>
+              </a:rPr>
+              <a:t> </a:t>
+            </a:r>
+            <a:r>
+              <a:rPr lang="en-US" sz="920" b="1" dirty="0">
+                <a:solidFill>
+                  <a:srgbClr val="0000A0"/>
+                </a:solidFill>
+                <a:latin typeface="DejaVu Sans Mono" pitchFamily="34" charset="0"/>
+                <a:ea typeface="DejaVu Sans Mono" pitchFamily="34" charset="-122"/>
+                <a:cs typeface="DejaVu Sans Mono" pitchFamily="34" charset="-120"/>
+              </a:rPr>
+              <a:t>delete_file</a:t>
+            </a:r>
+            <a:r>
+              <a:rPr lang="en-US" sz="920" dirty="0">
+                <a:solidFill>
+                  <a:srgbClr val="282D34"/>
+                </a:solidFill>
+                <a:latin typeface="DejaVu Sans Mono" pitchFamily="34" charset="0"/>
+                <a:ea typeface="DejaVu Sans Mono" pitchFamily="34" charset="-122"/>
+                <a:cs typeface="DejaVu Sans Mono" pitchFamily="34" charset="-120"/>
+              </a:rPr>
+              <a:t>(filename: str): ...</a:t>
+            </a:r>
+            <a:endParaRPr lang="en-US" sz="920" dirty="0"/>
+          </a:p>
+          <a:p>
+            <a:pPr marL="0" indent="0" algn="l">
+              <a:lnSpc>
+                <a:spcPts val="1130"/>
+              </a:lnSpc>
+              <a:buNone/>
+            </a:pPr>
+            <a:r>
+              <a:rPr lang="en-US" sz="920" dirty="0">
+                <a:solidFill>
+                  <a:srgbClr val="282D34"/>
+                </a:solidFill>
+                <a:latin typeface="DejaVu Sans Mono" pitchFamily="34" charset="0"/>
+                <a:ea typeface="DejaVu Sans Mono" pitchFamily="34" charset="-122"/>
+                <a:cs typeface="DejaVu Sans Mono" pitchFamily="34" charset="-120"/>
+              </a:rPr>
+              <a:t> </a:t>
+            </a:r>
+            <a:endParaRPr lang="en-US" sz="920" dirty="0"/>
+          </a:p>
+          <a:p>
+            <a:pPr marL="0" indent="0" algn="l">
+              <a:lnSpc>
+                <a:spcPts val="1130"/>
+              </a:lnSpc>
+              <a:buNone/>
+            </a:pPr>
+            <a:r>
+              <a:rPr lang="en-US" sz="920" dirty="0">
+                <a:solidFill>
+                  <a:srgbClr val="0000A0"/>
+                </a:solidFill>
+                <a:latin typeface="DejaVu Sans Mono" pitchFamily="34" charset="0"/>
+                <a:ea typeface="DejaVu Sans Mono" pitchFamily="34" charset="-122"/>
+                <a:cs typeface="DejaVu Sans Mono" pitchFamily="34" charset="-120"/>
+              </a:rPr>
+              <a:t>@tool_input_guardrail</a:t>
+            </a:r>
+            <a:endParaRPr lang="en-US" sz="920" dirty="0"/>
+          </a:p>
+          <a:p>
+            <a:pPr marL="0" indent="0" algn="l">
+              <a:lnSpc>
+                <a:spcPts val="1130"/>
+              </a:lnSpc>
+              <a:buNone/>
+            </a:pPr>
+            <a:r>
+              <a:rPr lang="en-US" sz="920" b="1" dirty="0">
+                <a:solidFill>
+                  <a:srgbClr val="0000A0"/>
+                </a:solidFill>
+                <a:latin typeface="DejaVu Sans Mono" pitchFamily="34" charset="0"/>
+                <a:ea typeface="DejaVu Sans Mono" pitchFamily="34" charset="-122"/>
+                <a:cs typeface="DejaVu Sans Mono" pitchFamily="34" charset="-120"/>
+              </a:rPr>
+              <a:t>def</a:t>
+            </a:r>
+            <a:r>
+              <a:rPr lang="en-US" sz="920" dirty="0">
+                <a:solidFill>
+                  <a:srgbClr val="282D34"/>
+                </a:solidFill>
+                <a:latin typeface="DejaVu Sans Mono" pitchFamily="34" charset="0"/>
+                <a:ea typeface="DejaVu Sans Mono" pitchFamily="34" charset="-122"/>
+                <a:cs typeface="DejaVu Sans Mono" pitchFamily="34" charset="-120"/>
+              </a:rPr>
+              <a:t> </a:t>
+            </a:r>
+            <a:r>
+              <a:rPr lang="en-US" sz="920" b="1" dirty="0">
+                <a:solidFill>
+                  <a:srgbClr val="0000A0"/>
+                </a:solidFill>
+                <a:latin typeface="DejaVu Sans Mono" pitchFamily="34" charset="0"/>
+                <a:ea typeface="DejaVu Sans Mono" pitchFamily="34" charset="-122"/>
+                <a:cs typeface="DejaVu Sans Mono" pitchFamily="34" charset="-120"/>
+              </a:rPr>
+              <a:t>delete_guardrail</a:t>
+            </a:r>
+            <a:r>
+              <a:rPr lang="en-US" sz="920" dirty="0">
+                <a:solidFill>
+                  <a:srgbClr val="282D34"/>
+                </a:solidFill>
+                <a:latin typeface="DejaVu Sans Mono" pitchFamily="34" charset="0"/>
+                <a:ea typeface="DejaVu Sans Mono" pitchFamily="34" charset="-122"/>
+                <a:cs typeface="DejaVu Sans Mono" pitchFamily="34" charset="-120"/>
+              </a:rPr>
+              <a:t>(ctx, tool, input_data):</a:t>
+            </a:r>
+            <a:endParaRPr lang="en-US" sz="920" dirty="0"/>
+          </a:p>
+          <a:p>
+            <a:pPr marL="0" indent="0" algn="l">
+              <a:lnSpc>
+                <a:spcPts val="1130"/>
+              </a:lnSpc>
+              <a:buNone/>
+            </a:pPr>
+            <a:r>
+              <a:rPr lang="en-US" sz="920" dirty="0">
+                <a:solidFill>
+                  <a:srgbClr val="282D34"/>
+                </a:solidFill>
+                <a:latin typeface="DejaVu Sans Mono" pitchFamily="34" charset="0"/>
+                <a:ea typeface="DejaVu Sans Mono" pitchFamily="34" charset="-122"/>
+                <a:cs typeface="DejaVu Sans Mono" pitchFamily="34" charset="-120"/>
+              </a:rPr>
+              <a:t>    </a:t>
+            </a:r>
+            <a:r>
+              <a:rPr lang="en-US" sz="920" dirty="0">
+                <a:solidFill>
+                  <a:srgbClr val="26782A"/>
+                </a:solidFill>
+                <a:latin typeface="DejaVu Sans Mono" pitchFamily="34" charset="0"/>
+                <a:ea typeface="DejaVu Sans Mono" pitchFamily="34" charset="-122"/>
+                <a:cs typeface="DejaVu Sans Mono" pitchFamily="34" charset="-120"/>
+              </a:rPr>
+              <a:t># 例：important.txt の削除は禁止</a:t>
+            </a:r>
+            <a:endParaRPr lang="en-US" sz="920" dirty="0"/>
+          </a:p>
+          <a:p>
+            <a:pPr marL="0" indent="0" algn="l">
+              <a:lnSpc>
+                <a:spcPts val="1130"/>
+              </a:lnSpc>
+              <a:buNone/>
+            </a:pPr>
+            <a:r>
+              <a:rPr lang="en-US" sz="920" dirty="0">
+                <a:solidFill>
+                  <a:srgbClr val="282D34"/>
+                </a:solidFill>
+                <a:latin typeface="DejaVu Sans Mono" pitchFamily="34" charset="0"/>
+                <a:ea typeface="DejaVu Sans Mono" pitchFamily="34" charset="-122"/>
+                <a:cs typeface="DejaVu Sans Mono" pitchFamily="34" charset="-120"/>
+              </a:rPr>
+              <a:t>    </a:t>
+            </a:r>
+            <a:r>
+              <a:rPr lang="en-US" sz="920" b="1" dirty="0">
+                <a:solidFill>
+                  <a:srgbClr val="0000A0"/>
+                </a:solidFill>
+                <a:latin typeface="DejaVu Sans Mono" pitchFamily="34" charset="0"/>
+                <a:ea typeface="DejaVu Sans Mono" pitchFamily="34" charset="-122"/>
+                <a:cs typeface="DejaVu Sans Mono" pitchFamily="34" charset="-120"/>
+              </a:rPr>
+              <a:t>if</a:t>
+            </a:r>
+            <a:r>
+              <a:rPr lang="en-US" sz="920" dirty="0">
+                <a:solidFill>
+                  <a:srgbClr val="282D34"/>
+                </a:solidFill>
+                <a:latin typeface="DejaVu Sans Mono" pitchFamily="34" charset="0"/>
+                <a:ea typeface="DejaVu Sans Mono" pitchFamily="34" charset="-122"/>
+                <a:cs typeface="DejaVu Sans Mono" pitchFamily="34" charset="-120"/>
+              </a:rPr>
+              <a:t> input_data.get(</a:t>
+            </a:r>
+            <a:r>
+              <a:rPr lang="en-US" sz="920" dirty="0">
+                <a:solidFill>
+                  <a:srgbClr val="910000"/>
+                </a:solidFill>
+                <a:latin typeface="DejaVu Sans Mono" pitchFamily="34" charset="0"/>
+                <a:ea typeface="DejaVu Sans Mono" pitchFamily="34" charset="-122"/>
+                <a:cs typeface="DejaVu Sans Mono" pitchFamily="34" charset="-120"/>
+              </a:rPr>
+              <a:t>"filename"</a:t>
+            </a:r>
+            <a:r>
+              <a:rPr lang="en-US" sz="920" dirty="0">
+                <a:solidFill>
+                  <a:srgbClr val="282D34"/>
+                </a:solidFill>
+                <a:latin typeface="DejaVu Sans Mono" pitchFamily="34" charset="0"/>
+                <a:ea typeface="DejaVu Sans Mono" pitchFamily="34" charset="-122"/>
+                <a:cs typeface="DejaVu Sans Mono" pitchFamily="34" charset="-120"/>
+              </a:rPr>
+              <a:t>) == </a:t>
+            </a:r>
+            <a:r>
+              <a:rPr lang="en-US" sz="920" dirty="0">
+                <a:solidFill>
+                  <a:srgbClr val="910000"/>
+                </a:solidFill>
+                <a:latin typeface="DejaVu Sans Mono" pitchFamily="34" charset="0"/>
+                <a:ea typeface="DejaVu Sans Mono" pitchFamily="34" charset="-122"/>
+                <a:cs typeface="DejaVu Sans Mono" pitchFamily="34" charset="-120"/>
+              </a:rPr>
+              <a:t>"important.txt"</a:t>
+            </a:r>
+            <a:r>
+              <a:rPr lang="en-US" sz="920" dirty="0">
+                <a:solidFill>
+                  <a:srgbClr val="282D34"/>
+                </a:solidFill>
+                <a:latin typeface="DejaVu Sans Mono" pitchFamily="34" charset="0"/>
+                <a:ea typeface="DejaVu Sans Mono" pitchFamily="34" charset="-122"/>
+                <a:cs typeface="DejaVu Sans Mono" pitchFamily="34" charset="-120"/>
+              </a:rPr>
+              <a:t>:</a:t>
+            </a:r>
+            <a:endParaRPr lang="en-US" sz="920" dirty="0"/>
+          </a:p>
+          <a:p>
+            <a:pPr marL="0" indent="0" algn="l">
+              <a:lnSpc>
+                <a:spcPts val="1130"/>
+              </a:lnSpc>
+              <a:buNone/>
+            </a:pPr>
+            <a:r>
+              <a:rPr lang="en-US" sz="920" dirty="0">
+                <a:solidFill>
+                  <a:srgbClr val="282D34"/>
+                </a:solidFill>
+                <a:latin typeface="DejaVu Sans Mono" pitchFamily="34" charset="0"/>
+                <a:ea typeface="DejaVu Sans Mono" pitchFamily="34" charset="-122"/>
+                <a:cs typeface="DejaVu Sans Mono" pitchFamily="34" charset="-120"/>
+              </a:rPr>
+              <a:t>        </a:t>
+            </a:r>
+            <a:r>
+              <a:rPr lang="en-US" sz="920" b="1" dirty="0">
+                <a:solidFill>
+                  <a:srgbClr val="0000A0"/>
+                </a:solidFill>
+                <a:latin typeface="DejaVu Sans Mono" pitchFamily="34" charset="0"/>
+                <a:ea typeface="DejaVu Sans Mono" pitchFamily="34" charset="-122"/>
+                <a:cs typeface="DejaVu Sans Mono" pitchFamily="34" charset="-120"/>
+              </a:rPr>
+              <a:t>return</a:t>
+            </a:r>
+            <a:r>
+              <a:rPr lang="en-US" sz="920" dirty="0">
+                <a:solidFill>
+                  <a:srgbClr val="282D34"/>
+                </a:solidFill>
+                <a:latin typeface="DejaVu Sans Mono" pitchFamily="34" charset="0"/>
+                <a:ea typeface="DejaVu Sans Mono" pitchFamily="34" charset="-122"/>
+                <a:cs typeface="DejaVu Sans Mono" pitchFamily="34" charset="-120"/>
+              </a:rPr>
+              <a:t> reject_content(</a:t>
+            </a:r>
+            <a:r>
+              <a:rPr lang="en-US" sz="920" dirty="0">
+                <a:solidFill>
+                  <a:srgbClr val="910000"/>
+                </a:solidFill>
+                <a:latin typeface="DejaVu Sans Mono" pitchFamily="34" charset="0"/>
+                <a:ea typeface="DejaVu Sans Mono" pitchFamily="34" charset="-122"/>
+                <a:cs typeface="DejaVu Sans Mono" pitchFamily="34" charset="-120"/>
+              </a:rPr>
+              <a:t>"cannot delete important.txt"</a:t>
+            </a:r>
+            <a:r>
+              <a:rPr lang="en-US" sz="920" dirty="0">
+                <a:solidFill>
+                  <a:srgbClr val="282D34"/>
+                </a:solidFill>
+                <a:latin typeface="DejaVu Sans Mono" pitchFamily="34" charset="0"/>
+                <a:ea typeface="DejaVu Sans Mono" pitchFamily="34" charset="-122"/>
+                <a:cs typeface="DejaVu Sans Mono" pitchFamily="34" charset="-120"/>
+              </a:rPr>
+              <a:t>)</a:t>
+            </a:r>
+            <a:endParaRPr lang="en-US" sz="920" dirty="0"/>
+          </a:p>
+          <a:p>
+            <a:pPr marL="0" indent="0" algn="l">
+              <a:lnSpc>
+                <a:spcPts val="1130"/>
+              </a:lnSpc>
+              <a:buNone/>
+            </a:pPr>
+            <a:r>
+              <a:rPr lang="en-US" sz="920" dirty="0">
+                <a:solidFill>
+                  <a:srgbClr val="282D34"/>
+                </a:solidFill>
+                <a:latin typeface="DejaVu Sans Mono" pitchFamily="34" charset="0"/>
+                <a:ea typeface="DejaVu Sans Mono" pitchFamily="34" charset="-122"/>
+                <a:cs typeface="DejaVu Sans Mono" pitchFamily="34" charset="-120"/>
+              </a:rPr>
+              <a:t>    </a:t>
+            </a:r>
+            <a:r>
+              <a:rPr lang="en-US" sz="920" b="1" dirty="0">
+                <a:solidFill>
+                  <a:srgbClr val="0000A0"/>
+                </a:solidFill>
+                <a:latin typeface="DejaVu Sans Mono" pitchFamily="34" charset="0"/>
+                <a:ea typeface="DejaVu Sans Mono" pitchFamily="34" charset="-122"/>
+                <a:cs typeface="DejaVu Sans Mono" pitchFamily="34" charset="-120"/>
+              </a:rPr>
+              <a:t>return</a:t>
+            </a:r>
+            <a:r>
+              <a:rPr lang="en-US" sz="920" dirty="0">
+                <a:solidFill>
+                  <a:srgbClr val="282D34"/>
+                </a:solidFill>
+                <a:latin typeface="DejaVu Sans Mono" pitchFamily="34" charset="0"/>
+                <a:ea typeface="DejaVu Sans Mono" pitchFamily="34" charset="-122"/>
+                <a:cs typeface="DejaVu Sans Mono" pitchFamily="34" charset="-120"/>
+              </a:rPr>
+              <a:t> allow()</a:t>
+            </a:r>
+            <a:endParaRPr lang="en-US" sz="920" dirty="0"/>
+          </a:p>
+        </p:txBody>
+      </p:sp>
+      <p:sp>
+        <p:nvSpPr>
+          <p:cNvPr id="71" name="Shape 69"/>
+          <p:cNvSpPr/>
+          <p:nvPr/>
+        </p:nvSpPr>
+        <p:spPr>
+          <a:xfrm>
+            <a:off x="274320" y="6199632"/>
+            <a:ext cx="11640312" cy="585216"/>
+          </a:xfrm>
+          <a:prstGeom prst="rect">
+            <a:avLst/>
+          </a:prstGeom>
+          <a:solidFill>
+            <a:srgbClr val="FFFFFF"/>
+          </a:solidFill>
+          <a:ln w="10160">
+            <a:solidFill>
+              <a:srgbClr val="CACED3"/>
+            </a:solidFill>
+            <a:prstDash val="solid"/>
+          </a:ln>
+        </p:spPr>
+        <p:txBody>
+          <a:bodyPr/>
+          <a:lstStyle/>
+          <a:p>
+            <a:endParaRPr lang="en-JP"/>
+          </a:p>
+        </p:txBody>
+      </p:sp>
+      <p:sp>
+        <p:nvSpPr>
+          <p:cNvPr id="72" name="Text 70"/>
+          <p:cNvSpPr txBox="1"/>
+          <p:nvPr/>
+        </p:nvSpPr>
+        <p:spPr>
+          <a:xfrm>
+            <a:off x="411480" y="6254496"/>
+            <a:ext cx="2743200" cy="182880"/>
+          </a:xfrm>
+          <a:prstGeom prst="rect">
+            <a:avLst/>
+          </a:prstGeom>
+          <a:noFill/>
+          <a:ln/>
+        </p:spPr>
+        <p:txBody>
+          <a:bodyPr wrap="square" lIns="0" tIns="0" rIns="0" bIns="0" rtlCol="0" anchor="t"/>
+          <a:lstStyle/>
+          <a:p>
+            <a:pPr marL="0" indent="0" algn="l">
+              <a:buNone/>
+            </a:pPr>
+            <a:r>
+              <a:rPr lang="en-US" sz="1000" b="1" dirty="0">
+                <a:solidFill>
+                  <a:srgbClr val="000000"/>
+                </a:solidFill>
+                <a:latin typeface="Noto Sans CJK JP" pitchFamily="34" charset="0"/>
+                <a:ea typeface="Noto Sans CJK JP" pitchFamily="34" charset="-122"/>
+                <a:cs typeface="Noto Sans CJK JP" pitchFamily="34" charset="-120"/>
+              </a:rPr>
+              <a:t>各ガバナンス機能の役割</a:t>
+            </a:r>
+            <a:endParaRPr lang="en-US" sz="1000" dirty="0"/>
+          </a:p>
+        </p:txBody>
+      </p:sp>
+      <p:sp>
+        <p:nvSpPr>
+          <p:cNvPr id="73" name="Text 71"/>
+          <p:cNvSpPr txBox="1"/>
+          <p:nvPr/>
+        </p:nvSpPr>
+        <p:spPr>
+          <a:xfrm>
+            <a:off x="411480" y="6446520"/>
+            <a:ext cx="5669280" cy="164592"/>
+          </a:xfrm>
+          <a:prstGeom prst="rect">
+            <a:avLst/>
+          </a:prstGeom>
+          <a:noFill/>
+          <a:ln/>
+        </p:spPr>
+        <p:txBody>
+          <a:bodyPr wrap="square" lIns="0" tIns="0" rIns="0" bIns="0" rtlCol="0" anchor="t"/>
+          <a:lstStyle/>
+          <a:p>
+            <a:pPr marL="0" indent="0" algn="l">
+              <a:buNone/>
+            </a:pPr>
+            <a:r>
+              <a:rPr lang="en-US" sz="950" dirty="0">
+                <a:solidFill>
+                  <a:srgbClr val="000000"/>
+                </a:solidFill>
+                <a:latin typeface="Noto Sans CJK JP" pitchFamily="34" charset="0"/>
+                <a:ea typeface="Noto Sans CJK JP" pitchFamily="34" charset="-122"/>
+                <a:cs typeface="Noto Sans CJK JP" pitchFamily="34" charset="-120"/>
+              </a:rPr>
+              <a:t>・ needs_approval：Tool 実行前に Human Approval を要求（条件付きで設定可能）</a:t>
+            </a:r>
+            <a:endParaRPr lang="en-US" sz="950" dirty="0"/>
+          </a:p>
+        </p:txBody>
+      </p:sp>
+      <p:sp>
+        <p:nvSpPr>
+          <p:cNvPr id="74" name="Text 72"/>
+          <p:cNvSpPr txBox="1"/>
+          <p:nvPr/>
+        </p:nvSpPr>
+        <p:spPr>
+          <a:xfrm>
+            <a:off x="411480" y="6620256"/>
+            <a:ext cx="5669280" cy="164592"/>
+          </a:xfrm>
+          <a:prstGeom prst="rect">
+            <a:avLst/>
+          </a:prstGeom>
+          <a:noFill/>
+          <a:ln/>
+        </p:spPr>
+        <p:txBody>
+          <a:bodyPr wrap="square" lIns="0" tIns="0" rIns="0" bIns="0" rtlCol="0" anchor="t"/>
+          <a:lstStyle/>
+          <a:p>
+            <a:pPr marL="0" indent="0" algn="l">
+              <a:buNone/>
+            </a:pPr>
+            <a:r>
+              <a:rPr lang="en-US" sz="950" dirty="0">
+                <a:solidFill>
+                  <a:srgbClr val="000000"/>
+                </a:solidFill>
+                <a:latin typeface="Noto Sans CJK JP" pitchFamily="34" charset="0"/>
+                <a:ea typeface="Noto Sans CJK JP" pitchFamily="34" charset="-122"/>
+                <a:cs typeface="Noto Sans CJK JP" pitchFamily="34" charset="-120"/>
+              </a:rPr>
+              <a:t>・ Tool Input Guardrail：Tool 実行前に入力を検査し，違反時は Block</a:t>
+            </a:r>
+            <a:endParaRPr lang="en-US" sz="950" dirty="0"/>
+          </a:p>
+        </p:txBody>
+      </p:sp>
+      <p:sp>
+        <p:nvSpPr>
+          <p:cNvPr id="75" name="Text 73"/>
+          <p:cNvSpPr txBox="1"/>
+          <p:nvPr/>
+        </p:nvSpPr>
+        <p:spPr>
+          <a:xfrm>
+            <a:off x="6172200" y="6446520"/>
+            <a:ext cx="5669280" cy="164592"/>
+          </a:xfrm>
+          <a:prstGeom prst="rect">
+            <a:avLst/>
+          </a:prstGeom>
+          <a:noFill/>
+          <a:ln/>
+        </p:spPr>
+        <p:txBody>
+          <a:bodyPr wrap="square" lIns="0" tIns="0" rIns="0" bIns="0" rtlCol="0" anchor="t"/>
+          <a:lstStyle/>
+          <a:p>
+            <a:pPr marL="0" indent="0" algn="l">
+              <a:buNone/>
+            </a:pPr>
+            <a:r>
+              <a:rPr lang="en-US" sz="950" dirty="0">
+                <a:solidFill>
+                  <a:srgbClr val="000000"/>
+                </a:solidFill>
+                <a:latin typeface="Noto Sans CJK JP" pitchFamily="34" charset="0"/>
+                <a:ea typeface="Noto Sans CJK JP" pitchFamily="34" charset="-122"/>
+                <a:cs typeface="Noto Sans CJK JP" pitchFamily="34" charset="-120"/>
+              </a:rPr>
+              <a:t>・ Tool Output Guardrail：Tool 実行後に出力を検査し，違反時は Block / 修正</a:t>
+            </a:r>
+            <a:endParaRPr lang="en-US" sz="950" dirty="0"/>
+          </a:p>
+        </p:txBody>
+      </p:sp>
+      <p:sp>
+        <p:nvSpPr>
+          <p:cNvPr id="76" name="Text 74"/>
+          <p:cNvSpPr txBox="1"/>
+          <p:nvPr/>
+        </p:nvSpPr>
+        <p:spPr>
+          <a:xfrm>
+            <a:off x="6172200" y="6620256"/>
+            <a:ext cx="5669280" cy="164592"/>
+          </a:xfrm>
+          <a:prstGeom prst="rect">
+            <a:avLst/>
+          </a:prstGeom>
+          <a:noFill/>
+          <a:ln/>
+        </p:spPr>
+        <p:txBody>
+          <a:bodyPr wrap="square" lIns="0" tIns="0" rIns="0" bIns="0" rtlCol="0" anchor="t"/>
+          <a:lstStyle/>
+          <a:p>
+            <a:pPr marL="0" indent="0" algn="l">
+              <a:buNone/>
+            </a:pPr>
+            <a:r>
+              <a:rPr lang="en-US" sz="950" dirty="0">
+                <a:solidFill>
+                  <a:srgbClr val="000000"/>
+                </a:solidFill>
+                <a:latin typeface="Noto Sans CJK JP" pitchFamily="34" charset="0"/>
+                <a:ea typeface="Noto Sans CJK JP" pitchFamily="34" charset="-122"/>
+                <a:cs typeface="Noto Sans CJK JP" pitchFamily="34" charset="-120"/>
+              </a:rPr>
+              <a:t>・ is_enabled：Tool 自体の利用可否を動的に制御（無効な Tool は LLM から不可視）</a:t>
+            </a:r>
+            <a:endParaRPr lang="en-US" sz="950" dirty="0"/>
+          </a:p>
+        </p:txBody>
+      </p:sp>
+    </p:spTree>
+  </p:cSld>
+  <p:clrMapOvr>
+    <a:masterClrMapping/>
+  </p:clrMapOvr>
+</p:sld>
+</file>
+
+<file path=ppt/slides/slide13.xml><?xml version="1.0" encoding="utf-8"?>
+<p:sld xmlns:a="http://schemas.openxmlformats.org/drawingml/2006/main" xmlns:r="http://schemas.openxmlformats.org/officeDocument/2006/relationships" xmlns:p="http://schemas.openxmlformats.org/presentationml/2006/main">
+  <p:cSld>
+    <p:spTree>
+      <p:nvGrpSpPr>
+        <p:cNvPr id="1" name=""/>
+        <p:cNvGrpSpPr/>
+        <p:nvPr/>
+      </p:nvGrpSpPr>
+      <p:grpSpPr>
+        <a:xfrm>
+          <a:off x="0" y="0"/>
+          <a:ext cx="0" cy="0"/>
+          <a:chOff x="0" y="0"/>
+          <a:chExt cx="0" cy="0"/>
+        </a:xfrm>
+      </p:grpSpPr>
+      <p:sp>
+        <p:nvSpPr>
+          <p:cNvPr id="2" name="Text 0"/>
+          <p:cNvSpPr txBox="1"/>
+          <p:nvPr/>
+        </p:nvSpPr>
+        <p:spPr>
+          <a:xfrm>
+            <a:off x="320040" y="118872"/>
+            <a:ext cx="11521440" cy="411480"/>
+          </a:xfrm>
+          <a:prstGeom prst="rect">
+            <a:avLst/>
+          </a:prstGeom>
+          <a:noFill/>
+          <a:ln/>
+        </p:spPr>
+        <p:txBody>
+          <a:bodyPr wrap="square" lIns="0" tIns="0" rIns="0" bIns="0" rtlCol="0" anchor="t"/>
+          <a:lstStyle/>
+          <a:p>
+            <a:pPr marL="0" indent="0" algn="l">
+              <a:buNone/>
+            </a:pPr>
+            <a:r>
+              <a:rPr lang="en-US" sz="2400" b="1" dirty="0">
+                <a:solidFill>
+                  <a:srgbClr val="000000"/>
+                </a:solidFill>
+                <a:latin typeface="Noto Sans CJK JP" pitchFamily="34" charset="0"/>
+                <a:ea typeface="Noto Sans CJK JP" pitchFamily="34" charset="-122"/>
+                <a:cs typeface="Noto Sans CJK JP" pitchFamily="34" charset="-120"/>
+              </a:rPr>
+              <a:t>8. Claude Agent SDK のガバナンス機能</a:t>
+            </a:r>
+            <a:endParaRPr lang="en-US" sz="2400" dirty="0"/>
+          </a:p>
+        </p:txBody>
+      </p:sp>
+      <p:sp>
+        <p:nvSpPr>
+          <p:cNvPr id="3" name="Text 1"/>
+          <p:cNvSpPr txBox="1"/>
+          <p:nvPr/>
+        </p:nvSpPr>
+        <p:spPr>
+          <a:xfrm>
+            <a:off x="365760" y="566928"/>
+            <a:ext cx="11521440" cy="237744"/>
+          </a:xfrm>
+          <a:prstGeom prst="rect">
+            <a:avLst/>
+          </a:prstGeom>
+          <a:noFill/>
+          <a:ln/>
+        </p:spPr>
+        <p:txBody>
+          <a:bodyPr wrap="square" lIns="0" tIns="0" rIns="0" bIns="0" rtlCol="0" anchor="t"/>
+          <a:lstStyle/>
+          <a:p>
+            <a:pPr marL="0" indent="0">
+              <a:buNone/>
+            </a:pPr>
+            <a:r>
+              <a:rPr lang="en-US" sz="1250" dirty="0">
+                <a:solidFill>
+                  <a:srgbClr val="000000"/>
+                </a:solidFill>
+                <a:latin typeface="Noto Sans CJK JP" pitchFamily="34" charset="0"/>
+                <a:ea typeface="Noto Sans CJK JP" pitchFamily="34" charset="-122"/>
+                <a:cs typeface="Noto Sans CJK JP" pitchFamily="34" charset="-120"/>
+              </a:rPr>
+              <a:t>Claude Agent SDK の Permission system により Tool 実行を制御する。今回の demo では，権限判定を </a:t>
+            </a:r>
+            <a:r>
+              <a:rPr lang="en-US" sz="1250" b="1" dirty="0">
+                <a:solidFill>
+                  <a:srgbClr val="004696"/>
+                </a:solidFill>
+                <a:latin typeface="Noto Sans CJK JP" pitchFamily="34" charset="0"/>
+                <a:ea typeface="Noto Sans CJK JP" pitchFamily="34" charset="-122"/>
+                <a:cs typeface="Noto Sans CJK JP" pitchFamily="34" charset="-120"/>
+              </a:rPr>
+              <a:t>can_use_tool</a:t>
+            </a:r>
+            <a:r>
+              <a:rPr lang="en-US" sz="1250" dirty="0">
+                <a:solidFill>
+                  <a:srgbClr val="000000"/>
+                </a:solidFill>
+                <a:latin typeface="Noto Sans CJK JP" pitchFamily="34" charset="0"/>
+                <a:ea typeface="Noto Sans CJK JP" pitchFamily="34" charset="-122"/>
+                <a:cs typeface="Noto Sans CJK JP" pitchFamily="34" charset="-120"/>
+              </a:rPr>
+              <a:t> で実装した。</a:t>
+            </a:r>
+            <a:endParaRPr lang="en-US" sz="1250" dirty="0"/>
+          </a:p>
+        </p:txBody>
+      </p:sp>
+      <p:sp>
+        <p:nvSpPr>
+          <p:cNvPr id="4" name="Shape 2"/>
+          <p:cNvSpPr/>
+          <p:nvPr/>
+        </p:nvSpPr>
+        <p:spPr>
+          <a:xfrm>
+            <a:off x="5440680" y="868680"/>
+            <a:ext cx="0" cy="5349240"/>
+          </a:xfrm>
+          <a:prstGeom prst="line">
+            <a:avLst/>
+          </a:prstGeom>
+          <a:noFill/>
+          <a:ln w="10160">
+            <a:solidFill>
+              <a:srgbClr val="CACED3"/>
+            </a:solidFill>
+            <a:prstDash val="solid"/>
+          </a:ln>
+        </p:spPr>
+        <p:txBody>
+          <a:bodyPr/>
+          <a:lstStyle/>
+          <a:p>
+            <a:endParaRPr lang="en-JP"/>
+          </a:p>
+        </p:txBody>
+      </p:sp>
+      <p:sp>
+        <p:nvSpPr>
+          <p:cNvPr id="5" name="Text 3"/>
+          <p:cNvSpPr txBox="1"/>
+          <p:nvPr/>
+        </p:nvSpPr>
+        <p:spPr>
+          <a:xfrm>
+            <a:off x="274320" y="896112"/>
+            <a:ext cx="2743200" cy="219456"/>
+          </a:xfrm>
+          <a:prstGeom prst="rect">
+            <a:avLst/>
+          </a:prstGeom>
+          <a:noFill/>
+          <a:ln/>
+        </p:spPr>
+        <p:txBody>
+          <a:bodyPr wrap="square" lIns="0" tIns="0" rIns="0" bIns="0" rtlCol="0" anchor="t"/>
+          <a:lstStyle/>
+          <a:p>
+            <a:pPr marL="0" indent="0" algn="l">
+              <a:buNone/>
+            </a:pPr>
+            <a:r>
+              <a:rPr lang="en-US" sz="1300" b="1" dirty="0">
+                <a:solidFill>
+                  <a:srgbClr val="000000"/>
+                </a:solidFill>
+                <a:latin typeface="Noto Sans CJK JP" pitchFamily="34" charset="0"/>
+                <a:ea typeface="Noto Sans CJK JP" pitchFamily="34" charset="-122"/>
+                <a:cs typeface="Noto Sans CJK JP" pitchFamily="34" charset="-120"/>
+              </a:rPr>
+              <a:t>仕組みの全体像</a:t>
+            </a:r>
+            <a:endParaRPr lang="en-US" sz="1300" dirty="0"/>
+          </a:p>
+        </p:txBody>
+      </p:sp>
+      <p:sp>
+        <p:nvSpPr>
+          <p:cNvPr id="6" name="Text 4"/>
+          <p:cNvSpPr txBox="1"/>
+          <p:nvPr/>
+        </p:nvSpPr>
+        <p:spPr>
+          <a:xfrm>
+            <a:off x="5532120" y="896112"/>
+            <a:ext cx="6309360" cy="219456"/>
+          </a:xfrm>
+          <a:prstGeom prst="rect">
+            <a:avLst/>
+          </a:prstGeom>
+          <a:noFill/>
+          <a:ln/>
+        </p:spPr>
+        <p:txBody>
+          <a:bodyPr wrap="square" lIns="0" tIns="0" rIns="0" bIns="0" rtlCol="0" anchor="t"/>
+          <a:lstStyle/>
+          <a:p>
+            <a:pPr marL="0" indent="0" algn="l">
+              <a:buNone/>
+            </a:pPr>
+            <a:r>
+              <a:rPr lang="en-US" sz="1300" b="1" dirty="0">
+                <a:solidFill>
+                  <a:srgbClr val="000000"/>
+                </a:solidFill>
+                <a:latin typeface="Noto Sans CJK JP" pitchFamily="34" charset="0"/>
+                <a:ea typeface="Noto Sans CJK JP" pitchFamily="34" charset="-122"/>
+                <a:cs typeface="Noto Sans CJK JP" pitchFamily="34" charset="-120"/>
+              </a:rPr>
+              <a:t>コード例（今回の demo で使用した部分を中心に抜粋）</a:t>
+            </a:r>
+            <a:endParaRPr lang="en-US" sz="1300" dirty="0"/>
+          </a:p>
+        </p:txBody>
+      </p:sp>
+      <p:sp>
+        <p:nvSpPr>
+          <p:cNvPr id="7" name="Text 5"/>
+          <p:cNvSpPr txBox="1"/>
+          <p:nvPr/>
+        </p:nvSpPr>
+        <p:spPr>
+          <a:xfrm>
+            <a:off x="274320" y="1261872"/>
+            <a:ext cx="2057400" cy="219456"/>
+          </a:xfrm>
+          <a:prstGeom prst="rect">
+            <a:avLst/>
+          </a:prstGeom>
+          <a:noFill/>
+          <a:ln/>
+        </p:spPr>
+        <p:txBody>
+          <a:bodyPr wrap="square" lIns="0" tIns="0" rIns="0" bIns="0" rtlCol="0" anchor="t"/>
+          <a:lstStyle/>
+          <a:p>
+            <a:pPr marL="0" indent="0" algn="l">
+              <a:buNone/>
+            </a:pPr>
+            <a:r>
+              <a:rPr lang="en-US" sz="1300" b="1" dirty="0">
+                <a:solidFill>
+                  <a:srgbClr val="004696"/>
+                </a:solidFill>
+                <a:latin typeface="Noto Sans CJK JP" pitchFamily="34" charset="0"/>
+                <a:ea typeface="Noto Sans CJK JP" pitchFamily="34" charset="-122"/>
+                <a:cs typeface="Noto Sans CJK JP" pitchFamily="34" charset="-120"/>
+              </a:rPr>
+              <a:t>① リクエスト</a:t>
+            </a:r>
+            <a:endParaRPr lang="en-US" sz="1300" dirty="0"/>
+          </a:p>
+        </p:txBody>
+      </p:sp>
+      <p:sp>
+        <p:nvSpPr>
+          <p:cNvPr id="8" name="Text 6"/>
+          <p:cNvSpPr txBox="1"/>
+          <p:nvPr/>
+        </p:nvSpPr>
+        <p:spPr>
+          <a:xfrm>
+            <a:off x="292608" y="1536192"/>
+            <a:ext cx="2057400" cy="182880"/>
+          </a:xfrm>
+          <a:prstGeom prst="rect">
+            <a:avLst/>
+          </a:prstGeom>
+          <a:noFill/>
+          <a:ln/>
+        </p:spPr>
+        <p:txBody>
+          <a:bodyPr wrap="square" lIns="0" tIns="0" rIns="0" bIns="0" rtlCol="0" anchor="t"/>
+          <a:lstStyle/>
+          <a:p>
+            <a:pPr marL="0" indent="0">
+              <a:buNone/>
+            </a:pPr>
+            <a:r>
+              <a:rPr lang="en-US" sz="1050" dirty="0">
+                <a:solidFill>
+                  <a:srgbClr val="000000"/>
+                </a:solidFill>
+                <a:latin typeface="Noto Sans CJK JP" pitchFamily="34" charset="0"/>
+                <a:ea typeface="Noto Sans CJK JP" pitchFamily="34" charset="-122"/>
+                <a:cs typeface="Noto Sans CJK JP" pitchFamily="34" charset="-120"/>
+              </a:rPr>
+              <a:t>ユーザの指示を受け取る</a:t>
+            </a:r>
+            <a:endParaRPr lang="en-US" sz="1050" dirty="0"/>
+          </a:p>
+        </p:txBody>
+      </p:sp>
+      <p:sp>
+        <p:nvSpPr>
+          <p:cNvPr id="9" name="Shape 7"/>
+          <p:cNvSpPr/>
+          <p:nvPr/>
+        </p:nvSpPr>
+        <p:spPr>
+          <a:xfrm>
+            <a:off x="274320" y="1847088"/>
+            <a:ext cx="2057400" cy="0"/>
+          </a:xfrm>
+          <a:prstGeom prst="line">
+            <a:avLst/>
+          </a:prstGeom>
+          <a:noFill/>
+          <a:ln w="10160">
+            <a:solidFill>
+              <a:srgbClr val="DADEE2"/>
+            </a:solidFill>
+            <a:prstDash val="solid"/>
+          </a:ln>
+        </p:spPr>
+        <p:txBody>
+          <a:bodyPr/>
+          <a:lstStyle/>
+          <a:p>
+            <a:endParaRPr lang="en-JP"/>
+          </a:p>
+        </p:txBody>
+      </p:sp>
+      <p:sp>
+        <p:nvSpPr>
+          <p:cNvPr id="10" name="Text 8"/>
+          <p:cNvSpPr txBox="1"/>
+          <p:nvPr/>
+        </p:nvSpPr>
+        <p:spPr>
+          <a:xfrm>
+            <a:off x="274320" y="2011680"/>
+            <a:ext cx="2057400" cy="219456"/>
+          </a:xfrm>
+          <a:prstGeom prst="rect">
+            <a:avLst/>
+          </a:prstGeom>
+          <a:noFill/>
+          <a:ln/>
+        </p:spPr>
+        <p:txBody>
+          <a:bodyPr wrap="square" lIns="0" tIns="0" rIns="0" bIns="0" rtlCol="0" anchor="t"/>
+          <a:lstStyle/>
+          <a:p>
+            <a:pPr marL="0" indent="0" algn="l">
+              <a:buNone/>
+            </a:pPr>
+            <a:r>
+              <a:rPr lang="en-US" sz="1300" b="1" dirty="0">
+                <a:solidFill>
+                  <a:srgbClr val="004696"/>
+                </a:solidFill>
+                <a:latin typeface="Noto Sans CJK JP" pitchFamily="34" charset="0"/>
+                <a:ea typeface="Noto Sans CJK JP" pitchFamily="34" charset="-122"/>
+                <a:cs typeface="Noto Sans CJK JP" pitchFamily="34" charset="-120"/>
+              </a:rPr>
+              <a:t>② Tool 選択</a:t>
+            </a:r>
+            <a:endParaRPr lang="en-US" sz="1300" dirty="0"/>
+          </a:p>
+        </p:txBody>
+      </p:sp>
+      <p:sp>
+        <p:nvSpPr>
+          <p:cNvPr id="11" name="Text 9"/>
+          <p:cNvSpPr txBox="1"/>
+          <p:nvPr/>
+        </p:nvSpPr>
+        <p:spPr>
+          <a:xfrm>
+            <a:off x="292608" y="2286000"/>
+            <a:ext cx="2057400" cy="182880"/>
+          </a:xfrm>
+          <a:prstGeom prst="rect">
+            <a:avLst/>
+          </a:prstGeom>
+          <a:noFill/>
+          <a:ln/>
+        </p:spPr>
+        <p:txBody>
+          <a:bodyPr wrap="square" lIns="0" tIns="0" rIns="0" bIns="0" rtlCol="0" anchor="t"/>
+          <a:lstStyle/>
+          <a:p>
+            <a:pPr marL="0" indent="0">
+              <a:buNone/>
+            </a:pPr>
+            <a:r>
+              <a:rPr lang="en-US" sz="1050" dirty="0">
+                <a:solidFill>
+                  <a:srgbClr val="000000"/>
+                </a:solidFill>
+                <a:latin typeface="Noto Sans CJK JP" pitchFamily="34" charset="0"/>
+                <a:ea typeface="Noto Sans CJK JP" pitchFamily="34" charset="-122"/>
+                <a:cs typeface="Noto Sans CJK JP" pitchFamily="34" charset="-120"/>
+              </a:rPr>
+              <a:t>LLM が利用可能な Tool の中から</a:t>
+            </a:r>
+            <a:endParaRPr lang="en-US" sz="1050" dirty="0"/>
+          </a:p>
+        </p:txBody>
+      </p:sp>
+      <p:sp>
+        <p:nvSpPr>
+          <p:cNvPr id="12" name="Text 10"/>
+          <p:cNvSpPr txBox="1"/>
+          <p:nvPr/>
+        </p:nvSpPr>
+        <p:spPr>
+          <a:xfrm>
+            <a:off x="292608" y="2478024"/>
+            <a:ext cx="2057400" cy="182880"/>
+          </a:xfrm>
+          <a:prstGeom prst="rect">
+            <a:avLst/>
+          </a:prstGeom>
+          <a:noFill/>
+          <a:ln/>
+        </p:spPr>
+        <p:txBody>
+          <a:bodyPr wrap="square" lIns="0" tIns="0" rIns="0" bIns="0" rtlCol="0" anchor="t"/>
+          <a:lstStyle/>
+          <a:p>
+            <a:pPr marL="0" indent="0">
+              <a:buNone/>
+            </a:pPr>
+            <a:r>
+              <a:rPr lang="en-US" sz="1050" dirty="0">
+                <a:solidFill>
+                  <a:srgbClr val="000000"/>
+                </a:solidFill>
+                <a:latin typeface="Noto Sans CJK JP" pitchFamily="34" charset="0"/>
+                <a:ea typeface="Noto Sans CJK JP" pitchFamily="34" charset="-122"/>
+                <a:cs typeface="Noto Sans CJK JP" pitchFamily="34" charset="-120"/>
+              </a:rPr>
+              <a:t>Tool Request を生成</a:t>
+            </a:r>
+            <a:endParaRPr lang="en-US" sz="1050" dirty="0"/>
+          </a:p>
+        </p:txBody>
+      </p:sp>
+      <p:sp>
+        <p:nvSpPr>
+          <p:cNvPr id="13" name="Shape 11"/>
+          <p:cNvSpPr/>
+          <p:nvPr/>
+        </p:nvSpPr>
+        <p:spPr>
+          <a:xfrm>
+            <a:off x="274320" y="2788920"/>
+            <a:ext cx="2057400" cy="0"/>
+          </a:xfrm>
+          <a:prstGeom prst="line">
+            <a:avLst/>
+          </a:prstGeom>
+          <a:noFill/>
+          <a:ln w="10160">
+            <a:solidFill>
+              <a:srgbClr val="DADEE2"/>
+            </a:solidFill>
+            <a:prstDash val="solid"/>
+          </a:ln>
+        </p:spPr>
+        <p:txBody>
+          <a:bodyPr/>
+          <a:lstStyle/>
+          <a:p>
+            <a:endParaRPr lang="en-JP"/>
+          </a:p>
+        </p:txBody>
+      </p:sp>
+      <p:sp>
+        <p:nvSpPr>
+          <p:cNvPr id="14" name="Text 12"/>
+          <p:cNvSpPr txBox="1"/>
+          <p:nvPr/>
+        </p:nvSpPr>
+        <p:spPr>
+          <a:xfrm>
+            <a:off x="274320" y="2944368"/>
+            <a:ext cx="2057400" cy="219456"/>
+          </a:xfrm>
+          <a:prstGeom prst="rect">
+            <a:avLst/>
+          </a:prstGeom>
+          <a:noFill/>
+          <a:ln/>
+        </p:spPr>
+        <p:txBody>
+          <a:bodyPr wrap="square" lIns="0" tIns="0" rIns="0" bIns="0" rtlCol="0" anchor="t"/>
+          <a:lstStyle/>
+          <a:p>
+            <a:pPr marL="0" indent="0" algn="l">
+              <a:buNone/>
+            </a:pPr>
+            <a:r>
+              <a:rPr lang="en-US" sz="1300" b="1" dirty="0">
+                <a:solidFill>
+                  <a:srgbClr val="004696"/>
+                </a:solidFill>
+                <a:latin typeface="Noto Sans CJK JP" pitchFamily="34" charset="0"/>
+                <a:ea typeface="Noto Sans CJK JP" pitchFamily="34" charset="-122"/>
+                <a:cs typeface="Noto Sans CJK JP" pitchFamily="34" charset="-120"/>
+              </a:rPr>
+              <a:t>③ Permission 評価</a:t>
+            </a:r>
+            <a:endParaRPr lang="en-US" sz="1300" dirty="0"/>
+          </a:p>
+        </p:txBody>
+      </p:sp>
+      <p:sp>
+        <p:nvSpPr>
+          <p:cNvPr id="15" name="Text 13"/>
+          <p:cNvSpPr txBox="1"/>
+          <p:nvPr/>
+        </p:nvSpPr>
+        <p:spPr>
+          <a:xfrm>
+            <a:off x="292608" y="3218688"/>
+            <a:ext cx="2057400" cy="182880"/>
+          </a:xfrm>
+          <a:prstGeom prst="rect">
+            <a:avLst/>
+          </a:prstGeom>
+          <a:noFill/>
+          <a:ln/>
+        </p:spPr>
+        <p:txBody>
+          <a:bodyPr wrap="square" lIns="0" tIns="0" rIns="0" bIns="0" rtlCol="0" anchor="t"/>
+          <a:lstStyle/>
+          <a:p>
+            <a:pPr marL="0" indent="0">
+              <a:buNone/>
+            </a:pPr>
+            <a:r>
+              <a:rPr lang="en-US" sz="1050" dirty="0">
+                <a:solidFill>
+                  <a:srgbClr val="000000"/>
+                </a:solidFill>
+                <a:latin typeface="Noto Sans CJK JP" pitchFamily="34" charset="0"/>
+                <a:ea typeface="Noto Sans CJK JP" pitchFamily="34" charset="-122"/>
+                <a:cs typeface="Noto Sans CJK JP" pitchFamily="34" charset="-120"/>
+              </a:rPr>
+              <a:t>Permission system により</a:t>
+            </a:r>
+            <a:endParaRPr lang="en-US" sz="1050" dirty="0"/>
+          </a:p>
+        </p:txBody>
+      </p:sp>
+      <p:sp>
+        <p:nvSpPr>
+          <p:cNvPr id="16" name="Text 14"/>
+          <p:cNvSpPr txBox="1"/>
+          <p:nvPr/>
+        </p:nvSpPr>
+        <p:spPr>
+          <a:xfrm>
+            <a:off x="292608" y="3410712"/>
+            <a:ext cx="2057400" cy="182880"/>
+          </a:xfrm>
+          <a:prstGeom prst="rect">
+            <a:avLst/>
+          </a:prstGeom>
+          <a:noFill/>
+          <a:ln/>
+        </p:spPr>
+        <p:txBody>
+          <a:bodyPr wrap="square" lIns="0" tIns="0" rIns="0" bIns="0" rtlCol="0" anchor="t"/>
+          <a:lstStyle/>
+          <a:p>
+            <a:pPr marL="0" indent="0">
+              <a:buNone/>
+            </a:pPr>
+            <a:r>
+              <a:rPr lang="en-US" sz="1050" dirty="0">
+                <a:solidFill>
+                  <a:srgbClr val="000000"/>
+                </a:solidFill>
+                <a:latin typeface="Noto Sans CJK JP" pitchFamily="34" charset="0"/>
+                <a:ea typeface="Noto Sans CJK JP" pitchFamily="34" charset="-122"/>
+                <a:cs typeface="Noto Sans CJK JP" pitchFamily="34" charset="-120"/>
+              </a:rPr>
+              <a:t>Tool 実行の可否を判定</a:t>
+            </a:r>
+            <a:endParaRPr lang="en-US" sz="1050" dirty="0"/>
+          </a:p>
+        </p:txBody>
+      </p:sp>
+      <p:sp>
+        <p:nvSpPr>
+          <p:cNvPr id="17" name="Text 15"/>
+          <p:cNvSpPr txBox="1"/>
+          <p:nvPr/>
+        </p:nvSpPr>
+        <p:spPr>
+          <a:xfrm>
+            <a:off x="292608" y="3602736"/>
+            <a:ext cx="2057400" cy="182880"/>
+          </a:xfrm>
+          <a:prstGeom prst="rect">
+            <a:avLst/>
+          </a:prstGeom>
+          <a:noFill/>
+          <a:ln/>
+        </p:spPr>
+        <p:txBody>
+          <a:bodyPr wrap="square" lIns="0" tIns="0" rIns="0" bIns="0" rtlCol="0" anchor="t"/>
+          <a:lstStyle/>
+          <a:p>
+            <a:pPr marL="0" indent="0">
+              <a:buNone/>
+            </a:pPr>
+            <a:r>
+              <a:rPr lang="en-US" sz="1050" b="1" dirty="0">
+                <a:solidFill>
+                  <a:srgbClr val="004696"/>
+                </a:solidFill>
+                <a:latin typeface="Noto Sans CJK JP" pitchFamily="34" charset="0"/>
+                <a:ea typeface="Noto Sans CJK JP" pitchFamily="34" charset="-122"/>
+                <a:cs typeface="Noto Sans CJK JP" pitchFamily="34" charset="-120"/>
+              </a:rPr>
+              <a:t>今回の demo では</a:t>
+            </a:r>
+            <a:endParaRPr lang="en-US" sz="1050" dirty="0"/>
+          </a:p>
+        </p:txBody>
+      </p:sp>
+      <p:sp>
+        <p:nvSpPr>
+          <p:cNvPr id="18" name="Text 16"/>
+          <p:cNvSpPr txBox="1"/>
+          <p:nvPr/>
+        </p:nvSpPr>
+        <p:spPr>
+          <a:xfrm>
+            <a:off x="292608" y="3794760"/>
+            <a:ext cx="2057400" cy="182880"/>
+          </a:xfrm>
+          <a:prstGeom prst="rect">
+            <a:avLst/>
+          </a:prstGeom>
+          <a:noFill/>
+          <a:ln/>
+        </p:spPr>
+        <p:txBody>
+          <a:bodyPr wrap="square" lIns="0" tIns="0" rIns="0" bIns="0" rtlCol="0" anchor="t"/>
+          <a:lstStyle/>
+          <a:p>
+            <a:pPr marL="0" indent="0">
+              <a:buNone/>
+            </a:pPr>
+            <a:r>
+              <a:rPr lang="en-US" sz="1050" b="1" dirty="0">
+                <a:solidFill>
+                  <a:srgbClr val="004696"/>
+                </a:solidFill>
+                <a:latin typeface="Noto Sans CJK JP" pitchFamily="34" charset="0"/>
+                <a:ea typeface="Noto Sans CJK JP" pitchFamily="34" charset="-122"/>
+                <a:cs typeface="Noto Sans CJK JP" pitchFamily="34" charset="-120"/>
+              </a:rPr>
+              <a:t>can_use_tool</a:t>
+            </a:r>
+            <a:r>
+              <a:rPr lang="en-US" sz="1050" dirty="0">
+                <a:solidFill>
+                  <a:srgbClr val="004696"/>
+                </a:solidFill>
+                <a:latin typeface="Noto Sans CJK JP" pitchFamily="34" charset="0"/>
+                <a:ea typeface="Noto Sans CJK JP" pitchFamily="34" charset="-122"/>
+                <a:cs typeface="Noto Sans CJK JP" pitchFamily="34" charset="-120"/>
+              </a:rPr>
+              <a:t> で権限判定</a:t>
+            </a:r>
+            <a:endParaRPr lang="en-US" sz="1050" dirty="0"/>
+          </a:p>
+        </p:txBody>
+      </p:sp>
+      <p:sp>
+        <p:nvSpPr>
+          <p:cNvPr id="19" name="Shape 17"/>
+          <p:cNvSpPr/>
+          <p:nvPr/>
+        </p:nvSpPr>
+        <p:spPr>
+          <a:xfrm>
+            <a:off x="274320" y="4187952"/>
+            <a:ext cx="2057400" cy="0"/>
+          </a:xfrm>
+          <a:prstGeom prst="line">
+            <a:avLst/>
+          </a:prstGeom>
+          <a:noFill/>
+          <a:ln w="10160">
+            <a:solidFill>
+              <a:srgbClr val="DADEE2"/>
+            </a:solidFill>
+            <a:prstDash val="solid"/>
+          </a:ln>
+        </p:spPr>
+        <p:txBody>
+          <a:bodyPr/>
+          <a:lstStyle/>
+          <a:p>
+            <a:endParaRPr lang="en-JP"/>
+          </a:p>
+        </p:txBody>
+      </p:sp>
+      <p:sp>
+        <p:nvSpPr>
+          <p:cNvPr id="20" name="Text 18"/>
+          <p:cNvSpPr txBox="1"/>
+          <p:nvPr/>
+        </p:nvSpPr>
+        <p:spPr>
+          <a:xfrm>
+            <a:off x="274320" y="4370832"/>
+            <a:ext cx="2057400" cy="219456"/>
+          </a:xfrm>
+          <a:prstGeom prst="rect">
+            <a:avLst/>
+          </a:prstGeom>
+          <a:noFill/>
+          <a:ln/>
+        </p:spPr>
+        <p:txBody>
+          <a:bodyPr wrap="square" lIns="0" tIns="0" rIns="0" bIns="0" rtlCol="0" anchor="t"/>
+          <a:lstStyle/>
+          <a:p>
+            <a:pPr marL="0" indent="0" algn="l">
+              <a:buNone/>
+            </a:pPr>
+            <a:r>
+              <a:rPr lang="en-US" sz="1300" b="1" dirty="0">
+                <a:solidFill>
+                  <a:srgbClr val="004696"/>
+                </a:solidFill>
+                <a:latin typeface="Noto Sans CJK JP" pitchFamily="34" charset="0"/>
+                <a:ea typeface="Noto Sans CJK JP" pitchFamily="34" charset="-122"/>
+                <a:cs typeface="Noto Sans CJK JP" pitchFamily="34" charset="-120"/>
+              </a:rPr>
+              <a:t>④ Tool 実行</a:t>
+            </a:r>
+            <a:endParaRPr lang="en-US" sz="1300" dirty="0"/>
+          </a:p>
+        </p:txBody>
+      </p:sp>
+      <p:sp>
+        <p:nvSpPr>
+          <p:cNvPr id="21" name="Text 19"/>
+          <p:cNvSpPr txBox="1"/>
+          <p:nvPr/>
+        </p:nvSpPr>
+        <p:spPr>
+          <a:xfrm>
+            <a:off x="292608" y="4645152"/>
+            <a:ext cx="2057400" cy="182880"/>
+          </a:xfrm>
+          <a:prstGeom prst="rect">
+            <a:avLst/>
+          </a:prstGeom>
+          <a:noFill/>
+          <a:ln/>
+        </p:spPr>
+        <p:txBody>
+          <a:bodyPr wrap="square" lIns="0" tIns="0" rIns="0" bIns="0" rtlCol="0" anchor="t"/>
+          <a:lstStyle/>
+          <a:p>
+            <a:pPr marL="0" indent="0">
+              <a:buNone/>
+            </a:pPr>
+            <a:r>
+              <a:rPr lang="en-US" sz="1050" dirty="0">
+                <a:solidFill>
+                  <a:srgbClr val="000000"/>
+                </a:solidFill>
+                <a:latin typeface="Noto Sans CJK JP" pitchFamily="34" charset="0"/>
+                <a:ea typeface="Noto Sans CJK JP" pitchFamily="34" charset="-122"/>
+                <a:cs typeface="Noto Sans CJK JP" pitchFamily="34" charset="-120"/>
+              </a:rPr>
+              <a:t>Allow の場合のみ</a:t>
+            </a:r>
+            <a:endParaRPr lang="en-US" sz="1050" dirty="0"/>
+          </a:p>
+        </p:txBody>
+      </p:sp>
+      <p:sp>
+        <p:nvSpPr>
+          <p:cNvPr id="22" name="Text 20"/>
+          <p:cNvSpPr txBox="1"/>
+          <p:nvPr/>
+        </p:nvSpPr>
+        <p:spPr>
+          <a:xfrm>
+            <a:off x="292608" y="4837176"/>
+            <a:ext cx="2057400" cy="182880"/>
+          </a:xfrm>
+          <a:prstGeom prst="rect">
+            <a:avLst/>
+          </a:prstGeom>
+          <a:noFill/>
+          <a:ln/>
+        </p:spPr>
+        <p:txBody>
+          <a:bodyPr wrap="square" lIns="0" tIns="0" rIns="0" bIns="0" rtlCol="0" anchor="t"/>
+          <a:lstStyle/>
+          <a:p>
+            <a:pPr marL="0" indent="0">
+              <a:buNone/>
+            </a:pPr>
+            <a:r>
+              <a:rPr lang="en-US" sz="1050" dirty="0">
+                <a:solidFill>
+                  <a:srgbClr val="000000"/>
+                </a:solidFill>
+                <a:latin typeface="Noto Sans CJK JP" pitchFamily="34" charset="0"/>
+                <a:ea typeface="Noto Sans CJK JP" pitchFamily="34" charset="-122"/>
+                <a:cs typeface="Noto Sans CJK JP" pitchFamily="34" charset="-120"/>
+              </a:rPr>
+              <a:t>Tool を実行</a:t>
+            </a:r>
+            <a:endParaRPr lang="en-US" sz="1050" dirty="0"/>
+          </a:p>
+        </p:txBody>
+      </p:sp>
+      <p:sp>
+        <p:nvSpPr>
+          <p:cNvPr id="23" name="Shape 21"/>
+          <p:cNvSpPr/>
+          <p:nvPr/>
+        </p:nvSpPr>
+        <p:spPr>
+          <a:xfrm>
+            <a:off x="274320" y="5138928"/>
+            <a:ext cx="2057400" cy="0"/>
+          </a:xfrm>
+          <a:prstGeom prst="line">
+            <a:avLst/>
+          </a:prstGeom>
+          <a:noFill/>
+          <a:ln w="10160">
+            <a:solidFill>
+              <a:srgbClr val="DADEE2"/>
+            </a:solidFill>
+            <a:prstDash val="solid"/>
+          </a:ln>
+        </p:spPr>
+        <p:txBody>
+          <a:bodyPr/>
+          <a:lstStyle/>
+          <a:p>
+            <a:endParaRPr lang="en-JP"/>
+          </a:p>
+        </p:txBody>
+      </p:sp>
+      <p:sp>
+        <p:nvSpPr>
+          <p:cNvPr id="24" name="Text 22"/>
+          <p:cNvSpPr txBox="1"/>
+          <p:nvPr/>
+        </p:nvSpPr>
+        <p:spPr>
+          <a:xfrm>
+            <a:off x="274320" y="5321808"/>
+            <a:ext cx="2057400" cy="219456"/>
+          </a:xfrm>
+          <a:prstGeom prst="rect">
+            <a:avLst/>
+          </a:prstGeom>
+          <a:noFill/>
+          <a:ln/>
+        </p:spPr>
+        <p:txBody>
+          <a:bodyPr wrap="square" lIns="0" tIns="0" rIns="0" bIns="0" rtlCol="0" anchor="t"/>
+          <a:lstStyle/>
+          <a:p>
+            <a:pPr marL="0" indent="0" algn="l">
+              <a:buNone/>
+            </a:pPr>
+            <a:r>
+              <a:rPr lang="en-US" sz="1300" b="1" dirty="0">
+                <a:solidFill>
+                  <a:srgbClr val="004696"/>
+                </a:solidFill>
+                <a:latin typeface="Noto Sans CJK JP" pitchFamily="34" charset="0"/>
+                <a:ea typeface="Noto Sans CJK JP" pitchFamily="34" charset="-122"/>
+                <a:cs typeface="Noto Sans CJK JP" pitchFamily="34" charset="-120"/>
+              </a:rPr>
+              <a:t>⑤ 応答</a:t>
+            </a:r>
+            <a:endParaRPr lang="en-US" sz="1300" dirty="0"/>
+          </a:p>
+        </p:txBody>
+      </p:sp>
+      <p:sp>
+        <p:nvSpPr>
+          <p:cNvPr id="25" name="Text 23"/>
+          <p:cNvSpPr txBox="1"/>
+          <p:nvPr/>
+        </p:nvSpPr>
+        <p:spPr>
+          <a:xfrm>
+            <a:off x="292608" y="5596128"/>
+            <a:ext cx="2057400" cy="182880"/>
+          </a:xfrm>
+          <a:prstGeom prst="rect">
+            <a:avLst/>
+          </a:prstGeom>
+          <a:noFill/>
+          <a:ln/>
+        </p:spPr>
+        <p:txBody>
+          <a:bodyPr wrap="square" lIns="0" tIns="0" rIns="0" bIns="0" rtlCol="0" anchor="t"/>
+          <a:lstStyle/>
+          <a:p>
+            <a:pPr marL="0" indent="0">
+              <a:buNone/>
+            </a:pPr>
+            <a:r>
+              <a:rPr lang="en-US" sz="1050" dirty="0">
+                <a:solidFill>
+                  <a:srgbClr val="000000"/>
+                </a:solidFill>
+                <a:latin typeface="Noto Sans CJK JP" pitchFamily="34" charset="0"/>
+                <a:ea typeface="Noto Sans CJK JP" pitchFamily="34" charset="-122"/>
+                <a:cs typeface="Noto Sans CJK JP" pitchFamily="34" charset="-120"/>
+              </a:rPr>
+              <a:t>結果を LLM に返し，</a:t>
+            </a:r>
+            <a:endParaRPr lang="en-US" sz="1050" dirty="0"/>
+          </a:p>
+        </p:txBody>
+      </p:sp>
+      <p:sp>
+        <p:nvSpPr>
+          <p:cNvPr id="26" name="Text 24"/>
+          <p:cNvSpPr txBox="1"/>
+          <p:nvPr/>
+        </p:nvSpPr>
+        <p:spPr>
+          <a:xfrm>
+            <a:off x="292608" y="5788152"/>
+            <a:ext cx="2057400" cy="182880"/>
+          </a:xfrm>
+          <a:prstGeom prst="rect">
+            <a:avLst/>
+          </a:prstGeom>
+          <a:noFill/>
+          <a:ln/>
+        </p:spPr>
+        <p:txBody>
+          <a:bodyPr wrap="square" lIns="0" tIns="0" rIns="0" bIns="0" rtlCol="0" anchor="t"/>
+          <a:lstStyle/>
+          <a:p>
+            <a:pPr marL="0" indent="0">
+              <a:buNone/>
+            </a:pPr>
+            <a:r>
+              <a:rPr lang="en-US" sz="1050" dirty="0">
+                <a:solidFill>
+                  <a:srgbClr val="000000"/>
+                </a:solidFill>
+                <a:latin typeface="Noto Sans CJK JP" pitchFamily="34" charset="0"/>
+                <a:ea typeface="Noto Sans CJK JP" pitchFamily="34" charset="-122"/>
+                <a:cs typeface="Noto Sans CJK JP" pitchFamily="34" charset="-120"/>
+              </a:rPr>
+              <a:t>ユーザに応答を返す</a:t>
+            </a:r>
+            <a:endParaRPr lang="en-US" sz="1050" dirty="0"/>
+          </a:p>
+        </p:txBody>
+      </p:sp>
+      <p:sp>
+        <p:nvSpPr>
+          <p:cNvPr id="27" name="Shape 25"/>
+          <p:cNvSpPr/>
+          <p:nvPr/>
+        </p:nvSpPr>
+        <p:spPr>
+          <a:xfrm>
+            <a:off x="2912364" y="1261872"/>
+            <a:ext cx="1920240" cy="310896"/>
+          </a:xfrm>
+          <a:prstGeom prst="rect">
+            <a:avLst/>
+          </a:prstGeom>
+          <a:solidFill>
+            <a:srgbClr val="FFFFFF"/>
+          </a:solidFill>
+          <a:ln w="10160">
+            <a:solidFill>
+              <a:srgbClr val="000000"/>
+            </a:solidFill>
+            <a:prstDash val="solid"/>
+          </a:ln>
+        </p:spPr>
+        <p:txBody>
+          <a:bodyPr/>
+          <a:lstStyle/>
+          <a:p>
+            <a:endParaRPr lang="en-JP"/>
+          </a:p>
+        </p:txBody>
+      </p:sp>
+      <p:sp>
+        <p:nvSpPr>
+          <p:cNvPr id="28" name="Text 26"/>
+          <p:cNvSpPr txBox="1"/>
+          <p:nvPr/>
+        </p:nvSpPr>
+        <p:spPr>
+          <a:xfrm>
+            <a:off x="2912364" y="1261872"/>
+            <a:ext cx="1920240" cy="310896"/>
+          </a:xfrm>
+          <a:prstGeom prst="rect">
+            <a:avLst/>
+          </a:prstGeom>
+          <a:noFill/>
+          <a:ln/>
+        </p:spPr>
+        <p:txBody>
+          <a:bodyPr wrap="square" lIns="0" tIns="0" rIns="0" bIns="0" rtlCol="0" anchor="ctr"/>
+          <a:lstStyle/>
+          <a:p>
+            <a:pPr marL="0" indent="0" algn="ctr">
+              <a:buNone/>
+            </a:pPr>
+            <a:r>
+              <a:rPr lang="en-US" sz="1150" b="1" dirty="0">
+                <a:solidFill>
+                  <a:srgbClr val="000000"/>
+                </a:solidFill>
+                <a:latin typeface="Noto Sans CJK JP" pitchFamily="34" charset="0"/>
+                <a:ea typeface="Noto Sans CJK JP" pitchFamily="34" charset="-122"/>
+                <a:cs typeface="Noto Sans CJK JP" pitchFamily="34" charset="-120"/>
+              </a:rPr>
+              <a:t>ユーザ</a:t>
+            </a:r>
+            <a:endParaRPr lang="en-US" sz="1150" dirty="0"/>
+          </a:p>
+        </p:txBody>
+      </p:sp>
+      <p:sp>
+        <p:nvSpPr>
+          <p:cNvPr id="29" name="Shape 27"/>
+          <p:cNvSpPr/>
+          <p:nvPr/>
+        </p:nvSpPr>
+        <p:spPr>
+          <a:xfrm>
+            <a:off x="3872484" y="1572768"/>
+            <a:ext cx="0" cy="301752"/>
+          </a:xfrm>
+          <a:prstGeom prst="line">
+            <a:avLst/>
+          </a:prstGeom>
+          <a:noFill/>
+          <a:ln w="10160">
+            <a:solidFill>
+              <a:srgbClr val="000000"/>
+            </a:solidFill>
+            <a:prstDash val="solid"/>
+          </a:ln>
+        </p:spPr>
+        <p:txBody>
+          <a:bodyPr/>
+          <a:lstStyle/>
+          <a:p>
+            <a:endParaRPr lang="en-JP"/>
+          </a:p>
+        </p:txBody>
+      </p:sp>
+      <p:sp>
+        <p:nvSpPr>
+          <p:cNvPr id="30" name="Text 28"/>
+          <p:cNvSpPr txBox="1"/>
+          <p:nvPr/>
+        </p:nvSpPr>
+        <p:spPr>
+          <a:xfrm>
+            <a:off x="3954780" y="1627632"/>
+            <a:ext cx="822960" cy="164592"/>
+          </a:xfrm>
+          <a:prstGeom prst="rect">
+            <a:avLst/>
+          </a:prstGeom>
+          <a:noFill/>
+          <a:ln/>
+        </p:spPr>
+        <p:txBody>
+          <a:bodyPr wrap="square" lIns="0" tIns="0" rIns="0" bIns="0" rtlCol="0" anchor="t"/>
+          <a:lstStyle/>
+          <a:p>
+            <a:pPr marL="0" indent="0" algn="l">
+              <a:buNone/>
+            </a:pPr>
+            <a:r>
+              <a:rPr lang="en-US" sz="950" dirty="0">
+                <a:solidFill>
+                  <a:srgbClr val="333333"/>
+                </a:solidFill>
+                <a:latin typeface="Noto Sans CJK JP" pitchFamily="34" charset="0"/>
+                <a:ea typeface="Noto Sans CJK JP" pitchFamily="34" charset="-122"/>
+                <a:cs typeface="Noto Sans CJK JP" pitchFamily="34" charset="-120"/>
+              </a:rPr>
+              <a:t>Prompt</a:t>
+            </a:r>
+            <a:endParaRPr lang="en-US" sz="950" dirty="0"/>
+          </a:p>
+        </p:txBody>
+      </p:sp>
+      <p:sp>
+        <p:nvSpPr>
+          <p:cNvPr id="31" name="Shape 29"/>
+          <p:cNvSpPr/>
+          <p:nvPr/>
+        </p:nvSpPr>
+        <p:spPr>
+          <a:xfrm>
+            <a:off x="2912364" y="1874520"/>
+            <a:ext cx="1920240" cy="310896"/>
+          </a:xfrm>
+          <a:prstGeom prst="rect">
+            <a:avLst/>
+          </a:prstGeom>
+          <a:solidFill>
+            <a:srgbClr val="FFFFFF"/>
+          </a:solidFill>
+          <a:ln w="10160">
+            <a:solidFill>
+              <a:srgbClr val="000000"/>
+            </a:solidFill>
+            <a:prstDash val="solid"/>
+          </a:ln>
+        </p:spPr>
+        <p:txBody>
+          <a:bodyPr/>
+          <a:lstStyle/>
+          <a:p>
+            <a:endParaRPr lang="en-JP"/>
+          </a:p>
+        </p:txBody>
+      </p:sp>
+      <p:sp>
+        <p:nvSpPr>
+          <p:cNvPr id="32" name="Text 30"/>
+          <p:cNvSpPr txBox="1"/>
+          <p:nvPr/>
+        </p:nvSpPr>
+        <p:spPr>
+          <a:xfrm>
+            <a:off x="2912364" y="1874520"/>
+            <a:ext cx="1920240" cy="310896"/>
+          </a:xfrm>
+          <a:prstGeom prst="rect">
+            <a:avLst/>
+          </a:prstGeom>
+          <a:noFill/>
+          <a:ln/>
+        </p:spPr>
+        <p:txBody>
+          <a:bodyPr wrap="square" lIns="0" tIns="0" rIns="0" bIns="0" rtlCol="0" anchor="ctr"/>
+          <a:lstStyle/>
+          <a:p>
+            <a:pPr marL="0" indent="0" algn="ctr">
+              <a:buNone/>
+            </a:pPr>
+            <a:r>
+              <a:rPr lang="en-US" sz="1150" b="1" dirty="0">
+                <a:solidFill>
+                  <a:srgbClr val="000000"/>
+                </a:solidFill>
+                <a:latin typeface="Noto Sans CJK JP" pitchFamily="34" charset="0"/>
+                <a:ea typeface="Noto Sans CJK JP" pitchFamily="34" charset="-122"/>
+                <a:cs typeface="Noto Sans CJK JP" pitchFamily="34" charset="-120"/>
+              </a:rPr>
+              <a:t>LLM</a:t>
+            </a:r>
+            <a:endParaRPr lang="en-US" sz="1150" dirty="0"/>
+          </a:p>
+        </p:txBody>
+      </p:sp>
+      <p:sp>
+        <p:nvSpPr>
+          <p:cNvPr id="33" name="Shape 31"/>
+          <p:cNvSpPr/>
+          <p:nvPr/>
+        </p:nvSpPr>
+        <p:spPr>
+          <a:xfrm>
+            <a:off x="3872484" y="2185416"/>
+            <a:ext cx="0" cy="329184"/>
+          </a:xfrm>
+          <a:prstGeom prst="line">
+            <a:avLst/>
+          </a:prstGeom>
+          <a:noFill/>
+          <a:ln w="10160">
+            <a:solidFill>
+              <a:srgbClr val="000000"/>
+            </a:solidFill>
+            <a:prstDash val="solid"/>
+          </a:ln>
+        </p:spPr>
+        <p:txBody>
+          <a:bodyPr/>
+          <a:lstStyle/>
+          <a:p>
+            <a:endParaRPr lang="en-JP"/>
+          </a:p>
+        </p:txBody>
+      </p:sp>
+      <p:sp>
+        <p:nvSpPr>
+          <p:cNvPr id="34" name="Text 32"/>
+          <p:cNvSpPr txBox="1"/>
+          <p:nvPr/>
+        </p:nvSpPr>
+        <p:spPr>
+          <a:xfrm>
+            <a:off x="3954780" y="2249424"/>
+            <a:ext cx="1097280" cy="164592"/>
+          </a:xfrm>
+          <a:prstGeom prst="rect">
+            <a:avLst/>
+          </a:prstGeom>
+          <a:noFill/>
+          <a:ln/>
+        </p:spPr>
+        <p:txBody>
+          <a:bodyPr wrap="square" lIns="0" tIns="0" rIns="0" bIns="0" rtlCol="0" anchor="t"/>
+          <a:lstStyle/>
+          <a:p>
+            <a:pPr marL="0" indent="0" algn="l">
+              <a:buNone/>
+            </a:pPr>
+            <a:r>
+              <a:rPr lang="en-US" sz="950" dirty="0">
+                <a:solidFill>
+                  <a:srgbClr val="333333"/>
+                </a:solidFill>
+                <a:latin typeface="Noto Sans CJK JP" pitchFamily="34" charset="0"/>
+                <a:ea typeface="Noto Sans CJK JP" pitchFamily="34" charset="-122"/>
+                <a:cs typeface="Noto Sans CJK JP" pitchFamily="34" charset="-120"/>
+              </a:rPr>
+              <a:t>Tool Request</a:t>
+            </a:r>
+            <a:endParaRPr lang="en-US" sz="950" dirty="0"/>
+          </a:p>
+        </p:txBody>
+      </p:sp>
+      <p:sp>
+        <p:nvSpPr>
+          <p:cNvPr id="35" name="Shape 33"/>
+          <p:cNvSpPr/>
+          <p:nvPr/>
+        </p:nvSpPr>
+        <p:spPr>
+          <a:xfrm>
+            <a:off x="2638044" y="2514600"/>
+            <a:ext cx="2468880" cy="1783080"/>
+          </a:xfrm>
+          <a:prstGeom prst="roundRect">
+            <a:avLst>
+              <a:gd name="adj" fmla="val 3077"/>
+            </a:avLst>
+          </a:prstGeom>
+          <a:solidFill>
+            <a:srgbClr val="FFFFFF"/>
+          </a:solidFill>
+          <a:ln w="15240">
+            <a:solidFill>
+              <a:srgbClr val="7030A0"/>
+            </a:solidFill>
+            <a:prstDash val="solid"/>
+          </a:ln>
+        </p:spPr>
+        <p:txBody>
+          <a:bodyPr/>
+          <a:lstStyle/>
+          <a:p>
+            <a:endParaRPr lang="en-JP"/>
+          </a:p>
+        </p:txBody>
+      </p:sp>
+      <p:sp>
+        <p:nvSpPr>
+          <p:cNvPr id="36" name="Text 34"/>
+          <p:cNvSpPr txBox="1"/>
+          <p:nvPr/>
+        </p:nvSpPr>
+        <p:spPr>
+          <a:xfrm>
+            <a:off x="2638044" y="2578608"/>
+            <a:ext cx="2468880" cy="219456"/>
+          </a:xfrm>
+          <a:prstGeom prst="rect">
+            <a:avLst/>
+          </a:prstGeom>
+          <a:noFill/>
+          <a:ln/>
+        </p:spPr>
+        <p:txBody>
+          <a:bodyPr wrap="square" lIns="0" tIns="0" rIns="0" bIns="0" rtlCol="0" anchor="t"/>
+          <a:lstStyle/>
+          <a:p>
+            <a:pPr marL="0" indent="0" algn="ctr">
+              <a:buNone/>
+            </a:pPr>
+            <a:r>
+              <a:rPr lang="en-US" sz="1300" b="1" dirty="0">
+                <a:solidFill>
+                  <a:srgbClr val="7030A0"/>
+                </a:solidFill>
+                <a:latin typeface="Noto Sans CJK JP" pitchFamily="34" charset="0"/>
+                <a:ea typeface="Noto Sans CJK JP" pitchFamily="34" charset="-122"/>
+                <a:cs typeface="Noto Sans CJK JP" pitchFamily="34" charset="-120"/>
+              </a:rPr>
+              <a:t>Permission 評価</a:t>
+            </a:r>
+            <a:endParaRPr lang="en-US" sz="1300" dirty="0"/>
+          </a:p>
+        </p:txBody>
+      </p:sp>
+      <p:sp>
+        <p:nvSpPr>
+          <p:cNvPr id="37" name="Text 35"/>
+          <p:cNvSpPr txBox="1"/>
+          <p:nvPr/>
+        </p:nvSpPr>
+        <p:spPr>
+          <a:xfrm>
+            <a:off x="2638044" y="2816352"/>
+            <a:ext cx="2468880" cy="182880"/>
+          </a:xfrm>
+          <a:prstGeom prst="rect">
+            <a:avLst/>
+          </a:prstGeom>
+          <a:noFill/>
+          <a:ln/>
+        </p:spPr>
+        <p:txBody>
+          <a:bodyPr wrap="square" lIns="0" tIns="0" rIns="0" bIns="0" rtlCol="0" anchor="t"/>
+          <a:lstStyle/>
+          <a:p>
+            <a:pPr marL="0" indent="0" algn="ctr">
+              <a:buNone/>
+            </a:pPr>
+            <a:r>
+              <a:rPr lang="en-US" sz="950" dirty="0">
+                <a:solidFill>
+                  <a:srgbClr val="000000"/>
+                </a:solidFill>
+                <a:latin typeface="Noto Sans CJK JP" pitchFamily="34" charset="0"/>
+                <a:ea typeface="Noto Sans CJK JP" pitchFamily="34" charset="-122"/>
+                <a:cs typeface="Noto Sans CJK JP" pitchFamily="34" charset="-120"/>
+              </a:rPr>
+              <a:t>Tool 実行前に権限を評価</a:t>
+            </a:r>
+            <a:endParaRPr lang="en-US" sz="950" dirty="0"/>
+          </a:p>
+        </p:txBody>
+      </p:sp>
+      <p:sp>
+        <p:nvSpPr>
+          <p:cNvPr id="38" name="Text 36"/>
+          <p:cNvSpPr txBox="1"/>
+          <p:nvPr/>
+        </p:nvSpPr>
+        <p:spPr>
+          <a:xfrm>
+            <a:off x="2793492" y="3090672"/>
+            <a:ext cx="2194560" cy="182880"/>
+          </a:xfrm>
+          <a:prstGeom prst="rect">
+            <a:avLst/>
+          </a:prstGeom>
+          <a:noFill/>
+          <a:ln/>
+        </p:spPr>
+        <p:txBody>
+          <a:bodyPr wrap="square" lIns="0" tIns="0" rIns="0" bIns="0" rtlCol="0" anchor="t"/>
+          <a:lstStyle/>
+          <a:p>
+            <a:pPr marL="0" indent="0" algn="l">
+              <a:buNone/>
+            </a:pPr>
+            <a:r>
+              <a:rPr lang="en-US" sz="1050" dirty="0">
+                <a:solidFill>
+                  <a:srgbClr val="000000"/>
+                </a:solidFill>
+                <a:latin typeface="Noto Sans CJK JP" pitchFamily="34" charset="0"/>
+                <a:ea typeface="Noto Sans CJK JP" pitchFamily="34" charset="-122"/>
+                <a:cs typeface="Noto Sans CJK JP" pitchFamily="34" charset="-120"/>
+              </a:rPr>
+              <a:t>・ PreToolUse Hook</a:t>
+            </a:r>
+            <a:endParaRPr lang="en-US" sz="1050" dirty="0"/>
+          </a:p>
+        </p:txBody>
+      </p:sp>
+      <p:sp>
+        <p:nvSpPr>
+          <p:cNvPr id="39" name="Text 37"/>
+          <p:cNvSpPr txBox="1"/>
+          <p:nvPr/>
+        </p:nvSpPr>
+        <p:spPr>
+          <a:xfrm>
+            <a:off x="2793492" y="3305556"/>
+            <a:ext cx="2194560" cy="182880"/>
+          </a:xfrm>
+          <a:prstGeom prst="rect">
+            <a:avLst/>
+          </a:prstGeom>
+          <a:noFill/>
+          <a:ln/>
+        </p:spPr>
+        <p:txBody>
+          <a:bodyPr wrap="square" lIns="0" tIns="0" rIns="0" bIns="0" rtlCol="0" anchor="t"/>
+          <a:lstStyle/>
+          <a:p>
+            <a:pPr marL="0" indent="0" algn="l">
+              <a:buNone/>
+            </a:pPr>
+            <a:r>
+              <a:rPr lang="en-US" sz="1050" dirty="0">
+                <a:solidFill>
+                  <a:srgbClr val="000000"/>
+                </a:solidFill>
+                <a:latin typeface="Noto Sans CJK JP" pitchFamily="34" charset="0"/>
+                <a:ea typeface="Noto Sans CJK JP" pitchFamily="34" charset="-122"/>
+                <a:cs typeface="Noto Sans CJK JP" pitchFamily="34" charset="-120"/>
+              </a:rPr>
+              <a:t>・ Deny rules</a:t>
+            </a:r>
+            <a:endParaRPr lang="en-US" sz="1050" dirty="0"/>
+          </a:p>
+        </p:txBody>
+      </p:sp>
+      <p:sp>
+        <p:nvSpPr>
+          <p:cNvPr id="40" name="Text 38"/>
+          <p:cNvSpPr txBox="1"/>
+          <p:nvPr/>
+        </p:nvSpPr>
+        <p:spPr>
+          <a:xfrm>
+            <a:off x="2793492" y="3520440"/>
+            <a:ext cx="2194560" cy="182880"/>
+          </a:xfrm>
+          <a:prstGeom prst="rect">
+            <a:avLst/>
+          </a:prstGeom>
+          <a:noFill/>
+          <a:ln/>
+        </p:spPr>
+        <p:txBody>
+          <a:bodyPr wrap="square" lIns="0" tIns="0" rIns="0" bIns="0" rtlCol="0" anchor="t"/>
+          <a:lstStyle/>
+          <a:p>
+            <a:pPr marL="0" indent="0" algn="l">
+              <a:buNone/>
+            </a:pPr>
+            <a:r>
+              <a:rPr lang="en-US" sz="1050" dirty="0">
+                <a:solidFill>
+                  <a:srgbClr val="000000"/>
+                </a:solidFill>
+                <a:latin typeface="Noto Sans CJK JP" pitchFamily="34" charset="0"/>
+                <a:ea typeface="Noto Sans CJK JP" pitchFamily="34" charset="-122"/>
+                <a:cs typeface="Noto Sans CJK JP" pitchFamily="34" charset="-120"/>
+              </a:rPr>
+              <a:t>・ Permission mode</a:t>
+            </a:r>
+            <a:endParaRPr lang="en-US" sz="1050" dirty="0"/>
+          </a:p>
+        </p:txBody>
+      </p:sp>
+      <p:sp>
+        <p:nvSpPr>
+          <p:cNvPr id="41" name="Text 39"/>
+          <p:cNvSpPr txBox="1"/>
+          <p:nvPr/>
+        </p:nvSpPr>
+        <p:spPr>
+          <a:xfrm>
+            <a:off x="2793492" y="3735324"/>
+            <a:ext cx="2194560" cy="182880"/>
+          </a:xfrm>
+          <a:prstGeom prst="rect">
+            <a:avLst/>
+          </a:prstGeom>
+          <a:noFill/>
+          <a:ln/>
+        </p:spPr>
+        <p:txBody>
+          <a:bodyPr wrap="square" lIns="0" tIns="0" rIns="0" bIns="0" rtlCol="0" anchor="t"/>
+          <a:lstStyle/>
+          <a:p>
+            <a:pPr marL="0" indent="0" algn="l">
+              <a:buNone/>
+            </a:pPr>
+            <a:r>
+              <a:rPr lang="en-US" sz="1050" dirty="0">
+                <a:solidFill>
+                  <a:srgbClr val="000000"/>
+                </a:solidFill>
+                <a:latin typeface="Noto Sans CJK JP" pitchFamily="34" charset="0"/>
+                <a:ea typeface="Noto Sans CJK JP" pitchFamily="34" charset="-122"/>
+                <a:cs typeface="Noto Sans CJK JP" pitchFamily="34" charset="-120"/>
+              </a:rPr>
+              <a:t>・ Allow rules</a:t>
+            </a:r>
+            <a:endParaRPr lang="en-US" sz="1050" dirty="0"/>
+          </a:p>
+        </p:txBody>
+      </p:sp>
+      <p:sp>
+        <p:nvSpPr>
+          <p:cNvPr id="42" name="Text 40"/>
+          <p:cNvSpPr txBox="1"/>
+          <p:nvPr/>
+        </p:nvSpPr>
+        <p:spPr>
+          <a:xfrm>
+            <a:off x="2793492" y="3950208"/>
+            <a:ext cx="2286000" cy="182880"/>
+          </a:xfrm>
+          <a:prstGeom prst="rect">
+            <a:avLst/>
+          </a:prstGeom>
+          <a:noFill/>
+          <a:ln/>
+        </p:spPr>
+        <p:txBody>
+          <a:bodyPr wrap="square" lIns="0" tIns="0" rIns="0" bIns="0" rtlCol="0" anchor="t"/>
+          <a:lstStyle/>
+          <a:p>
+            <a:pPr marL="0" indent="0">
+              <a:buNone/>
+            </a:pPr>
+            <a:r>
+              <a:rPr lang="en-US" sz="1050" dirty="0">
+                <a:solidFill>
+                  <a:srgbClr val="000000"/>
+                </a:solidFill>
+                <a:latin typeface="Noto Sans CJK JP" pitchFamily="34" charset="0"/>
+                <a:ea typeface="Noto Sans CJK JP" pitchFamily="34" charset="-122"/>
+                <a:cs typeface="Noto Sans CJK JP" pitchFamily="34" charset="-120"/>
+              </a:rPr>
+              <a:t>・ </a:t>
+            </a:r>
+            <a:r>
+              <a:rPr lang="en-US" sz="1050" b="1" dirty="0">
+                <a:solidFill>
+                  <a:srgbClr val="7030A0"/>
+                </a:solidFill>
+                <a:latin typeface="Noto Sans CJK JP" pitchFamily="34" charset="0"/>
+                <a:ea typeface="Noto Sans CJK JP" pitchFamily="34" charset="-122"/>
+                <a:cs typeface="Noto Sans CJK JP" pitchFamily="34" charset="-120"/>
+              </a:rPr>
+              <a:t>can_use_tool</a:t>
+            </a:r>
+            <a:r>
+              <a:rPr lang="en-US" sz="1050" dirty="0">
+                <a:solidFill>
+                  <a:srgbClr val="7030A0"/>
+                </a:solidFill>
+                <a:latin typeface="Noto Sans CJK JP" pitchFamily="34" charset="0"/>
+                <a:ea typeface="Noto Sans CJK JP" pitchFamily="34" charset="-122"/>
+                <a:cs typeface="Noto Sans CJK JP" pitchFamily="34" charset="-120"/>
+              </a:rPr>
+              <a:t> ← 今回の demo</a:t>
+            </a:r>
+            <a:endParaRPr lang="en-US" sz="1050" dirty="0"/>
+          </a:p>
+        </p:txBody>
+      </p:sp>
+      <p:sp>
+        <p:nvSpPr>
+          <p:cNvPr id="43" name="Shape 41"/>
+          <p:cNvSpPr/>
+          <p:nvPr/>
+        </p:nvSpPr>
+        <p:spPr>
+          <a:xfrm>
+            <a:off x="3090672" y="4297680"/>
+            <a:ext cx="0" cy="292608"/>
+          </a:xfrm>
+          <a:prstGeom prst="line">
+            <a:avLst/>
+          </a:prstGeom>
+          <a:noFill/>
+          <a:ln w="10160">
+            <a:solidFill>
+              <a:srgbClr val="000000"/>
+            </a:solidFill>
+            <a:prstDash val="solid"/>
+          </a:ln>
+        </p:spPr>
+        <p:txBody>
+          <a:bodyPr/>
+          <a:lstStyle/>
+          <a:p>
+            <a:endParaRPr lang="en-JP"/>
+          </a:p>
+        </p:txBody>
+      </p:sp>
+      <p:sp>
+        <p:nvSpPr>
+          <p:cNvPr id="44" name="Shape 42"/>
+          <p:cNvSpPr/>
+          <p:nvPr/>
+        </p:nvSpPr>
+        <p:spPr>
+          <a:xfrm>
+            <a:off x="4626864" y="4297680"/>
+            <a:ext cx="0" cy="292608"/>
+          </a:xfrm>
+          <a:prstGeom prst="line">
+            <a:avLst/>
+          </a:prstGeom>
+          <a:noFill/>
+          <a:ln w="10160">
+            <a:solidFill>
+              <a:srgbClr val="000000"/>
+            </a:solidFill>
+            <a:prstDash val="solid"/>
+          </a:ln>
+        </p:spPr>
+        <p:txBody>
+          <a:bodyPr/>
+          <a:lstStyle/>
+          <a:p>
+            <a:endParaRPr lang="en-JP"/>
+          </a:p>
+        </p:txBody>
+      </p:sp>
+      <p:sp>
+        <p:nvSpPr>
+          <p:cNvPr id="45" name="Shape 43"/>
+          <p:cNvSpPr/>
+          <p:nvPr/>
+        </p:nvSpPr>
+        <p:spPr>
+          <a:xfrm>
+            <a:off x="2432304" y="4590288"/>
+            <a:ext cx="1316736" cy="438912"/>
+          </a:xfrm>
+          <a:prstGeom prst="roundRect">
+            <a:avLst>
+              <a:gd name="adj" fmla="val 12500"/>
+            </a:avLst>
+          </a:prstGeom>
+          <a:solidFill>
+            <a:srgbClr val="FFFFFF"/>
+          </a:solidFill>
+          <a:ln w="15240">
+            <a:solidFill>
+              <a:srgbClr val="328C37"/>
+            </a:solidFill>
+            <a:prstDash val="solid"/>
+          </a:ln>
+        </p:spPr>
+        <p:txBody>
+          <a:bodyPr/>
+          <a:lstStyle/>
+          <a:p>
+            <a:endParaRPr lang="en-JP"/>
+          </a:p>
+        </p:txBody>
+      </p:sp>
+      <p:sp>
+        <p:nvSpPr>
+          <p:cNvPr id="46" name="Text 44"/>
+          <p:cNvSpPr txBox="1"/>
+          <p:nvPr/>
+        </p:nvSpPr>
+        <p:spPr>
+          <a:xfrm>
+            <a:off x="2432304" y="4626864"/>
+            <a:ext cx="1316736" cy="201168"/>
+          </a:xfrm>
+          <a:prstGeom prst="rect">
+            <a:avLst/>
+          </a:prstGeom>
+          <a:noFill/>
+          <a:ln/>
+        </p:spPr>
+        <p:txBody>
+          <a:bodyPr wrap="square" lIns="0" tIns="0" rIns="0" bIns="0" rtlCol="0" anchor="t"/>
+          <a:lstStyle/>
+          <a:p>
+            <a:pPr marL="0" indent="0" algn="ctr">
+              <a:buNone/>
+            </a:pPr>
+            <a:r>
+              <a:rPr lang="en-US" sz="1250" b="1" dirty="0">
+                <a:solidFill>
+                  <a:srgbClr val="328C37"/>
+                </a:solidFill>
+                <a:latin typeface="Noto Sans CJK JP" pitchFamily="34" charset="0"/>
+                <a:ea typeface="Noto Sans CJK JP" pitchFamily="34" charset="-122"/>
+                <a:cs typeface="Noto Sans CJK JP" pitchFamily="34" charset="-120"/>
+              </a:rPr>
+              <a:t>Allow</a:t>
+            </a:r>
+            <a:endParaRPr lang="en-US" sz="1250" dirty="0"/>
+          </a:p>
+        </p:txBody>
+      </p:sp>
+      <p:sp>
+        <p:nvSpPr>
+          <p:cNvPr id="47" name="Text 45"/>
+          <p:cNvSpPr txBox="1"/>
+          <p:nvPr/>
+        </p:nvSpPr>
+        <p:spPr>
+          <a:xfrm>
+            <a:off x="2432304" y="4818888"/>
+            <a:ext cx="1316736" cy="164592"/>
+          </a:xfrm>
+          <a:prstGeom prst="rect">
+            <a:avLst/>
+          </a:prstGeom>
+          <a:noFill/>
+          <a:ln/>
+        </p:spPr>
+        <p:txBody>
+          <a:bodyPr wrap="square" lIns="0" tIns="0" rIns="0" bIns="0" rtlCol="0" anchor="t"/>
+          <a:lstStyle/>
+          <a:p>
+            <a:pPr marL="0" indent="0" algn="ctr">
+              <a:buNone/>
+            </a:pPr>
+            <a:r>
+              <a:rPr lang="en-US" sz="850" dirty="0">
+                <a:solidFill>
+                  <a:srgbClr val="328C37"/>
+                </a:solidFill>
+                <a:latin typeface="Noto Sans CJK JP" pitchFamily="34" charset="0"/>
+                <a:ea typeface="Noto Sans CJK JP" pitchFamily="34" charset="-122"/>
+                <a:cs typeface="Noto Sans CJK JP" pitchFamily="34" charset="-120"/>
+              </a:rPr>
+              <a:t>（実行を許可）</a:t>
+            </a:r>
+            <a:endParaRPr lang="en-US" sz="850" dirty="0"/>
+          </a:p>
+        </p:txBody>
+      </p:sp>
+      <p:sp>
+        <p:nvSpPr>
+          <p:cNvPr id="48" name="Shape 46"/>
+          <p:cNvSpPr/>
+          <p:nvPr/>
+        </p:nvSpPr>
+        <p:spPr>
+          <a:xfrm>
+            <a:off x="3968496" y="4590288"/>
+            <a:ext cx="1316736" cy="438912"/>
+          </a:xfrm>
+          <a:prstGeom prst="roundRect">
+            <a:avLst>
+              <a:gd name="adj" fmla="val 12500"/>
+            </a:avLst>
+          </a:prstGeom>
+          <a:solidFill>
+            <a:srgbClr val="FFFFFF"/>
+          </a:solidFill>
+          <a:ln w="15240">
+            <a:solidFill>
+              <a:srgbClr val="910000"/>
+            </a:solidFill>
+            <a:prstDash val="solid"/>
+          </a:ln>
+        </p:spPr>
+        <p:txBody>
+          <a:bodyPr/>
+          <a:lstStyle/>
+          <a:p>
+            <a:endParaRPr lang="en-JP"/>
+          </a:p>
+        </p:txBody>
+      </p:sp>
+      <p:sp>
+        <p:nvSpPr>
+          <p:cNvPr id="49" name="Text 47"/>
+          <p:cNvSpPr txBox="1"/>
+          <p:nvPr/>
+        </p:nvSpPr>
+        <p:spPr>
+          <a:xfrm>
+            <a:off x="3968496" y="4626864"/>
+            <a:ext cx="1316736" cy="201168"/>
+          </a:xfrm>
+          <a:prstGeom prst="rect">
+            <a:avLst/>
+          </a:prstGeom>
+          <a:noFill/>
+          <a:ln/>
+        </p:spPr>
+        <p:txBody>
+          <a:bodyPr wrap="square" lIns="0" tIns="0" rIns="0" bIns="0" rtlCol="0" anchor="t"/>
+          <a:lstStyle/>
+          <a:p>
+            <a:pPr marL="0" indent="0" algn="ctr">
+              <a:buNone/>
+            </a:pPr>
+            <a:r>
+              <a:rPr lang="en-US" sz="1250" b="1" dirty="0">
+                <a:solidFill>
+                  <a:srgbClr val="910000"/>
+                </a:solidFill>
+                <a:latin typeface="Noto Sans CJK JP" pitchFamily="34" charset="0"/>
+                <a:ea typeface="Noto Sans CJK JP" pitchFamily="34" charset="-122"/>
+                <a:cs typeface="Noto Sans CJK JP" pitchFamily="34" charset="-120"/>
+              </a:rPr>
+              <a:t>Deny</a:t>
+            </a:r>
+            <a:endParaRPr lang="en-US" sz="1250" dirty="0"/>
+          </a:p>
+        </p:txBody>
+      </p:sp>
+      <p:sp>
+        <p:nvSpPr>
+          <p:cNvPr id="50" name="Text 48"/>
+          <p:cNvSpPr txBox="1"/>
+          <p:nvPr/>
+        </p:nvSpPr>
+        <p:spPr>
+          <a:xfrm>
+            <a:off x="3968496" y="4818888"/>
+            <a:ext cx="1316736" cy="164592"/>
+          </a:xfrm>
+          <a:prstGeom prst="rect">
+            <a:avLst/>
+          </a:prstGeom>
+          <a:noFill/>
+          <a:ln/>
+        </p:spPr>
+        <p:txBody>
+          <a:bodyPr wrap="square" lIns="0" tIns="0" rIns="0" bIns="0" rtlCol="0" anchor="t"/>
+          <a:lstStyle/>
+          <a:p>
+            <a:pPr marL="0" indent="0" algn="ctr">
+              <a:buNone/>
+            </a:pPr>
+            <a:r>
+              <a:rPr lang="en-US" sz="850" dirty="0">
+                <a:solidFill>
+                  <a:srgbClr val="910000"/>
+                </a:solidFill>
+                <a:latin typeface="Noto Sans CJK JP" pitchFamily="34" charset="0"/>
+                <a:ea typeface="Noto Sans CJK JP" pitchFamily="34" charset="-122"/>
+                <a:cs typeface="Noto Sans CJK JP" pitchFamily="34" charset="-120"/>
+              </a:rPr>
+              <a:t>（実行を拒否）</a:t>
+            </a:r>
+            <a:endParaRPr lang="en-US" sz="850" dirty="0"/>
+          </a:p>
+        </p:txBody>
+      </p:sp>
+      <p:sp>
+        <p:nvSpPr>
+          <p:cNvPr id="51" name="Shape 49"/>
+          <p:cNvSpPr/>
+          <p:nvPr/>
+        </p:nvSpPr>
+        <p:spPr>
+          <a:xfrm>
+            <a:off x="3090672" y="5029200"/>
+            <a:ext cx="0" cy="201168"/>
+          </a:xfrm>
+          <a:prstGeom prst="line">
+            <a:avLst/>
+          </a:prstGeom>
+          <a:noFill/>
+          <a:ln w="10160">
+            <a:solidFill>
+              <a:srgbClr val="000000"/>
+            </a:solidFill>
+            <a:prstDash val="solid"/>
+          </a:ln>
+        </p:spPr>
+        <p:txBody>
+          <a:bodyPr/>
+          <a:lstStyle/>
+          <a:p>
+            <a:endParaRPr lang="en-JP"/>
+          </a:p>
+        </p:txBody>
+      </p:sp>
+      <p:sp>
+        <p:nvSpPr>
+          <p:cNvPr id="52" name="Shape 50"/>
+          <p:cNvSpPr/>
+          <p:nvPr/>
+        </p:nvSpPr>
+        <p:spPr>
+          <a:xfrm>
+            <a:off x="4626864" y="5029200"/>
+            <a:ext cx="0" cy="201168"/>
+          </a:xfrm>
+          <a:prstGeom prst="line">
+            <a:avLst/>
+          </a:prstGeom>
+          <a:noFill/>
+          <a:ln w="10160">
+            <a:solidFill>
+              <a:srgbClr val="000000"/>
+            </a:solidFill>
+            <a:prstDash val="solid"/>
+          </a:ln>
+        </p:spPr>
+        <p:txBody>
+          <a:bodyPr/>
+          <a:lstStyle/>
+          <a:p>
+            <a:endParaRPr lang="en-JP"/>
+          </a:p>
+        </p:txBody>
+      </p:sp>
+      <p:sp>
+        <p:nvSpPr>
+          <p:cNvPr id="53" name="Shape 51"/>
+          <p:cNvSpPr/>
+          <p:nvPr/>
+        </p:nvSpPr>
+        <p:spPr>
+          <a:xfrm>
+            <a:off x="2450592" y="5230368"/>
+            <a:ext cx="1280160" cy="402336"/>
+          </a:xfrm>
+          <a:prstGeom prst="rect">
+            <a:avLst/>
+          </a:prstGeom>
+          <a:solidFill>
+            <a:srgbClr val="FFFFFF"/>
+          </a:solidFill>
+          <a:ln w="10160">
+            <a:solidFill>
+              <a:srgbClr val="000000"/>
+            </a:solidFill>
+            <a:prstDash val="solid"/>
+          </a:ln>
+        </p:spPr>
+        <p:txBody>
+          <a:bodyPr/>
+          <a:lstStyle/>
+          <a:p>
+            <a:endParaRPr lang="en-JP"/>
+          </a:p>
+        </p:txBody>
+      </p:sp>
+      <p:sp>
+        <p:nvSpPr>
+          <p:cNvPr id="54" name="Text 52"/>
+          <p:cNvSpPr txBox="1"/>
+          <p:nvPr/>
+        </p:nvSpPr>
+        <p:spPr>
+          <a:xfrm>
+            <a:off x="2450592" y="5276088"/>
+            <a:ext cx="1280160" cy="201168"/>
+          </a:xfrm>
+          <a:prstGeom prst="rect">
+            <a:avLst/>
+          </a:prstGeom>
+          <a:noFill/>
+          <a:ln/>
+        </p:spPr>
+        <p:txBody>
+          <a:bodyPr wrap="square" lIns="0" tIns="0" rIns="0" bIns="0" rtlCol="0" anchor="t"/>
+          <a:lstStyle/>
+          <a:p>
+            <a:pPr marL="0" indent="0" algn="ctr">
+              <a:buNone/>
+            </a:pPr>
+            <a:r>
+              <a:rPr lang="en-US" sz="1050" b="1" dirty="0">
+                <a:solidFill>
+                  <a:srgbClr val="000000"/>
+                </a:solidFill>
+                <a:latin typeface="Noto Sans CJK JP" pitchFamily="34" charset="0"/>
+                <a:ea typeface="Noto Sans CJK JP" pitchFamily="34" charset="-122"/>
+                <a:cs typeface="Noto Sans CJK JP" pitchFamily="34" charset="-120"/>
+              </a:rPr>
+              <a:t>Tool Execution</a:t>
+            </a:r>
+            <a:endParaRPr lang="en-US" sz="1050" dirty="0"/>
+          </a:p>
+        </p:txBody>
+      </p:sp>
+      <p:sp>
+        <p:nvSpPr>
+          <p:cNvPr id="55" name="Text 53"/>
+          <p:cNvSpPr txBox="1"/>
+          <p:nvPr/>
+        </p:nvSpPr>
+        <p:spPr>
+          <a:xfrm>
+            <a:off x="2450592" y="5449824"/>
+            <a:ext cx="1280160" cy="164592"/>
+          </a:xfrm>
+          <a:prstGeom prst="rect">
+            <a:avLst/>
+          </a:prstGeom>
+          <a:noFill/>
+          <a:ln/>
+        </p:spPr>
+        <p:txBody>
+          <a:bodyPr wrap="square" lIns="0" tIns="0" rIns="0" bIns="0" rtlCol="0" anchor="t"/>
+          <a:lstStyle/>
+          <a:p>
+            <a:pPr marL="0" indent="0" algn="ctr">
+              <a:buNone/>
+            </a:pPr>
+            <a:r>
+              <a:rPr lang="en-US" sz="950" dirty="0">
+                <a:solidFill>
+                  <a:srgbClr val="000000"/>
+                </a:solidFill>
+                <a:latin typeface="Noto Sans CJK JP" pitchFamily="34" charset="0"/>
+                <a:ea typeface="Noto Sans CJK JP" pitchFamily="34" charset="-122"/>
+                <a:cs typeface="Noto Sans CJK JP" pitchFamily="34" charset="-120"/>
+              </a:rPr>
+              <a:t>（Tool 実行）</a:t>
+            </a:r>
+            <a:endParaRPr lang="en-US" sz="950" dirty="0"/>
+          </a:p>
+        </p:txBody>
+      </p:sp>
+      <p:sp>
+        <p:nvSpPr>
+          <p:cNvPr id="56" name="Shape 54"/>
+          <p:cNvSpPr/>
+          <p:nvPr/>
+        </p:nvSpPr>
+        <p:spPr>
+          <a:xfrm>
+            <a:off x="3858768" y="5230368"/>
+            <a:ext cx="1536192" cy="402336"/>
+          </a:xfrm>
+          <a:prstGeom prst="rect">
+            <a:avLst/>
+          </a:prstGeom>
+          <a:solidFill>
+            <a:srgbClr val="FFFFFF"/>
+          </a:solidFill>
+          <a:ln w="10160">
+            <a:solidFill>
+              <a:srgbClr val="000000"/>
+            </a:solidFill>
+            <a:prstDash val="solid"/>
+          </a:ln>
+        </p:spPr>
+        <p:txBody>
+          <a:bodyPr/>
+          <a:lstStyle/>
+          <a:p>
+            <a:endParaRPr lang="en-JP"/>
+          </a:p>
+        </p:txBody>
+      </p:sp>
+      <p:sp>
+        <p:nvSpPr>
+          <p:cNvPr id="57" name="Text 55"/>
+          <p:cNvSpPr txBox="1"/>
+          <p:nvPr/>
+        </p:nvSpPr>
+        <p:spPr>
+          <a:xfrm>
+            <a:off x="3858768" y="5276088"/>
+            <a:ext cx="1536192" cy="201168"/>
+          </a:xfrm>
+          <a:prstGeom prst="rect">
+            <a:avLst/>
+          </a:prstGeom>
+          <a:noFill/>
+          <a:ln/>
+        </p:spPr>
+        <p:txBody>
+          <a:bodyPr wrap="square" lIns="0" tIns="0" rIns="0" bIns="0" rtlCol="0" anchor="t"/>
+          <a:lstStyle/>
+          <a:p>
+            <a:pPr marL="0" indent="0" algn="ctr">
+              <a:buNone/>
+            </a:pPr>
+            <a:r>
+              <a:rPr lang="en-US" sz="1050" b="1" dirty="0">
+                <a:solidFill>
+                  <a:srgbClr val="000000"/>
+                </a:solidFill>
+                <a:latin typeface="Noto Sans CJK JP" pitchFamily="34" charset="0"/>
+                <a:ea typeface="Noto Sans CJK JP" pitchFamily="34" charset="-122"/>
+                <a:cs typeface="Noto Sans CJK JP" pitchFamily="34" charset="-120"/>
+              </a:rPr>
+              <a:t>実行を停止</a:t>
+            </a:r>
+            <a:endParaRPr lang="en-US" sz="1050" dirty="0"/>
+          </a:p>
+        </p:txBody>
+      </p:sp>
+      <p:sp>
+        <p:nvSpPr>
+          <p:cNvPr id="58" name="Text 56"/>
+          <p:cNvSpPr txBox="1"/>
+          <p:nvPr/>
+        </p:nvSpPr>
+        <p:spPr>
+          <a:xfrm>
+            <a:off x="3858768" y="5449824"/>
+            <a:ext cx="1536192" cy="164592"/>
+          </a:xfrm>
+          <a:prstGeom prst="rect">
+            <a:avLst/>
+          </a:prstGeom>
+          <a:noFill/>
+          <a:ln/>
+        </p:spPr>
+        <p:txBody>
+          <a:bodyPr wrap="square" lIns="0" tIns="0" rIns="0" bIns="0" rtlCol="0" anchor="t"/>
+          <a:lstStyle/>
+          <a:p>
+            <a:pPr marL="0" indent="0" algn="ctr">
+              <a:buNone/>
+            </a:pPr>
+            <a:r>
+              <a:rPr lang="en-US" sz="950" dirty="0">
+                <a:solidFill>
+                  <a:srgbClr val="000000"/>
+                </a:solidFill>
+                <a:latin typeface="Noto Sans CJK JP" pitchFamily="34" charset="0"/>
+                <a:ea typeface="Noto Sans CJK JP" pitchFamily="34" charset="-122"/>
+                <a:cs typeface="Noto Sans CJK JP" pitchFamily="34" charset="-120"/>
+              </a:rPr>
+              <a:t>（Tool は実行されない）</a:t>
+            </a:r>
+            <a:endParaRPr lang="en-US" sz="950" dirty="0"/>
+          </a:p>
+        </p:txBody>
+      </p:sp>
+      <p:sp>
+        <p:nvSpPr>
+          <p:cNvPr id="59" name="Shape 57"/>
+          <p:cNvSpPr/>
+          <p:nvPr/>
+        </p:nvSpPr>
+        <p:spPr>
+          <a:xfrm>
+            <a:off x="3090672" y="5632704"/>
+            <a:ext cx="0" cy="109728"/>
+          </a:xfrm>
+          <a:prstGeom prst="line">
+            <a:avLst/>
+          </a:prstGeom>
+          <a:noFill/>
+          <a:ln w="10160">
+            <a:solidFill>
+              <a:srgbClr val="000000"/>
+            </a:solidFill>
+            <a:prstDash val="solid"/>
+          </a:ln>
+        </p:spPr>
+        <p:txBody>
+          <a:bodyPr/>
+          <a:lstStyle/>
+          <a:p>
+            <a:endParaRPr lang="en-JP"/>
+          </a:p>
+        </p:txBody>
+      </p:sp>
+      <p:sp>
+        <p:nvSpPr>
+          <p:cNvPr id="60" name="Shape 58"/>
+          <p:cNvSpPr/>
+          <p:nvPr/>
+        </p:nvSpPr>
+        <p:spPr>
+          <a:xfrm>
+            <a:off x="4626864" y="5632704"/>
+            <a:ext cx="0" cy="109728"/>
+          </a:xfrm>
+          <a:prstGeom prst="line">
+            <a:avLst/>
+          </a:prstGeom>
+          <a:noFill/>
+          <a:ln w="10160">
+            <a:solidFill>
+              <a:srgbClr val="000000"/>
+            </a:solidFill>
+            <a:prstDash val="solid"/>
+          </a:ln>
+        </p:spPr>
+        <p:txBody>
+          <a:bodyPr/>
+          <a:lstStyle/>
+          <a:p>
+            <a:endParaRPr lang="en-JP"/>
+          </a:p>
+        </p:txBody>
+      </p:sp>
+      <p:sp>
+        <p:nvSpPr>
+          <p:cNvPr id="61" name="Shape 59"/>
+          <p:cNvSpPr/>
+          <p:nvPr/>
+        </p:nvSpPr>
+        <p:spPr>
+          <a:xfrm>
+            <a:off x="3090672" y="5742432"/>
+            <a:ext cx="1536192" cy="0"/>
+          </a:xfrm>
+          <a:prstGeom prst="line">
+            <a:avLst/>
+          </a:prstGeom>
+          <a:noFill/>
+          <a:ln w="10160">
+            <a:solidFill>
+              <a:srgbClr val="000000"/>
+            </a:solidFill>
+            <a:prstDash val="solid"/>
+          </a:ln>
+        </p:spPr>
+        <p:txBody>
+          <a:bodyPr/>
+          <a:lstStyle/>
+          <a:p>
+            <a:endParaRPr lang="en-JP"/>
+          </a:p>
+        </p:txBody>
+      </p:sp>
+      <p:sp>
+        <p:nvSpPr>
+          <p:cNvPr id="62" name="Shape 60"/>
+          <p:cNvSpPr/>
+          <p:nvPr/>
+        </p:nvSpPr>
+        <p:spPr>
+          <a:xfrm>
+            <a:off x="3872484" y="5742432"/>
+            <a:ext cx="0" cy="128016"/>
+          </a:xfrm>
+          <a:prstGeom prst="line">
+            <a:avLst/>
+          </a:prstGeom>
+          <a:noFill/>
+          <a:ln w="10160">
+            <a:solidFill>
+              <a:srgbClr val="000000"/>
+            </a:solidFill>
+            <a:prstDash val="solid"/>
+          </a:ln>
+        </p:spPr>
+        <p:txBody>
+          <a:bodyPr/>
+          <a:lstStyle/>
+          <a:p>
+            <a:endParaRPr lang="en-JP"/>
+          </a:p>
+        </p:txBody>
+      </p:sp>
+      <p:sp>
+        <p:nvSpPr>
+          <p:cNvPr id="63" name="Shape 61"/>
+          <p:cNvSpPr/>
+          <p:nvPr/>
+        </p:nvSpPr>
+        <p:spPr>
+          <a:xfrm>
+            <a:off x="2820924" y="5870448"/>
+            <a:ext cx="2103120" cy="292608"/>
+          </a:xfrm>
+          <a:prstGeom prst="rect">
+            <a:avLst/>
+          </a:prstGeom>
+          <a:solidFill>
+            <a:srgbClr val="FFFFFF"/>
+          </a:solidFill>
+          <a:ln w="10160">
+            <a:solidFill>
+              <a:srgbClr val="000000"/>
+            </a:solidFill>
+            <a:prstDash val="solid"/>
+          </a:ln>
+        </p:spPr>
+        <p:txBody>
+          <a:bodyPr/>
+          <a:lstStyle/>
+          <a:p>
+            <a:endParaRPr lang="en-JP"/>
+          </a:p>
+        </p:txBody>
+      </p:sp>
+      <p:sp>
+        <p:nvSpPr>
+          <p:cNvPr id="64" name="Text 62"/>
+          <p:cNvSpPr txBox="1"/>
+          <p:nvPr/>
+        </p:nvSpPr>
+        <p:spPr>
+          <a:xfrm>
+            <a:off x="2820924" y="5870448"/>
+            <a:ext cx="2103120" cy="292608"/>
+          </a:xfrm>
+          <a:prstGeom prst="rect">
+            <a:avLst/>
+          </a:prstGeom>
+          <a:noFill/>
+          <a:ln/>
+        </p:spPr>
+        <p:txBody>
+          <a:bodyPr wrap="square" lIns="0" tIns="0" rIns="0" bIns="0" rtlCol="0" anchor="ctr"/>
+          <a:lstStyle/>
+          <a:p>
+            <a:pPr marL="0" indent="0" algn="ctr">
+              <a:buNone/>
+            </a:pPr>
+            <a:r>
+              <a:rPr lang="en-US" sz="1100" b="1" dirty="0">
+                <a:solidFill>
+                  <a:srgbClr val="000000"/>
+                </a:solidFill>
+                <a:latin typeface="Noto Sans CJK JP" pitchFamily="34" charset="0"/>
+                <a:ea typeface="Noto Sans CJK JP" pitchFamily="34" charset="-122"/>
+                <a:cs typeface="Noto Sans CJK JP" pitchFamily="34" charset="-120"/>
+              </a:rPr>
+              <a:t>結果を LLM に返す</a:t>
+            </a:r>
+            <a:endParaRPr lang="en-US" sz="1100" dirty="0"/>
+          </a:p>
+        </p:txBody>
+      </p:sp>
+      <p:sp>
+        <p:nvSpPr>
+          <p:cNvPr id="65" name="Text 63"/>
+          <p:cNvSpPr txBox="1"/>
+          <p:nvPr/>
+        </p:nvSpPr>
+        <p:spPr>
+          <a:xfrm>
+            <a:off x="5577840" y="1216152"/>
+            <a:ext cx="6309360" cy="201168"/>
+          </a:xfrm>
+          <a:prstGeom prst="rect">
+            <a:avLst/>
+          </a:prstGeom>
+          <a:noFill/>
+          <a:ln/>
+        </p:spPr>
+        <p:txBody>
+          <a:bodyPr wrap="square" lIns="0" tIns="0" rIns="0" bIns="0" rtlCol="0" anchor="t"/>
+          <a:lstStyle/>
+          <a:p>
+            <a:pPr marL="0" indent="0" algn="l">
+              <a:buNone/>
+            </a:pPr>
+            <a:r>
+              <a:rPr lang="en-US" sz="1050" b="1" dirty="0">
+                <a:solidFill>
+                  <a:srgbClr val="000000"/>
+                </a:solidFill>
+                <a:latin typeface="Noto Sans CJK JP" pitchFamily="34" charset="0"/>
+                <a:ea typeface="Noto Sans CJK JP" pitchFamily="34" charset="-122"/>
+                <a:cs typeface="Noto Sans CJK JP" pitchFamily="34" charset="-120"/>
+              </a:rPr>
+              <a:t>can_use_tool： Tool 名と入力に基づき，Allow / Deny を返す</a:t>
+            </a:r>
+            <a:endParaRPr lang="en-US" sz="1050" dirty="0"/>
+          </a:p>
+        </p:txBody>
+      </p:sp>
+      <p:sp>
+        <p:nvSpPr>
+          <p:cNvPr id="66" name="Shape 64"/>
+          <p:cNvSpPr/>
+          <p:nvPr/>
+        </p:nvSpPr>
+        <p:spPr>
+          <a:xfrm>
+            <a:off x="5532120" y="1417320"/>
+            <a:ext cx="6382512" cy="2964434"/>
+          </a:xfrm>
+          <a:prstGeom prst="roundRect">
+            <a:avLst>
+              <a:gd name="adj" fmla="val 1851"/>
+            </a:avLst>
+          </a:prstGeom>
+          <a:solidFill>
+            <a:srgbClr val="FAFBF8"/>
+          </a:solidFill>
+          <a:ln w="10160">
+            <a:solidFill>
+              <a:srgbClr val="B1CEA0"/>
+            </a:solidFill>
+            <a:prstDash val="solid"/>
+          </a:ln>
+        </p:spPr>
+        <p:txBody>
+          <a:bodyPr/>
+          <a:lstStyle/>
+          <a:p>
+            <a:endParaRPr lang="en-JP"/>
+          </a:p>
+        </p:txBody>
+      </p:sp>
+      <p:sp>
+        <p:nvSpPr>
+          <p:cNvPr id="67" name="Text 65"/>
+          <p:cNvSpPr txBox="1"/>
+          <p:nvPr/>
+        </p:nvSpPr>
+        <p:spPr>
+          <a:xfrm>
+            <a:off x="5660136" y="1527048"/>
+            <a:ext cx="6144768" cy="2744978"/>
+          </a:xfrm>
+          <a:prstGeom prst="rect">
+            <a:avLst/>
+          </a:prstGeom>
+          <a:noFill/>
+          <a:ln/>
+        </p:spPr>
+        <p:txBody>
+          <a:bodyPr wrap="square" lIns="0" tIns="0" rIns="0" bIns="0" rtlCol="0" anchor="t"/>
+          <a:lstStyle/>
+          <a:p>
+            <a:pPr marL="0" indent="0" algn="l">
+              <a:lnSpc>
+                <a:spcPts val="1130"/>
+              </a:lnSpc>
+              <a:buNone/>
+            </a:pPr>
+            <a:r>
+              <a:rPr lang="en-US" sz="920" b="1" dirty="0">
+                <a:solidFill>
+                  <a:srgbClr val="0000A0"/>
+                </a:solidFill>
+                <a:latin typeface="DejaVu Sans Mono" pitchFamily="34" charset="0"/>
+                <a:ea typeface="DejaVu Sans Mono" pitchFamily="34" charset="-122"/>
+                <a:cs typeface="DejaVu Sans Mono" pitchFamily="34" charset="-120"/>
+              </a:rPr>
+              <a:t>async</a:t>
+            </a:r>
+            <a:r>
+              <a:rPr lang="en-US" sz="920" dirty="0">
+                <a:solidFill>
+                  <a:srgbClr val="282D34"/>
+                </a:solidFill>
+                <a:latin typeface="DejaVu Sans Mono" pitchFamily="34" charset="0"/>
+                <a:ea typeface="DejaVu Sans Mono" pitchFamily="34" charset="-122"/>
+                <a:cs typeface="DejaVu Sans Mono" pitchFamily="34" charset="-120"/>
+              </a:rPr>
+              <a:t> </a:t>
+            </a:r>
+            <a:r>
+              <a:rPr lang="en-US" sz="920" b="1" dirty="0">
+                <a:solidFill>
+                  <a:srgbClr val="0000A0"/>
+                </a:solidFill>
+                <a:latin typeface="DejaVu Sans Mono" pitchFamily="34" charset="0"/>
+                <a:ea typeface="DejaVu Sans Mono" pitchFamily="34" charset="-122"/>
+                <a:cs typeface="DejaVu Sans Mono" pitchFamily="34" charset="-120"/>
+              </a:rPr>
+              <a:t>def</a:t>
+            </a:r>
+            <a:r>
+              <a:rPr lang="en-US" sz="920" dirty="0">
+                <a:solidFill>
+                  <a:srgbClr val="282D34"/>
+                </a:solidFill>
+                <a:latin typeface="DejaVu Sans Mono" pitchFamily="34" charset="0"/>
+                <a:ea typeface="DejaVu Sans Mono" pitchFamily="34" charset="-122"/>
+                <a:cs typeface="DejaVu Sans Mono" pitchFamily="34" charset="-120"/>
+              </a:rPr>
+              <a:t> </a:t>
+            </a:r>
+            <a:r>
+              <a:rPr lang="en-US" sz="920" b="1" dirty="0">
+                <a:solidFill>
+                  <a:srgbClr val="0000A0"/>
+                </a:solidFill>
+                <a:latin typeface="DejaVu Sans Mono" pitchFamily="34" charset="0"/>
+                <a:ea typeface="DejaVu Sans Mono" pitchFamily="34" charset="-122"/>
+                <a:cs typeface="DejaVu Sans Mono" pitchFamily="34" charset="-120"/>
+              </a:rPr>
+              <a:t>can_use_tool</a:t>
+            </a:r>
+            <a:r>
+              <a:rPr lang="en-US" sz="920" dirty="0">
+                <a:solidFill>
+                  <a:srgbClr val="282D34"/>
+                </a:solidFill>
+                <a:latin typeface="DejaVu Sans Mono" pitchFamily="34" charset="0"/>
+                <a:ea typeface="DejaVu Sans Mono" pitchFamily="34" charset="-122"/>
+                <a:cs typeface="DejaVu Sans Mono" pitchFamily="34" charset="-120"/>
+              </a:rPr>
+              <a:t>(tool_name, input_data, _context):</a:t>
+            </a:r>
+            <a:endParaRPr lang="en-US" sz="920" dirty="0"/>
+          </a:p>
+          <a:p>
+            <a:pPr marL="0" indent="0" algn="l">
+              <a:lnSpc>
+                <a:spcPts val="1130"/>
+              </a:lnSpc>
+              <a:buNone/>
+            </a:pPr>
+            <a:r>
+              <a:rPr lang="en-US" sz="920" dirty="0">
+                <a:solidFill>
+                  <a:srgbClr val="282D34"/>
+                </a:solidFill>
+                <a:latin typeface="DejaVu Sans Mono" pitchFamily="34" charset="0"/>
+                <a:ea typeface="DejaVu Sans Mono" pitchFamily="34" charset="-122"/>
+                <a:cs typeface="DejaVu Sans Mono" pitchFamily="34" charset="-120"/>
+              </a:rPr>
+              <a:t>    filename = referenced_filename(tool_name, input_data)</a:t>
+            </a:r>
+            <a:endParaRPr lang="en-US" sz="920" dirty="0"/>
+          </a:p>
+          <a:p>
+            <a:pPr marL="0" indent="0" algn="l">
+              <a:lnSpc>
+                <a:spcPts val="1130"/>
+              </a:lnSpc>
+              <a:buNone/>
+            </a:pPr>
+            <a:r>
+              <a:rPr lang="en-US" sz="920" dirty="0">
+                <a:solidFill>
+                  <a:srgbClr val="282D34"/>
+                </a:solidFill>
+                <a:latin typeface="DejaVu Sans Mono" pitchFamily="34" charset="0"/>
+                <a:ea typeface="DejaVu Sans Mono" pitchFamily="34" charset="-122"/>
+                <a:cs typeface="DejaVu Sans Mono" pitchFamily="34" charset="-120"/>
+              </a:rPr>
+              <a:t> </a:t>
+            </a:r>
+            <a:endParaRPr lang="en-US" sz="920" dirty="0"/>
+          </a:p>
+          <a:p>
+            <a:pPr marL="0" indent="0" algn="l">
+              <a:lnSpc>
+                <a:spcPts val="1130"/>
+              </a:lnSpc>
+              <a:buNone/>
+            </a:pPr>
+            <a:r>
+              <a:rPr lang="en-US" sz="920" dirty="0">
+                <a:solidFill>
+                  <a:srgbClr val="282D34"/>
+                </a:solidFill>
+                <a:latin typeface="DejaVu Sans Mono" pitchFamily="34" charset="0"/>
+                <a:ea typeface="DejaVu Sans Mono" pitchFamily="34" charset="-122"/>
+                <a:cs typeface="DejaVu Sans Mono" pitchFamily="34" charset="-120"/>
+              </a:rPr>
+              <a:t>    </a:t>
+            </a:r>
+            <a:r>
+              <a:rPr lang="en-US" sz="920" dirty="0">
+                <a:solidFill>
+                  <a:srgbClr val="26782A"/>
+                </a:solidFill>
+                <a:latin typeface="DejaVu Sans Mono" pitchFamily="34" charset="0"/>
+                <a:ea typeface="DejaVu Sans Mono" pitchFamily="34" charset="-122"/>
+                <a:cs typeface="DejaVu Sans Mono" pitchFamily="34" charset="-120"/>
+              </a:rPr>
+              <a:t># 1) Read は常に許可</a:t>
+            </a:r>
+            <a:endParaRPr lang="en-US" sz="920" dirty="0"/>
+          </a:p>
+          <a:p>
+            <a:pPr marL="0" indent="0" algn="l">
+              <a:lnSpc>
+                <a:spcPts val="1130"/>
+              </a:lnSpc>
+              <a:buNone/>
+            </a:pPr>
+            <a:r>
+              <a:rPr lang="en-US" sz="920" dirty="0">
+                <a:solidFill>
+                  <a:srgbClr val="282D34"/>
+                </a:solidFill>
+                <a:latin typeface="DejaVu Sans Mono" pitchFamily="34" charset="0"/>
+                <a:ea typeface="DejaVu Sans Mono" pitchFamily="34" charset="-122"/>
+                <a:cs typeface="DejaVu Sans Mono" pitchFamily="34" charset="-120"/>
+              </a:rPr>
+              <a:t>    </a:t>
+            </a:r>
+            <a:r>
+              <a:rPr lang="en-US" sz="920" b="1" dirty="0">
+                <a:solidFill>
+                  <a:srgbClr val="0000A0"/>
+                </a:solidFill>
+                <a:latin typeface="DejaVu Sans Mono" pitchFamily="34" charset="0"/>
+                <a:ea typeface="DejaVu Sans Mono" pitchFamily="34" charset="-122"/>
+                <a:cs typeface="DejaVu Sans Mono" pitchFamily="34" charset="-120"/>
+              </a:rPr>
+              <a:t>if</a:t>
+            </a:r>
+            <a:r>
+              <a:rPr lang="en-US" sz="920" dirty="0">
+                <a:solidFill>
+                  <a:srgbClr val="282D34"/>
+                </a:solidFill>
+                <a:latin typeface="DejaVu Sans Mono" pitchFamily="34" charset="0"/>
+                <a:ea typeface="DejaVu Sans Mono" pitchFamily="34" charset="-122"/>
+                <a:cs typeface="DejaVu Sans Mono" pitchFamily="34" charset="-120"/>
+              </a:rPr>
+              <a:t> tool_name == READ_TOOL:</a:t>
+            </a:r>
+            <a:endParaRPr lang="en-US" sz="920" dirty="0"/>
+          </a:p>
+          <a:p>
+            <a:pPr marL="0" indent="0" algn="l">
+              <a:lnSpc>
+                <a:spcPts val="1130"/>
+              </a:lnSpc>
+              <a:buNone/>
+            </a:pPr>
+            <a:r>
+              <a:rPr lang="en-US" sz="920" dirty="0">
+                <a:solidFill>
+                  <a:srgbClr val="282D34"/>
+                </a:solidFill>
+                <a:latin typeface="DejaVu Sans Mono" pitchFamily="34" charset="0"/>
+                <a:ea typeface="DejaVu Sans Mono" pitchFamily="34" charset="-122"/>
+                <a:cs typeface="DejaVu Sans Mono" pitchFamily="34" charset="-120"/>
+              </a:rPr>
+              <a:t>        </a:t>
+            </a:r>
+            <a:r>
+              <a:rPr lang="en-US" sz="920" b="1" dirty="0">
+                <a:solidFill>
+                  <a:srgbClr val="0000A0"/>
+                </a:solidFill>
+                <a:latin typeface="DejaVu Sans Mono" pitchFamily="34" charset="0"/>
+                <a:ea typeface="DejaVu Sans Mono" pitchFamily="34" charset="-122"/>
+                <a:cs typeface="DejaVu Sans Mono" pitchFamily="34" charset="-120"/>
+              </a:rPr>
+              <a:t>return</a:t>
+            </a:r>
+            <a:r>
+              <a:rPr lang="en-US" sz="920" dirty="0">
+                <a:solidFill>
+                  <a:srgbClr val="282D34"/>
+                </a:solidFill>
+                <a:latin typeface="DejaVu Sans Mono" pitchFamily="34" charset="0"/>
+                <a:ea typeface="DejaVu Sans Mono" pitchFamily="34" charset="-122"/>
+                <a:cs typeface="DejaVu Sans Mono" pitchFamily="34" charset="-120"/>
+              </a:rPr>
+              <a:t> PermissionResultAllow(updated_input=input_data)</a:t>
+            </a:r>
+            <a:endParaRPr lang="en-US" sz="920" dirty="0"/>
+          </a:p>
+          <a:p>
+            <a:pPr marL="0" indent="0" algn="l">
+              <a:lnSpc>
+                <a:spcPts val="1130"/>
+              </a:lnSpc>
+              <a:buNone/>
+            </a:pPr>
+            <a:r>
+              <a:rPr lang="en-US" sz="920" dirty="0">
+                <a:solidFill>
+                  <a:srgbClr val="282D34"/>
+                </a:solidFill>
+                <a:latin typeface="DejaVu Sans Mono" pitchFamily="34" charset="0"/>
+                <a:ea typeface="DejaVu Sans Mono" pitchFamily="34" charset="-122"/>
+                <a:cs typeface="DejaVu Sans Mono" pitchFamily="34" charset="-120"/>
+              </a:rPr>
+              <a:t> </a:t>
+            </a:r>
+            <a:endParaRPr lang="en-US" sz="920" dirty="0"/>
+          </a:p>
+          <a:p>
+            <a:pPr marL="0" indent="0" algn="l">
+              <a:lnSpc>
+                <a:spcPts val="1130"/>
+              </a:lnSpc>
+              <a:buNone/>
+            </a:pPr>
+            <a:r>
+              <a:rPr lang="en-US" sz="920" dirty="0">
+                <a:solidFill>
+                  <a:srgbClr val="282D34"/>
+                </a:solidFill>
+                <a:latin typeface="DejaVu Sans Mono" pitchFamily="34" charset="0"/>
+                <a:ea typeface="DejaVu Sans Mono" pitchFamily="34" charset="-122"/>
+                <a:cs typeface="DejaVu Sans Mono" pitchFamily="34" charset="-120"/>
+              </a:rPr>
+              <a:t>    </a:t>
+            </a:r>
+            <a:r>
+              <a:rPr lang="en-US" sz="920" dirty="0">
+                <a:solidFill>
+                  <a:srgbClr val="26782A"/>
+                </a:solidFill>
+                <a:latin typeface="DejaVu Sans Mono" pitchFamily="34" charset="0"/>
+                <a:ea typeface="DejaVu Sans Mono" pitchFamily="34" charset="-122"/>
+                <a:cs typeface="DejaVu Sans Mono" pitchFamily="34" charset="-120"/>
+              </a:rPr>
+              <a:t># 2) important.txt への Write は承認が必要（Human Approval 相当）</a:t>
+            </a:r>
+            <a:endParaRPr lang="en-US" sz="920" dirty="0"/>
+          </a:p>
+          <a:p>
+            <a:pPr marL="0" indent="0" algn="l">
+              <a:lnSpc>
+                <a:spcPts val="1130"/>
+              </a:lnSpc>
+              <a:buNone/>
+            </a:pPr>
+            <a:r>
+              <a:rPr lang="en-US" sz="920" dirty="0">
+                <a:solidFill>
+                  <a:srgbClr val="282D34"/>
+                </a:solidFill>
+                <a:latin typeface="DejaVu Sans Mono" pitchFamily="34" charset="0"/>
+                <a:ea typeface="DejaVu Sans Mono" pitchFamily="34" charset="-122"/>
+                <a:cs typeface="DejaVu Sans Mono" pitchFamily="34" charset="-120"/>
+              </a:rPr>
+              <a:t>    </a:t>
+            </a:r>
+            <a:r>
+              <a:rPr lang="en-US" sz="920" b="1" dirty="0">
+                <a:solidFill>
+                  <a:srgbClr val="0000A0"/>
+                </a:solidFill>
+                <a:latin typeface="DejaVu Sans Mono" pitchFamily="34" charset="0"/>
+                <a:ea typeface="DejaVu Sans Mono" pitchFamily="34" charset="-122"/>
+                <a:cs typeface="DejaVu Sans Mono" pitchFamily="34" charset="-120"/>
+              </a:rPr>
+              <a:t>if</a:t>
+            </a:r>
+            <a:r>
+              <a:rPr lang="en-US" sz="920" dirty="0">
+                <a:solidFill>
+                  <a:srgbClr val="282D34"/>
+                </a:solidFill>
+                <a:latin typeface="DejaVu Sans Mono" pitchFamily="34" charset="0"/>
+                <a:ea typeface="DejaVu Sans Mono" pitchFamily="34" charset="-122"/>
+                <a:cs typeface="DejaVu Sans Mono" pitchFamily="34" charset="-120"/>
+              </a:rPr>
+              <a:t> tool_name == WRITE_TOOL </a:t>
+            </a:r>
+            <a:r>
+              <a:rPr lang="en-US" sz="920" b="1" dirty="0">
+                <a:solidFill>
+                  <a:srgbClr val="0000A0"/>
+                </a:solidFill>
+                <a:latin typeface="DejaVu Sans Mono" pitchFamily="34" charset="0"/>
+                <a:ea typeface="DejaVu Sans Mono" pitchFamily="34" charset="-122"/>
+                <a:cs typeface="DejaVu Sans Mono" pitchFamily="34" charset="-120"/>
+              </a:rPr>
+              <a:t>and</a:t>
+            </a:r>
+            <a:r>
+              <a:rPr lang="en-US" sz="920" dirty="0">
+                <a:solidFill>
+                  <a:srgbClr val="282D34"/>
+                </a:solidFill>
+                <a:latin typeface="DejaVu Sans Mono" pitchFamily="34" charset="0"/>
+                <a:ea typeface="DejaVu Sans Mono" pitchFamily="34" charset="-122"/>
+                <a:cs typeface="DejaVu Sans Mono" pitchFamily="34" charset="-120"/>
+              </a:rPr>
+              <a:t> filename == </a:t>
+            </a:r>
+            <a:r>
+              <a:rPr lang="en-US" sz="920" dirty="0">
+                <a:solidFill>
+                  <a:srgbClr val="910000"/>
+                </a:solidFill>
+                <a:latin typeface="DejaVu Sans Mono" pitchFamily="34" charset="0"/>
+                <a:ea typeface="DejaVu Sans Mono" pitchFamily="34" charset="-122"/>
+                <a:cs typeface="DejaVu Sans Mono" pitchFamily="34" charset="-120"/>
+              </a:rPr>
+              <a:t>"important.txt"</a:t>
+            </a:r>
+            <a:r>
+              <a:rPr lang="en-US" sz="920" dirty="0">
+                <a:solidFill>
+                  <a:srgbClr val="282D34"/>
+                </a:solidFill>
+                <a:latin typeface="DejaVu Sans Mono" pitchFamily="34" charset="0"/>
+                <a:ea typeface="DejaVu Sans Mono" pitchFamily="34" charset="-122"/>
+                <a:cs typeface="DejaVu Sans Mono" pitchFamily="34" charset="-120"/>
+              </a:rPr>
+              <a:t>:</a:t>
+            </a:r>
+            <a:endParaRPr lang="en-US" sz="920" dirty="0"/>
+          </a:p>
+          <a:p>
+            <a:pPr marL="0" indent="0" algn="l">
+              <a:lnSpc>
+                <a:spcPts val="1130"/>
+              </a:lnSpc>
+              <a:buNone/>
+            </a:pPr>
+            <a:r>
+              <a:rPr lang="en-US" sz="920" dirty="0">
+                <a:solidFill>
+                  <a:srgbClr val="282D34"/>
+                </a:solidFill>
+                <a:latin typeface="DejaVu Sans Mono" pitchFamily="34" charset="0"/>
+                <a:ea typeface="DejaVu Sans Mono" pitchFamily="34" charset="-122"/>
+                <a:cs typeface="DejaVu Sans Mono" pitchFamily="34" charset="-120"/>
+              </a:rPr>
+              <a:t>        </a:t>
+            </a:r>
+            <a:r>
+              <a:rPr lang="en-US" sz="920" b="1" dirty="0">
+                <a:solidFill>
+                  <a:srgbClr val="0000A0"/>
+                </a:solidFill>
+                <a:latin typeface="DejaVu Sans Mono" pitchFamily="34" charset="0"/>
+                <a:ea typeface="DejaVu Sans Mono" pitchFamily="34" charset="-122"/>
+                <a:cs typeface="DejaVu Sans Mono" pitchFamily="34" charset="-120"/>
+              </a:rPr>
+              <a:t>if</a:t>
+            </a:r>
+            <a:r>
+              <a:rPr lang="en-US" sz="920" dirty="0">
+                <a:solidFill>
+                  <a:srgbClr val="282D34"/>
+                </a:solidFill>
+                <a:latin typeface="DejaVu Sans Mono" pitchFamily="34" charset="0"/>
+                <a:ea typeface="DejaVu Sans Mono" pitchFamily="34" charset="-122"/>
+                <a:cs typeface="DejaVu Sans Mono" pitchFamily="34" charset="-120"/>
+              </a:rPr>
+              <a:t> approve_important_write:</a:t>
+            </a:r>
+            <a:endParaRPr lang="en-US" sz="920" dirty="0"/>
+          </a:p>
+          <a:p>
+            <a:pPr marL="0" indent="0" algn="l">
+              <a:lnSpc>
+                <a:spcPts val="1130"/>
+              </a:lnSpc>
+              <a:buNone/>
+            </a:pPr>
+            <a:r>
+              <a:rPr lang="en-US" sz="920" dirty="0">
+                <a:solidFill>
+                  <a:srgbClr val="282D34"/>
+                </a:solidFill>
+                <a:latin typeface="DejaVu Sans Mono" pitchFamily="34" charset="0"/>
+                <a:ea typeface="DejaVu Sans Mono" pitchFamily="34" charset="-122"/>
+                <a:cs typeface="DejaVu Sans Mono" pitchFamily="34" charset="-120"/>
+              </a:rPr>
+              <a:t>            </a:t>
+            </a:r>
+            <a:r>
+              <a:rPr lang="en-US" sz="920" b="1" dirty="0">
+                <a:solidFill>
+                  <a:srgbClr val="0000A0"/>
+                </a:solidFill>
+                <a:latin typeface="DejaVu Sans Mono" pitchFamily="34" charset="0"/>
+                <a:ea typeface="DejaVu Sans Mono" pitchFamily="34" charset="-122"/>
+                <a:cs typeface="DejaVu Sans Mono" pitchFamily="34" charset="-120"/>
+              </a:rPr>
+              <a:t>return</a:t>
+            </a:r>
+            <a:r>
+              <a:rPr lang="en-US" sz="920" dirty="0">
+                <a:solidFill>
+                  <a:srgbClr val="282D34"/>
+                </a:solidFill>
+                <a:latin typeface="DejaVu Sans Mono" pitchFamily="34" charset="0"/>
+                <a:ea typeface="DejaVu Sans Mono" pitchFamily="34" charset="-122"/>
+                <a:cs typeface="DejaVu Sans Mono" pitchFamily="34" charset="-120"/>
+              </a:rPr>
+              <a:t> PermissionResultAllow(updated_input=input_data)</a:t>
+            </a:r>
+            <a:endParaRPr lang="en-US" sz="920" dirty="0"/>
+          </a:p>
+          <a:p>
+            <a:pPr marL="0" indent="0" algn="l">
+              <a:lnSpc>
+                <a:spcPts val="1130"/>
+              </a:lnSpc>
+              <a:buNone/>
+            </a:pPr>
+            <a:r>
+              <a:rPr lang="en-US" sz="920" dirty="0">
+                <a:solidFill>
+                  <a:srgbClr val="282D34"/>
+                </a:solidFill>
+                <a:latin typeface="DejaVu Sans Mono" pitchFamily="34" charset="0"/>
+                <a:ea typeface="DejaVu Sans Mono" pitchFamily="34" charset="-122"/>
+                <a:cs typeface="DejaVu Sans Mono" pitchFamily="34" charset="-120"/>
+              </a:rPr>
+              <a:t>        </a:t>
+            </a:r>
+            <a:r>
+              <a:rPr lang="en-US" sz="920" b="1" dirty="0">
+                <a:solidFill>
+                  <a:srgbClr val="0000A0"/>
+                </a:solidFill>
+                <a:latin typeface="DejaVu Sans Mono" pitchFamily="34" charset="0"/>
+                <a:ea typeface="DejaVu Sans Mono" pitchFamily="34" charset="-122"/>
+                <a:cs typeface="DejaVu Sans Mono" pitchFamily="34" charset="-120"/>
+              </a:rPr>
+              <a:t>return</a:t>
+            </a:r>
+            <a:r>
+              <a:rPr lang="en-US" sz="920" dirty="0">
+                <a:solidFill>
+                  <a:srgbClr val="282D34"/>
+                </a:solidFill>
+                <a:latin typeface="DejaVu Sans Mono" pitchFamily="34" charset="0"/>
+                <a:ea typeface="DejaVu Sans Mono" pitchFamily="34" charset="-122"/>
+                <a:cs typeface="DejaVu Sans Mono" pitchFamily="34" charset="-120"/>
+              </a:rPr>
+              <a:t> PermissionResultDeny(message=</a:t>
+            </a:r>
+            <a:r>
+              <a:rPr lang="en-US" sz="920" dirty="0">
+                <a:solidFill>
+                  <a:srgbClr val="910000"/>
+                </a:solidFill>
+                <a:latin typeface="DejaVu Sans Mono" pitchFamily="34" charset="0"/>
+                <a:ea typeface="DejaVu Sans Mono" pitchFamily="34" charset="-122"/>
+                <a:cs typeface="DejaVu Sans Mono" pitchFamily="34" charset="-120"/>
+              </a:rPr>
+              <a:t>"Human reviewer rejected write"</a:t>
+            </a:r>
+            <a:r>
+              <a:rPr lang="en-US" sz="920" dirty="0">
+                <a:solidFill>
+                  <a:srgbClr val="282D34"/>
+                </a:solidFill>
+                <a:latin typeface="DejaVu Sans Mono" pitchFamily="34" charset="0"/>
+                <a:ea typeface="DejaVu Sans Mono" pitchFamily="34" charset="-122"/>
+                <a:cs typeface="DejaVu Sans Mono" pitchFamily="34" charset="-120"/>
+              </a:rPr>
+              <a:t>)</a:t>
+            </a:r>
+            <a:endParaRPr lang="en-US" sz="920" dirty="0"/>
+          </a:p>
+          <a:p>
+            <a:pPr marL="0" indent="0" algn="l">
+              <a:lnSpc>
+                <a:spcPts val="1130"/>
+              </a:lnSpc>
+              <a:buNone/>
+            </a:pPr>
+            <a:r>
+              <a:rPr lang="en-US" sz="920" dirty="0">
+                <a:solidFill>
+                  <a:srgbClr val="282D34"/>
+                </a:solidFill>
+                <a:latin typeface="DejaVu Sans Mono" pitchFamily="34" charset="0"/>
+                <a:ea typeface="DejaVu Sans Mono" pitchFamily="34" charset="-122"/>
+                <a:cs typeface="DejaVu Sans Mono" pitchFamily="34" charset="-120"/>
+              </a:rPr>
+              <a:t> </a:t>
+            </a:r>
+            <a:endParaRPr lang="en-US" sz="920" dirty="0"/>
+          </a:p>
+          <a:p>
+            <a:pPr marL="0" indent="0" algn="l">
+              <a:lnSpc>
+                <a:spcPts val="1130"/>
+              </a:lnSpc>
+              <a:buNone/>
+            </a:pPr>
+            <a:r>
+              <a:rPr lang="en-US" sz="920" dirty="0">
+                <a:solidFill>
+                  <a:srgbClr val="282D34"/>
+                </a:solidFill>
+                <a:latin typeface="DejaVu Sans Mono" pitchFamily="34" charset="0"/>
+                <a:ea typeface="DejaVu Sans Mono" pitchFamily="34" charset="-122"/>
+                <a:cs typeface="DejaVu Sans Mono" pitchFamily="34" charset="-120"/>
+              </a:rPr>
+              <a:t>    </a:t>
+            </a:r>
+            <a:r>
+              <a:rPr lang="en-US" sz="920" dirty="0">
+                <a:solidFill>
+                  <a:srgbClr val="26782A"/>
+                </a:solidFill>
+                <a:latin typeface="DejaVu Sans Mono" pitchFamily="34" charset="0"/>
+                <a:ea typeface="DejaVu Sans Mono" pitchFamily="34" charset="-122"/>
+                <a:cs typeface="DejaVu Sans Mono" pitchFamily="34" charset="-120"/>
+              </a:rPr>
+              <a:t># 3) important.txt の Delete は常に拒否</a:t>
+            </a:r>
+            <a:endParaRPr lang="en-US" sz="920" dirty="0"/>
+          </a:p>
+          <a:p>
+            <a:pPr marL="0" indent="0" algn="l">
+              <a:lnSpc>
+                <a:spcPts val="1130"/>
+              </a:lnSpc>
+              <a:buNone/>
+            </a:pPr>
+            <a:r>
+              <a:rPr lang="en-US" sz="920" dirty="0">
+                <a:solidFill>
+                  <a:srgbClr val="282D34"/>
+                </a:solidFill>
+                <a:latin typeface="DejaVu Sans Mono" pitchFamily="34" charset="0"/>
+                <a:ea typeface="DejaVu Sans Mono" pitchFamily="34" charset="-122"/>
+                <a:cs typeface="DejaVu Sans Mono" pitchFamily="34" charset="-120"/>
+              </a:rPr>
+              <a:t>    </a:t>
+            </a:r>
+            <a:r>
+              <a:rPr lang="en-US" sz="920" b="1" dirty="0">
+                <a:solidFill>
+                  <a:srgbClr val="0000A0"/>
+                </a:solidFill>
+                <a:latin typeface="DejaVu Sans Mono" pitchFamily="34" charset="0"/>
+                <a:ea typeface="DejaVu Sans Mono" pitchFamily="34" charset="-122"/>
+                <a:cs typeface="DejaVu Sans Mono" pitchFamily="34" charset="-120"/>
+              </a:rPr>
+              <a:t>if</a:t>
+            </a:r>
+            <a:r>
+              <a:rPr lang="en-US" sz="920" dirty="0">
+                <a:solidFill>
+                  <a:srgbClr val="282D34"/>
+                </a:solidFill>
+                <a:latin typeface="DejaVu Sans Mono" pitchFamily="34" charset="0"/>
+                <a:ea typeface="DejaVu Sans Mono" pitchFamily="34" charset="-122"/>
+                <a:cs typeface="DejaVu Sans Mono" pitchFamily="34" charset="-120"/>
+              </a:rPr>
+              <a:t> tool_name == DELETE_TOOL </a:t>
+            </a:r>
+            <a:r>
+              <a:rPr lang="en-US" sz="920" b="1" dirty="0">
+                <a:solidFill>
+                  <a:srgbClr val="0000A0"/>
+                </a:solidFill>
+                <a:latin typeface="DejaVu Sans Mono" pitchFamily="34" charset="0"/>
+                <a:ea typeface="DejaVu Sans Mono" pitchFamily="34" charset="-122"/>
+                <a:cs typeface="DejaVu Sans Mono" pitchFamily="34" charset="-120"/>
+              </a:rPr>
+              <a:t>and</a:t>
+            </a:r>
+            <a:r>
+              <a:rPr lang="en-US" sz="920" dirty="0">
+                <a:solidFill>
+                  <a:srgbClr val="282D34"/>
+                </a:solidFill>
+                <a:latin typeface="DejaVu Sans Mono" pitchFamily="34" charset="0"/>
+                <a:ea typeface="DejaVu Sans Mono" pitchFamily="34" charset="-122"/>
+                <a:cs typeface="DejaVu Sans Mono" pitchFamily="34" charset="-120"/>
+              </a:rPr>
+              <a:t> filename == </a:t>
+            </a:r>
+            <a:r>
+              <a:rPr lang="en-US" sz="920" dirty="0">
+                <a:solidFill>
+                  <a:srgbClr val="910000"/>
+                </a:solidFill>
+                <a:latin typeface="DejaVu Sans Mono" pitchFamily="34" charset="0"/>
+                <a:ea typeface="DejaVu Sans Mono" pitchFamily="34" charset="-122"/>
+                <a:cs typeface="DejaVu Sans Mono" pitchFamily="34" charset="-120"/>
+              </a:rPr>
+              <a:t>"important.txt"</a:t>
+            </a:r>
+            <a:r>
+              <a:rPr lang="en-US" sz="920" dirty="0">
+                <a:solidFill>
+                  <a:srgbClr val="282D34"/>
+                </a:solidFill>
+                <a:latin typeface="DejaVu Sans Mono" pitchFamily="34" charset="0"/>
+                <a:ea typeface="DejaVu Sans Mono" pitchFamily="34" charset="-122"/>
+                <a:cs typeface="DejaVu Sans Mono" pitchFamily="34" charset="-120"/>
+              </a:rPr>
+              <a:t>:</a:t>
+            </a:r>
+            <a:endParaRPr lang="en-US" sz="920" dirty="0"/>
+          </a:p>
+          <a:p>
+            <a:pPr marL="0" indent="0" algn="l">
+              <a:lnSpc>
+                <a:spcPts val="1130"/>
+              </a:lnSpc>
+              <a:buNone/>
+            </a:pPr>
+            <a:r>
+              <a:rPr lang="en-US" sz="920" dirty="0">
+                <a:solidFill>
+                  <a:srgbClr val="282D34"/>
+                </a:solidFill>
+                <a:latin typeface="DejaVu Sans Mono" pitchFamily="34" charset="0"/>
+                <a:ea typeface="DejaVu Sans Mono" pitchFamily="34" charset="-122"/>
+                <a:cs typeface="DejaVu Sans Mono" pitchFamily="34" charset="-120"/>
+              </a:rPr>
+              <a:t>        </a:t>
+            </a:r>
+            <a:r>
+              <a:rPr lang="en-US" sz="920" b="1" dirty="0">
+                <a:solidFill>
+                  <a:srgbClr val="0000A0"/>
+                </a:solidFill>
+                <a:latin typeface="DejaVu Sans Mono" pitchFamily="34" charset="0"/>
+                <a:ea typeface="DejaVu Sans Mono" pitchFamily="34" charset="-122"/>
+                <a:cs typeface="DejaVu Sans Mono" pitchFamily="34" charset="-120"/>
+              </a:rPr>
+              <a:t>return</a:t>
+            </a:r>
+            <a:r>
+              <a:rPr lang="en-US" sz="920" dirty="0">
+                <a:solidFill>
+                  <a:srgbClr val="282D34"/>
+                </a:solidFill>
+                <a:latin typeface="DejaVu Sans Mono" pitchFamily="34" charset="0"/>
+                <a:ea typeface="DejaVu Sans Mono" pitchFamily="34" charset="-122"/>
+                <a:cs typeface="DejaVu Sans Mono" pitchFamily="34" charset="-120"/>
+              </a:rPr>
+              <a:t> PermissionResultDeny(message=</a:t>
+            </a:r>
+            <a:r>
+              <a:rPr lang="en-US" sz="920" dirty="0">
+                <a:solidFill>
+                  <a:srgbClr val="910000"/>
+                </a:solidFill>
+                <a:latin typeface="DejaVu Sans Mono" pitchFamily="34" charset="0"/>
+                <a:ea typeface="DejaVu Sans Mono" pitchFamily="34" charset="-122"/>
+                <a:cs typeface="DejaVu Sans Mono" pitchFamily="34" charset="-120"/>
+              </a:rPr>
+              <a:t>"Governance policy denied delete"</a:t>
+            </a:r>
+            <a:r>
+              <a:rPr lang="en-US" sz="920" dirty="0">
+                <a:solidFill>
+                  <a:srgbClr val="282D34"/>
+                </a:solidFill>
+                <a:latin typeface="DejaVu Sans Mono" pitchFamily="34" charset="0"/>
+                <a:ea typeface="DejaVu Sans Mono" pitchFamily="34" charset="-122"/>
+                <a:cs typeface="DejaVu Sans Mono" pitchFamily="34" charset="-120"/>
+              </a:rPr>
+              <a:t>)</a:t>
+            </a:r>
+            <a:endParaRPr lang="en-US" sz="920" dirty="0"/>
+          </a:p>
+          <a:p>
+            <a:pPr marL="0" indent="0" algn="l">
+              <a:lnSpc>
+                <a:spcPts val="1130"/>
+              </a:lnSpc>
+              <a:buNone/>
+            </a:pPr>
+            <a:r>
+              <a:rPr lang="en-US" sz="920" dirty="0">
+                <a:solidFill>
+                  <a:srgbClr val="282D34"/>
+                </a:solidFill>
+                <a:latin typeface="DejaVu Sans Mono" pitchFamily="34" charset="0"/>
+                <a:ea typeface="DejaVu Sans Mono" pitchFamily="34" charset="-122"/>
+                <a:cs typeface="DejaVu Sans Mono" pitchFamily="34" charset="-120"/>
+              </a:rPr>
+              <a:t> </a:t>
+            </a:r>
+            <a:endParaRPr lang="en-US" sz="920" dirty="0"/>
+          </a:p>
+          <a:p>
+            <a:pPr marL="0" indent="0" algn="l">
+              <a:lnSpc>
+                <a:spcPts val="1130"/>
+              </a:lnSpc>
+              <a:buNone/>
+            </a:pPr>
+            <a:r>
+              <a:rPr lang="en-US" sz="920" dirty="0">
+                <a:solidFill>
+                  <a:srgbClr val="282D34"/>
+                </a:solidFill>
+                <a:latin typeface="DejaVu Sans Mono" pitchFamily="34" charset="0"/>
+                <a:ea typeface="DejaVu Sans Mono" pitchFamily="34" charset="-122"/>
+                <a:cs typeface="DejaVu Sans Mono" pitchFamily="34" charset="-120"/>
+              </a:rPr>
+              <a:t>    </a:t>
+            </a:r>
+            <a:r>
+              <a:rPr lang="en-US" sz="920" dirty="0">
+                <a:solidFill>
+                  <a:srgbClr val="26782A"/>
+                </a:solidFill>
+                <a:latin typeface="DejaVu Sans Mono" pitchFamily="34" charset="0"/>
+                <a:ea typeface="DejaVu Sans Mono" pitchFamily="34" charset="-122"/>
+                <a:cs typeface="DejaVu Sans Mono" pitchFamily="34" charset="-120"/>
+              </a:rPr>
+              <a:t># それ以外はデフォルトで拒否</a:t>
+            </a:r>
+            <a:endParaRPr lang="en-US" sz="920" dirty="0"/>
+          </a:p>
+          <a:p>
+            <a:pPr marL="0" indent="0" algn="l">
+              <a:lnSpc>
+                <a:spcPts val="1130"/>
+              </a:lnSpc>
+              <a:buNone/>
+            </a:pPr>
+            <a:r>
+              <a:rPr lang="en-US" sz="920" dirty="0">
+                <a:solidFill>
+                  <a:srgbClr val="282D34"/>
+                </a:solidFill>
+                <a:latin typeface="DejaVu Sans Mono" pitchFamily="34" charset="0"/>
+                <a:ea typeface="DejaVu Sans Mono" pitchFamily="34" charset="-122"/>
+                <a:cs typeface="DejaVu Sans Mono" pitchFamily="34" charset="-120"/>
+              </a:rPr>
+              <a:t>    </a:t>
+            </a:r>
+            <a:r>
+              <a:rPr lang="en-US" sz="920" b="1" dirty="0">
+                <a:solidFill>
+                  <a:srgbClr val="0000A0"/>
+                </a:solidFill>
+                <a:latin typeface="DejaVu Sans Mono" pitchFamily="34" charset="0"/>
+                <a:ea typeface="DejaVu Sans Mono" pitchFamily="34" charset="-122"/>
+                <a:cs typeface="DejaVu Sans Mono" pitchFamily="34" charset="-120"/>
+              </a:rPr>
+              <a:t>return</a:t>
+            </a:r>
+            <a:r>
+              <a:rPr lang="en-US" sz="920" dirty="0">
+                <a:solidFill>
+                  <a:srgbClr val="282D34"/>
+                </a:solidFill>
+                <a:latin typeface="DejaVu Sans Mono" pitchFamily="34" charset="0"/>
+                <a:ea typeface="DejaVu Sans Mono" pitchFamily="34" charset="-122"/>
+                <a:cs typeface="DejaVu Sans Mono" pitchFamily="34" charset="-120"/>
+              </a:rPr>
+              <a:t> PermissionResultDeny(message=</a:t>
+            </a:r>
+            <a:r>
+              <a:rPr lang="en-US" sz="920" dirty="0">
+                <a:solidFill>
+                  <a:srgbClr val="910000"/>
+                </a:solidFill>
+                <a:latin typeface="DejaVu Sans Mono" pitchFamily="34" charset="0"/>
+                <a:ea typeface="DejaVu Sans Mono" pitchFamily="34" charset="-122"/>
+                <a:cs typeface="DejaVu Sans Mono" pitchFamily="34" charset="-120"/>
+              </a:rPr>
+              <a:t>"Unexpected tool or input denied"</a:t>
+            </a:r>
+            <a:r>
+              <a:rPr lang="en-US" sz="920" dirty="0">
+                <a:solidFill>
+                  <a:srgbClr val="282D34"/>
+                </a:solidFill>
+                <a:latin typeface="DejaVu Sans Mono" pitchFamily="34" charset="0"/>
+                <a:ea typeface="DejaVu Sans Mono" pitchFamily="34" charset="-122"/>
+                <a:cs typeface="DejaVu Sans Mono" pitchFamily="34" charset="-120"/>
+              </a:rPr>
+              <a:t>)</a:t>
+            </a:r>
+            <a:endParaRPr lang="en-US" sz="920" dirty="0"/>
+          </a:p>
+        </p:txBody>
+      </p:sp>
+      <p:sp>
+        <p:nvSpPr>
+          <p:cNvPr id="68" name="Text 66"/>
+          <p:cNvSpPr txBox="1"/>
+          <p:nvPr/>
+        </p:nvSpPr>
+        <p:spPr>
+          <a:xfrm>
+            <a:off x="5577840" y="4509770"/>
+            <a:ext cx="6309360" cy="201168"/>
+          </a:xfrm>
+          <a:prstGeom prst="rect">
+            <a:avLst/>
+          </a:prstGeom>
+          <a:noFill/>
+          <a:ln/>
+        </p:spPr>
+        <p:txBody>
+          <a:bodyPr wrap="square" lIns="0" tIns="0" rIns="0" bIns="0" rtlCol="0" anchor="t"/>
+          <a:lstStyle/>
+          <a:p>
+            <a:pPr marL="0" indent="0" algn="l">
+              <a:buNone/>
+            </a:pPr>
+            <a:r>
+              <a:rPr lang="en-US" sz="1050" b="1" dirty="0">
+                <a:solidFill>
+                  <a:srgbClr val="000000"/>
+                </a:solidFill>
+                <a:latin typeface="Noto Sans CJK JP" pitchFamily="34" charset="0"/>
+                <a:ea typeface="Noto Sans CJK JP" pitchFamily="34" charset="-122"/>
+                <a:cs typeface="Noto Sans CJK JP" pitchFamily="34" charset="-120"/>
+              </a:rPr>
+              <a:t>ClaudeAgentOptions の設定（今回の demo で使用）</a:t>
+            </a:r>
+            <a:endParaRPr lang="en-US" sz="1050" dirty="0"/>
+          </a:p>
+        </p:txBody>
+      </p:sp>
+      <p:sp>
+        <p:nvSpPr>
+          <p:cNvPr id="69" name="Shape 67"/>
+          <p:cNvSpPr/>
+          <p:nvPr/>
+        </p:nvSpPr>
+        <p:spPr>
+          <a:xfrm>
+            <a:off x="5532120" y="4729226"/>
+            <a:ext cx="6382512" cy="1385824"/>
+          </a:xfrm>
+          <a:prstGeom prst="roundRect">
+            <a:avLst>
+              <a:gd name="adj" fmla="val 3959"/>
+            </a:avLst>
+          </a:prstGeom>
+          <a:solidFill>
+            <a:srgbClr val="FAFBF8"/>
+          </a:solidFill>
+          <a:ln w="10160">
+            <a:solidFill>
+              <a:srgbClr val="B1CEA0"/>
+            </a:solidFill>
+            <a:prstDash val="solid"/>
+          </a:ln>
+        </p:spPr>
+        <p:txBody>
+          <a:bodyPr/>
+          <a:lstStyle/>
+          <a:p>
+            <a:endParaRPr lang="en-JP"/>
+          </a:p>
+        </p:txBody>
+      </p:sp>
+      <p:sp>
+        <p:nvSpPr>
+          <p:cNvPr id="70" name="Text 68"/>
+          <p:cNvSpPr txBox="1"/>
+          <p:nvPr/>
+        </p:nvSpPr>
+        <p:spPr>
+          <a:xfrm>
+            <a:off x="5660136" y="4838954"/>
+            <a:ext cx="6144768" cy="1166368"/>
+          </a:xfrm>
+          <a:prstGeom prst="rect">
+            <a:avLst/>
+          </a:prstGeom>
+          <a:noFill/>
+          <a:ln/>
+        </p:spPr>
+        <p:txBody>
+          <a:bodyPr wrap="square" lIns="0" tIns="0" rIns="0" bIns="0" rtlCol="0" anchor="t"/>
+          <a:lstStyle/>
+          <a:p>
+            <a:pPr marL="0" indent="0" algn="l">
+              <a:lnSpc>
+                <a:spcPts val="1130"/>
+              </a:lnSpc>
+              <a:buNone/>
+            </a:pPr>
+            <a:r>
+              <a:rPr lang="en-US" sz="920" dirty="0">
+                <a:solidFill>
+                  <a:srgbClr val="282D34"/>
+                </a:solidFill>
+                <a:latin typeface="DejaVu Sans Mono" pitchFamily="34" charset="0"/>
+                <a:ea typeface="DejaVu Sans Mono" pitchFamily="34" charset="-122"/>
+                <a:cs typeface="DejaVu Sans Mono" pitchFamily="34" charset="-120"/>
+              </a:rPr>
+              <a:t>options = ClaudeAgentOptions(</a:t>
+            </a:r>
+            <a:endParaRPr lang="en-US" sz="920" dirty="0"/>
+          </a:p>
+          <a:p>
+            <a:pPr marL="0" indent="0" algn="l">
+              <a:lnSpc>
+                <a:spcPts val="1130"/>
+              </a:lnSpc>
+              <a:buNone/>
+            </a:pPr>
+            <a:r>
+              <a:rPr lang="en-US" sz="920" dirty="0">
+                <a:solidFill>
+                  <a:srgbClr val="282D34"/>
+                </a:solidFill>
+                <a:latin typeface="DejaVu Sans Mono" pitchFamily="34" charset="0"/>
+                <a:ea typeface="DejaVu Sans Mono" pitchFamily="34" charset="-122"/>
+                <a:cs typeface="DejaVu Sans Mono" pitchFamily="34" charset="-120"/>
+              </a:rPr>
+              <a:t>    tools=TOOL_NAMES,                          </a:t>
+            </a:r>
+            <a:r>
+              <a:rPr lang="en-US" sz="920" dirty="0">
+                <a:solidFill>
+                  <a:srgbClr val="26782A"/>
+                </a:solidFill>
+                <a:latin typeface="DejaVu Sans Mono" pitchFamily="34" charset="0"/>
+                <a:ea typeface="DejaVu Sans Mono" pitchFamily="34" charset="-122"/>
+                <a:cs typeface="DejaVu Sans Mono" pitchFamily="34" charset="-120"/>
+              </a:rPr>
+              <a:t># [read_file, write_file, delete_file]</a:t>
+            </a:r>
+            <a:endParaRPr lang="en-US" sz="920" dirty="0"/>
+          </a:p>
+          <a:p>
+            <a:pPr marL="0" indent="0" algn="l">
+              <a:lnSpc>
+                <a:spcPts val="1130"/>
+              </a:lnSpc>
+              <a:buNone/>
+            </a:pPr>
+            <a:r>
+              <a:rPr lang="en-US" sz="920" dirty="0">
+                <a:solidFill>
+                  <a:srgbClr val="282D34"/>
+                </a:solidFill>
+                <a:latin typeface="DejaVu Sans Mono" pitchFamily="34" charset="0"/>
+                <a:ea typeface="DejaVu Sans Mono" pitchFamily="34" charset="-122"/>
+                <a:cs typeface="DejaVu Sans Mono" pitchFamily="34" charset="-120"/>
+              </a:rPr>
+              <a:t>    mcp_servers={SERVER_NAME: file_server},    </a:t>
+            </a:r>
+            <a:r>
+              <a:rPr lang="en-US" sz="920" dirty="0">
+                <a:solidFill>
+                  <a:srgbClr val="26782A"/>
+                </a:solidFill>
+                <a:latin typeface="DejaVu Sans Mono" pitchFamily="34" charset="0"/>
+                <a:ea typeface="DejaVu Sans Mono" pitchFamily="34" charset="-122"/>
+                <a:cs typeface="DejaVu Sans Mono" pitchFamily="34" charset="-120"/>
+              </a:rPr>
+              <a:t># 自作のインプロセス MCP Server</a:t>
+            </a:r>
+            <a:endParaRPr lang="en-US" sz="920" dirty="0"/>
+          </a:p>
+          <a:p>
+            <a:pPr marL="0" indent="0" algn="l">
+              <a:lnSpc>
+                <a:spcPts val="1130"/>
+              </a:lnSpc>
+              <a:buNone/>
+            </a:pPr>
+            <a:r>
+              <a:rPr lang="en-US" sz="920" dirty="0">
+                <a:solidFill>
+                  <a:srgbClr val="282D34"/>
+                </a:solidFill>
+                <a:latin typeface="DejaVu Sans Mono" pitchFamily="34" charset="0"/>
+                <a:ea typeface="DejaVu Sans Mono" pitchFamily="34" charset="-122"/>
+                <a:cs typeface="DejaVu Sans Mono" pitchFamily="34" charset="-120"/>
+              </a:rPr>
+              <a:t>    strict_mcp_config=</a:t>
+            </a:r>
+            <a:r>
+              <a:rPr lang="en-US" sz="920" b="1" dirty="0">
+                <a:solidFill>
+                  <a:srgbClr val="0000A0"/>
+                </a:solidFill>
+                <a:latin typeface="DejaVu Sans Mono" pitchFamily="34" charset="0"/>
+                <a:ea typeface="DejaVu Sans Mono" pitchFamily="34" charset="-122"/>
+                <a:cs typeface="DejaVu Sans Mono" pitchFamily="34" charset="-120"/>
+              </a:rPr>
+              <a:t>True</a:t>
+            </a:r>
+            <a:r>
+              <a:rPr lang="en-US" sz="920" dirty="0">
+                <a:solidFill>
+                  <a:srgbClr val="282D34"/>
+                </a:solidFill>
+                <a:latin typeface="DejaVu Sans Mono" pitchFamily="34" charset="0"/>
+                <a:ea typeface="DejaVu Sans Mono" pitchFamily="34" charset="-122"/>
+                <a:cs typeface="DejaVu Sans Mono" pitchFamily="34" charset="-120"/>
+              </a:rPr>
+              <a:t>,</a:t>
+            </a:r>
+            <a:endParaRPr lang="en-US" sz="920" dirty="0"/>
+          </a:p>
+          <a:p>
+            <a:pPr marL="0" indent="0" algn="l">
+              <a:lnSpc>
+                <a:spcPts val="1130"/>
+              </a:lnSpc>
+              <a:buNone/>
+            </a:pPr>
+            <a:r>
+              <a:rPr lang="en-US" sz="920" dirty="0">
+                <a:solidFill>
+                  <a:srgbClr val="282D34"/>
+                </a:solidFill>
+                <a:latin typeface="DejaVu Sans Mono" pitchFamily="34" charset="0"/>
+                <a:ea typeface="DejaVu Sans Mono" pitchFamily="34" charset="-122"/>
+                <a:cs typeface="DejaVu Sans Mono" pitchFamily="34" charset="-120"/>
+              </a:rPr>
+              <a:t>    permission_mode=</a:t>
+            </a:r>
+            <a:r>
+              <a:rPr lang="en-US" sz="920" dirty="0">
+                <a:solidFill>
+                  <a:srgbClr val="910000"/>
+                </a:solidFill>
+                <a:latin typeface="DejaVu Sans Mono" pitchFamily="34" charset="0"/>
+                <a:ea typeface="DejaVu Sans Mono" pitchFamily="34" charset="-122"/>
+                <a:cs typeface="DejaVu Sans Mono" pitchFamily="34" charset="-120"/>
+              </a:rPr>
+              <a:t>"default"</a:t>
+            </a:r>
+            <a:r>
+              <a:rPr lang="en-US" sz="920" dirty="0">
+                <a:solidFill>
+                  <a:srgbClr val="282D34"/>
+                </a:solidFill>
+                <a:latin typeface="DejaVu Sans Mono" pitchFamily="34" charset="0"/>
+                <a:ea typeface="DejaVu Sans Mono" pitchFamily="34" charset="-122"/>
+                <a:cs typeface="DejaVu Sans Mono" pitchFamily="34" charset="-120"/>
+              </a:rPr>
+              <a:t>,                 </a:t>
+            </a:r>
+            <a:r>
+              <a:rPr lang="en-US" sz="920" dirty="0">
+                <a:solidFill>
+                  <a:srgbClr val="26782A"/>
+                </a:solidFill>
+                <a:latin typeface="DejaVu Sans Mono" pitchFamily="34" charset="0"/>
+                <a:ea typeface="DejaVu Sans Mono" pitchFamily="34" charset="-122"/>
+                <a:cs typeface="DejaVu Sans Mono" pitchFamily="34" charset="-120"/>
+              </a:rPr>
+              <a:t># デフォルトの Permission モード</a:t>
+            </a:r>
+            <a:endParaRPr lang="en-US" sz="920" dirty="0"/>
+          </a:p>
+          <a:p>
+            <a:pPr marL="0" indent="0" algn="l">
+              <a:lnSpc>
+                <a:spcPts val="1130"/>
+              </a:lnSpc>
+              <a:buNone/>
+            </a:pPr>
+            <a:r>
+              <a:rPr lang="en-US" sz="920" dirty="0">
+                <a:solidFill>
+                  <a:srgbClr val="282D34"/>
+                </a:solidFill>
+                <a:latin typeface="DejaVu Sans Mono" pitchFamily="34" charset="0"/>
+                <a:ea typeface="DejaVu Sans Mono" pitchFamily="34" charset="-122"/>
+                <a:cs typeface="DejaVu Sans Mono" pitchFamily="34" charset="-120"/>
+              </a:rPr>
+              <a:t>    can_use_tool=can_use_tool,                 </a:t>
+            </a:r>
+            <a:r>
+              <a:rPr lang="en-US" sz="920" dirty="0">
+                <a:solidFill>
+                  <a:srgbClr val="26782A"/>
+                </a:solidFill>
+                <a:latin typeface="DejaVu Sans Mono" pitchFamily="34" charset="0"/>
+                <a:ea typeface="DejaVu Sans Mono" pitchFamily="34" charset="-122"/>
+                <a:cs typeface="DejaVu Sans Mono" pitchFamily="34" charset="-120"/>
+              </a:rPr>
+              <a:t># 権限判定を can_use_tool に集約</a:t>
+            </a:r>
+            <a:endParaRPr lang="en-US" sz="920" dirty="0"/>
+          </a:p>
+          <a:p>
+            <a:pPr marL="0" indent="0" algn="l">
+              <a:lnSpc>
+                <a:spcPts val="1130"/>
+              </a:lnSpc>
+              <a:buNone/>
+            </a:pPr>
+            <a:r>
+              <a:rPr lang="en-US" sz="920" dirty="0">
+                <a:solidFill>
+                  <a:srgbClr val="282D34"/>
+                </a:solidFill>
+                <a:latin typeface="DejaVu Sans Mono" pitchFamily="34" charset="0"/>
+                <a:ea typeface="DejaVu Sans Mono" pitchFamily="34" charset="-122"/>
+                <a:cs typeface="DejaVu Sans Mono" pitchFamily="34" charset="-120"/>
+              </a:rPr>
+              <a:t>    setting_sources=[],                        </a:t>
+            </a:r>
+            <a:r>
+              <a:rPr lang="en-US" sz="920" dirty="0">
+                <a:solidFill>
+                  <a:srgbClr val="26782A"/>
+                </a:solidFill>
+                <a:latin typeface="DejaVu Sans Mono" pitchFamily="34" charset="0"/>
+                <a:ea typeface="DejaVu Sans Mono" pitchFamily="34" charset="-122"/>
+                <a:cs typeface="DejaVu Sans Mono" pitchFamily="34" charset="-120"/>
+              </a:rPr>
+              <a:t># 設定ファイル由来の許可規則は不使用</a:t>
+            </a:r>
+            <a:endParaRPr lang="en-US" sz="920" dirty="0"/>
+          </a:p>
+          <a:p>
+            <a:pPr marL="0" indent="0" algn="l">
+              <a:lnSpc>
+                <a:spcPts val="1130"/>
+              </a:lnSpc>
+              <a:buNone/>
+            </a:pPr>
+            <a:r>
+              <a:rPr lang="en-US" sz="920" dirty="0">
+                <a:solidFill>
+                  <a:srgbClr val="282D34"/>
+                </a:solidFill>
+                <a:latin typeface="DejaVu Sans Mono" pitchFamily="34" charset="0"/>
+                <a:ea typeface="DejaVu Sans Mono" pitchFamily="34" charset="-122"/>
+                <a:cs typeface="DejaVu Sans Mono" pitchFamily="34" charset="-120"/>
+              </a:rPr>
+              <a:t>)</a:t>
+            </a:r>
+            <a:endParaRPr lang="en-US" sz="920" dirty="0"/>
+          </a:p>
+        </p:txBody>
+      </p:sp>
+      <p:sp>
+        <p:nvSpPr>
+          <p:cNvPr id="71" name="Shape 69"/>
+          <p:cNvSpPr/>
+          <p:nvPr/>
+        </p:nvSpPr>
+        <p:spPr>
+          <a:xfrm>
+            <a:off x="274320" y="6291072"/>
+            <a:ext cx="11640312" cy="457200"/>
+          </a:xfrm>
+          <a:prstGeom prst="rect">
+            <a:avLst/>
+          </a:prstGeom>
+          <a:solidFill>
+            <a:srgbClr val="FFFFFF"/>
+          </a:solidFill>
+          <a:ln w="10160">
+            <a:solidFill>
+              <a:srgbClr val="CACED3"/>
+            </a:solidFill>
+            <a:prstDash val="solid"/>
+          </a:ln>
+        </p:spPr>
+        <p:txBody>
+          <a:bodyPr/>
+          <a:lstStyle/>
+          <a:p>
+            <a:endParaRPr lang="en-JP"/>
+          </a:p>
+        </p:txBody>
+      </p:sp>
+      <p:sp>
+        <p:nvSpPr>
+          <p:cNvPr id="72" name="Text 70"/>
+          <p:cNvSpPr txBox="1"/>
+          <p:nvPr/>
+        </p:nvSpPr>
+        <p:spPr>
+          <a:xfrm>
+            <a:off x="411480" y="6446520"/>
+            <a:ext cx="822960" cy="182880"/>
+          </a:xfrm>
+          <a:prstGeom prst="rect">
+            <a:avLst/>
+          </a:prstGeom>
+          <a:noFill/>
+          <a:ln/>
+        </p:spPr>
+        <p:txBody>
+          <a:bodyPr wrap="square" lIns="0" tIns="0" rIns="0" bIns="0" rtlCol="0" anchor="t"/>
+          <a:lstStyle/>
+          <a:p>
+            <a:pPr marL="0" indent="0" algn="l">
+              <a:buNone/>
+            </a:pPr>
+            <a:r>
+              <a:rPr lang="en-US" sz="1000" b="1" dirty="0">
+                <a:solidFill>
+                  <a:srgbClr val="000000"/>
+                </a:solidFill>
+                <a:latin typeface="Noto Sans CJK JP" pitchFamily="34" charset="0"/>
+                <a:ea typeface="Noto Sans CJK JP" pitchFamily="34" charset="-122"/>
+                <a:cs typeface="Noto Sans CJK JP" pitchFamily="34" charset="-120"/>
+              </a:rPr>
+              <a:t>まとめ</a:t>
+            </a:r>
+            <a:endParaRPr lang="en-US" sz="1000" dirty="0"/>
+          </a:p>
+        </p:txBody>
+      </p:sp>
+      <p:sp>
+        <p:nvSpPr>
+          <p:cNvPr id="73" name="Text 71"/>
+          <p:cNvSpPr txBox="1"/>
+          <p:nvPr/>
+        </p:nvSpPr>
+        <p:spPr>
+          <a:xfrm>
+            <a:off x="1325880" y="6446520"/>
+            <a:ext cx="10424160" cy="182880"/>
+          </a:xfrm>
+          <a:prstGeom prst="rect">
+            <a:avLst/>
+          </a:prstGeom>
+          <a:noFill/>
+          <a:ln/>
+        </p:spPr>
+        <p:txBody>
+          <a:bodyPr wrap="square" lIns="0" tIns="0" rIns="0" bIns="0" rtlCol="0" anchor="t"/>
+          <a:lstStyle/>
+          <a:p>
+            <a:pPr marL="0" indent="0">
+              <a:buNone/>
+            </a:pPr>
+            <a:r>
+              <a:rPr lang="en-US" sz="950" dirty="0">
+                <a:solidFill>
+                  <a:srgbClr val="000000"/>
+                </a:solidFill>
+                <a:latin typeface="Noto Sans CJK JP" pitchFamily="34" charset="0"/>
+                <a:ea typeface="Noto Sans CJK JP" pitchFamily="34" charset="-122"/>
+                <a:cs typeface="Noto Sans CJK JP" pitchFamily="34" charset="-120"/>
+              </a:rPr>
+              <a:t>Claude Agent SDK では </a:t>
+            </a:r>
+            <a:r>
+              <a:rPr lang="en-US" sz="950" b="1" dirty="0">
+                <a:solidFill>
+                  <a:srgbClr val="004696"/>
+                </a:solidFill>
+                <a:latin typeface="Noto Sans CJK JP" pitchFamily="34" charset="0"/>
+                <a:ea typeface="Noto Sans CJK JP" pitchFamily="34" charset="-122"/>
+                <a:cs typeface="Noto Sans CJK JP" pitchFamily="34" charset="-120"/>
+              </a:rPr>
+              <a:t>Permission system</a:t>
+            </a:r>
+            <a:r>
+              <a:rPr lang="en-US" sz="950" dirty="0">
+                <a:solidFill>
+                  <a:srgbClr val="000000"/>
+                </a:solidFill>
+                <a:latin typeface="Noto Sans CJK JP" pitchFamily="34" charset="0"/>
+                <a:ea typeface="Noto Sans CJK JP" pitchFamily="34" charset="-122"/>
+                <a:cs typeface="Noto Sans CJK JP" pitchFamily="34" charset="-120"/>
+              </a:rPr>
+              <a:t> により Tool 実行を制御する。今回の demo では，Tool 名・入力に基づく</a:t>
+            </a:r>
+            <a:r>
+              <a:rPr lang="en-US" sz="950" b="1" dirty="0">
+                <a:solidFill>
+                  <a:srgbClr val="004696"/>
+                </a:solidFill>
+                <a:latin typeface="Noto Sans CJK JP" pitchFamily="34" charset="0"/>
+                <a:ea typeface="Noto Sans CJK JP" pitchFamily="34" charset="-122"/>
+                <a:cs typeface="Noto Sans CJK JP" pitchFamily="34" charset="-120"/>
+              </a:rPr>
+              <a:t>権限判定</a:t>
+            </a:r>
+            <a:r>
+              <a:rPr lang="en-US" sz="950" dirty="0">
+                <a:solidFill>
+                  <a:srgbClr val="000000"/>
+                </a:solidFill>
+                <a:latin typeface="Noto Sans CJK JP" pitchFamily="34" charset="0"/>
+                <a:ea typeface="Noto Sans CJK JP" pitchFamily="34" charset="-122"/>
+                <a:cs typeface="Noto Sans CJK JP" pitchFamily="34" charset="-120"/>
+              </a:rPr>
+              <a:t> を </a:t>
+            </a:r>
+            <a:r>
+              <a:rPr lang="en-US" sz="950" b="1" dirty="0">
+                <a:solidFill>
+                  <a:srgbClr val="004696"/>
+                </a:solidFill>
+                <a:latin typeface="Noto Sans CJK JP" pitchFamily="34" charset="0"/>
+                <a:ea typeface="Noto Sans CJK JP" pitchFamily="34" charset="-122"/>
+                <a:cs typeface="Noto Sans CJK JP" pitchFamily="34" charset="-120"/>
+              </a:rPr>
+              <a:t>can_use_tool</a:t>
+            </a:r>
+            <a:r>
+              <a:rPr lang="en-US" sz="950" dirty="0">
+                <a:solidFill>
+                  <a:srgbClr val="000000"/>
+                </a:solidFill>
+                <a:latin typeface="Noto Sans CJK JP" pitchFamily="34" charset="0"/>
+                <a:ea typeface="Noto Sans CJK JP" pitchFamily="34" charset="-122"/>
+                <a:cs typeface="Noto Sans CJK JP" pitchFamily="34" charset="-120"/>
+              </a:rPr>
+              <a:t> で実装した。</a:t>
+            </a:r>
+            <a:endParaRPr lang="en-US" sz="950" dirty="0"/>
+          </a:p>
+        </p:txBody>
+      </p:sp>
+    </p:spTree>
+  </p:cSld>
+  <p:clrMapOvr>
+    <a:masterClrMapping/>
+  </p:clrMapOvr>
+</p:sld>
+</file>
+
+<file path=ppt/slides/slide14.xml><?xml version="1.0" encoding="utf-8"?>
+<p:sld xmlns:a="http://schemas.openxmlformats.org/drawingml/2006/main" xmlns:r="http://schemas.openxmlformats.org/officeDocument/2006/relationships" xmlns:p="http://schemas.openxmlformats.org/presentationml/2006/main">
+  <p:cSld>
+    <p:spTree>
+      <p:nvGrpSpPr>
+        <p:cNvPr id="1" name=""/>
+        <p:cNvGrpSpPr/>
+        <p:nvPr/>
+      </p:nvGrpSpPr>
+      <p:grpSpPr>
+        <a:xfrm>
+          <a:off x="0" y="0"/>
+          <a:ext cx="0" cy="0"/>
+          <a:chOff x="0" y="0"/>
+          <a:chExt cx="0" cy="0"/>
+        </a:xfrm>
+      </p:grpSpPr>
+      <p:sp>
+        <p:nvSpPr>
+          <p:cNvPr id="2" name="TextBox 1"/>
+          <p:cNvSpPr txBox="1"/>
+          <p:nvPr/>
+        </p:nvSpPr>
+        <p:spPr>
+          <a:xfrm>
+            <a:off x="277090" y="87455"/>
+            <a:ext cx="5614736" cy="364399"/>
+          </a:xfrm>
+          <a:prstGeom prst="rect">
+            <a:avLst/>
+          </a:prstGeom>
+          <a:noFill/>
+          <a:ln>
+            <a:noFill/>
+          </a:ln>
+          <a:effectLst/>
+        </p:spPr>
+        <p:txBody>
+          <a:bodyPr wrap="none" lIns="0" tIns="0" rIns="0" bIns="0" anchor="ctr">
+            <a:spAutoFit/>
+          </a:bodyPr>
+          <a:lstStyle/>
+          <a:p>
+            <a:pPr algn="l"/>
+            <a:r>
+              <a:rPr sz="2750" b="1">
+                <a:solidFill>
+                  <a:srgbClr val="121212"/>
+                </a:solidFill>
+                <a:latin typeface="Noto Sans CJK JP"/>
+              </a:rPr>
+              <a:t>9． AGTによる共通Policy適用</a:t>
+            </a:r>
+          </a:p>
+        </p:txBody>
+      </p:sp>
+      <p:sp>
+        <p:nvSpPr>
+          <p:cNvPr id="3" name="TextBox 2"/>
+          <p:cNvSpPr txBox="1"/>
+          <p:nvPr/>
+        </p:nvSpPr>
+        <p:spPr>
+          <a:xfrm>
+            <a:off x="627100" y="612191"/>
+            <a:ext cx="10974258" cy="189487"/>
+          </a:xfrm>
+          <a:prstGeom prst="rect">
+            <a:avLst/>
+          </a:prstGeom>
+          <a:noFill/>
+          <a:ln>
+            <a:noFill/>
+          </a:ln>
+          <a:effectLst/>
+        </p:spPr>
+        <p:txBody>
+          <a:bodyPr wrap="none" lIns="0" tIns="0" rIns="0" bIns="0" anchor="ctr">
+            <a:spAutoFit/>
+          </a:bodyPr>
+          <a:lstStyle/>
+          <a:p>
+            <a:pPr algn="l"/>
+            <a:r>
+              <a:rPr sz="1580" b="0">
+                <a:solidFill>
+                  <a:srgbClr val="121212"/>
+                </a:solidFill>
+                <a:latin typeface="Noto Sans CJK JP"/>
+              </a:rPr>
+              <a:t>OpenAI Agents SDKとClaude Agent SDKに対して，共通PolicyをAGTで評価し，各SDKに適した方法で適用する．</a:t>
+            </a:r>
+          </a:p>
+        </p:txBody>
+      </p:sp>
+      <p:sp>
+        <p:nvSpPr>
+          <p:cNvPr id="4" name="Rectangle 3"/>
+          <p:cNvSpPr/>
+          <p:nvPr/>
+        </p:nvSpPr>
+        <p:spPr>
+          <a:xfrm>
+            <a:off x="1899573" y="1093198"/>
+            <a:ext cx="2851119" cy="437279"/>
+          </a:xfrm>
+          <a:prstGeom prst="rect">
+            <a:avLst/>
+          </a:prstGeom>
+          <a:solidFill>
+            <a:srgbClr val="FFFFFF"/>
+          </a:solidFill>
+          <a:ln w="13970">
+            <a:solidFill>
+              <a:srgbClr val="0B58CE"/>
+            </a:solidFill>
+          </a:ln>
+          <a:effectLst/>
+        </p:spPr>
+        <p:style>
+          <a:lnRef idx="1">
+            <a:schemeClr val="accent1"/>
+          </a:lnRef>
+          <a:fillRef idx="3">
+            <a:schemeClr val="accent1"/>
+          </a:fillRef>
+          <a:effectRef idx="2">
+            <a:schemeClr val="accent1"/>
+          </a:effectRef>
+          <a:fontRef idx="minor">
+            <a:schemeClr val="lt1"/>
+          </a:fontRef>
+        </p:style>
+        <p:txBody>
+          <a:bodyPr rtlCol="0" anchor="ctr"/>
+          <a:lstStyle/>
+          <a:p>
+            <a:pPr algn="ctr"/>
+            <a:endParaRPr/>
+          </a:p>
+        </p:txBody>
+      </p:sp>
+      <p:sp>
+        <p:nvSpPr>
+          <p:cNvPr id="5" name="TextBox 4"/>
+          <p:cNvSpPr txBox="1"/>
+          <p:nvPr/>
+        </p:nvSpPr>
+        <p:spPr>
+          <a:xfrm>
+            <a:off x="1899573" y="1173366"/>
+            <a:ext cx="2851119" cy="255079"/>
+          </a:xfrm>
+          <a:prstGeom prst="rect">
+            <a:avLst/>
+          </a:prstGeom>
+          <a:noFill/>
+          <a:ln>
+            <a:noFill/>
+          </a:ln>
+          <a:effectLst/>
+        </p:spPr>
+        <p:txBody>
+          <a:bodyPr wrap="none" lIns="0" tIns="0" rIns="0" bIns="0" anchor="ctr">
+            <a:spAutoFit/>
+          </a:bodyPr>
+          <a:lstStyle/>
+          <a:p>
+            <a:pPr algn="ctr"/>
+            <a:r>
+              <a:rPr sz="2050" b="1">
+                <a:solidFill>
+                  <a:srgbClr val="0B58CE"/>
+                </a:solidFill>
+                <a:latin typeface="Noto Sans CJK JP"/>
+              </a:rPr>
+              <a:t>ユーザA</a:t>
+            </a:r>
+          </a:p>
+        </p:txBody>
+      </p:sp>
+      <p:sp>
+        <p:nvSpPr>
+          <p:cNvPr id="6" name="Rectangle 5"/>
+          <p:cNvSpPr/>
+          <p:nvPr/>
+        </p:nvSpPr>
+        <p:spPr>
+          <a:xfrm>
+            <a:off x="5581349" y="1093198"/>
+            <a:ext cx="2851119" cy="437279"/>
+          </a:xfrm>
+          <a:prstGeom prst="rect">
+            <a:avLst/>
+          </a:prstGeom>
+          <a:solidFill>
+            <a:srgbClr val="FFFFFF"/>
+          </a:solidFill>
+          <a:ln w="13970">
+            <a:solidFill>
+              <a:srgbClr val="8D3EC0"/>
+            </a:solidFill>
+          </a:ln>
+          <a:effectLst/>
+        </p:spPr>
+        <p:style>
+          <a:lnRef idx="1">
+            <a:schemeClr val="accent1"/>
+          </a:lnRef>
+          <a:fillRef idx="3">
+            <a:schemeClr val="accent1"/>
+          </a:fillRef>
+          <a:effectRef idx="2">
+            <a:schemeClr val="accent1"/>
+          </a:effectRef>
+          <a:fontRef idx="minor">
+            <a:schemeClr val="lt1"/>
+          </a:fontRef>
+        </p:style>
+        <p:txBody>
+          <a:bodyPr rtlCol="0" anchor="ctr"/>
+          <a:lstStyle/>
+          <a:p>
+            <a:pPr algn="ctr"/>
+            <a:endParaRPr/>
+          </a:p>
+        </p:txBody>
+      </p:sp>
+      <p:sp>
+        <p:nvSpPr>
+          <p:cNvPr id="7" name="TextBox 6"/>
+          <p:cNvSpPr txBox="1"/>
+          <p:nvPr/>
+        </p:nvSpPr>
+        <p:spPr>
+          <a:xfrm>
+            <a:off x="5581349" y="1173366"/>
+            <a:ext cx="2851119" cy="255079"/>
+          </a:xfrm>
+          <a:prstGeom prst="rect">
+            <a:avLst/>
+          </a:prstGeom>
+          <a:noFill/>
+          <a:ln>
+            <a:noFill/>
+          </a:ln>
+          <a:effectLst/>
+        </p:spPr>
+        <p:txBody>
+          <a:bodyPr wrap="none" lIns="0" tIns="0" rIns="0" bIns="0" anchor="ctr">
+            <a:spAutoFit/>
+          </a:bodyPr>
+          <a:lstStyle/>
+          <a:p>
+            <a:pPr algn="ctr"/>
+            <a:r>
+              <a:rPr sz="2050" b="1">
+                <a:solidFill>
+                  <a:srgbClr val="8D3EC0"/>
+                </a:solidFill>
+                <a:latin typeface="Noto Sans CJK JP"/>
+              </a:rPr>
+              <a:t>ユーザB</a:t>
+            </a:r>
+          </a:p>
+        </p:txBody>
+      </p:sp>
+      <p:cxnSp>
+        <p:nvCxnSpPr>
+          <p:cNvPr id="8" name="Connector 7"/>
+          <p:cNvCxnSpPr/>
+          <p:nvPr/>
+        </p:nvCxnSpPr>
+        <p:spPr>
+          <a:xfrm>
+            <a:off x="3325132" y="1530478"/>
+            <a:ext cx="0" cy="182200"/>
+          </a:xfrm>
+          <a:prstGeom prst="line">
+            <a:avLst/>
+          </a:prstGeom>
+          <a:ln w="13970">
+            <a:solidFill>
+              <a:srgbClr val="0B58CE"/>
+            </a:solidFill>
+          </a:ln>
+          <a:effectLst/>
+        </p:spPr>
+        <p:style>
+          <a:lnRef idx="2">
+            <a:schemeClr val="accent1"/>
+          </a:lnRef>
+          <a:fillRef idx="0">
+            <a:schemeClr val="accent1"/>
+          </a:fillRef>
+          <a:effectRef idx="1">
+            <a:schemeClr val="accent1"/>
+          </a:effectRef>
+          <a:fontRef idx="minor">
+            <a:schemeClr val="tx1"/>
+          </a:fontRef>
+        </p:style>
+      </p:cxnSp>
+      <p:sp>
+        <p:nvSpPr>
+          <p:cNvPr id="9" name="Rectangle 8"/>
+          <p:cNvSpPr/>
+          <p:nvPr/>
+        </p:nvSpPr>
+        <p:spPr>
+          <a:xfrm>
+            <a:off x="1899573" y="1719965"/>
+            <a:ext cx="2851119" cy="422703"/>
+          </a:xfrm>
+          <a:prstGeom prst="rect">
+            <a:avLst/>
+          </a:prstGeom>
+          <a:solidFill>
+            <a:srgbClr val="FFFFFF"/>
+          </a:solidFill>
+          <a:ln w="13970">
+            <a:solidFill>
+              <a:srgbClr val="0B58CE"/>
+            </a:solidFill>
+          </a:ln>
+          <a:effectLst/>
+        </p:spPr>
+        <p:style>
+          <a:lnRef idx="1">
+            <a:schemeClr val="accent1"/>
+          </a:lnRef>
+          <a:fillRef idx="3">
+            <a:schemeClr val="accent1"/>
+          </a:fillRef>
+          <a:effectRef idx="2">
+            <a:schemeClr val="accent1"/>
+          </a:effectRef>
+          <a:fontRef idx="minor">
+            <a:schemeClr val="lt1"/>
+          </a:fontRef>
+        </p:style>
+        <p:txBody>
+          <a:bodyPr rtlCol="0" anchor="ctr"/>
+          <a:lstStyle/>
+          <a:p>
+            <a:pPr algn="ctr"/>
+            <a:endParaRPr/>
+          </a:p>
+        </p:txBody>
+      </p:sp>
+      <p:sp>
+        <p:nvSpPr>
+          <p:cNvPr id="10" name="TextBox 9"/>
+          <p:cNvSpPr txBox="1"/>
+          <p:nvPr/>
+        </p:nvSpPr>
+        <p:spPr>
+          <a:xfrm>
+            <a:off x="1899573" y="1792845"/>
+            <a:ext cx="2851119" cy="255079"/>
+          </a:xfrm>
+          <a:prstGeom prst="rect">
+            <a:avLst/>
+          </a:prstGeom>
+          <a:noFill/>
+          <a:ln>
+            <a:noFill/>
+          </a:ln>
+          <a:effectLst/>
+        </p:spPr>
+        <p:txBody>
+          <a:bodyPr wrap="none" lIns="0" tIns="0" rIns="0" bIns="0" anchor="ctr">
+            <a:spAutoFit/>
+          </a:bodyPr>
+          <a:lstStyle/>
+          <a:p>
+            <a:pPr algn="ctr"/>
+            <a:r>
+              <a:rPr sz="2000" b="1">
+                <a:solidFill>
+                  <a:srgbClr val="0B58CE"/>
+                </a:solidFill>
+                <a:latin typeface="Noto Sans CJK JP"/>
+              </a:rPr>
+              <a:t>OpenAI Agents SDK</a:t>
+            </a:r>
+          </a:p>
+        </p:txBody>
+      </p:sp>
+      <p:cxnSp>
+        <p:nvCxnSpPr>
+          <p:cNvPr id="11" name="Connector 10"/>
+          <p:cNvCxnSpPr/>
+          <p:nvPr/>
+        </p:nvCxnSpPr>
+        <p:spPr>
+          <a:xfrm>
+            <a:off x="3325132" y="2142669"/>
+            <a:ext cx="0" cy="182200"/>
+          </a:xfrm>
+          <a:prstGeom prst="line">
+            <a:avLst/>
+          </a:prstGeom>
+          <a:ln w="13970">
+            <a:solidFill>
+              <a:srgbClr val="0B58CE"/>
+            </a:solidFill>
+          </a:ln>
+          <a:effectLst/>
+        </p:spPr>
+        <p:style>
+          <a:lnRef idx="2">
+            <a:schemeClr val="accent1"/>
+          </a:lnRef>
+          <a:fillRef idx="0">
+            <a:schemeClr val="accent1"/>
+          </a:fillRef>
+          <a:effectRef idx="1">
+            <a:schemeClr val="accent1"/>
+          </a:effectRef>
+          <a:fontRef idx="minor">
+            <a:schemeClr val="tx1"/>
+          </a:fontRef>
+        </p:style>
+      </p:cxnSp>
+      <p:sp>
+        <p:nvSpPr>
+          <p:cNvPr id="12" name="Rectangle 11"/>
+          <p:cNvSpPr/>
+          <p:nvPr/>
+        </p:nvSpPr>
+        <p:spPr>
+          <a:xfrm>
+            <a:off x="1899573" y="2332157"/>
+            <a:ext cx="2851119" cy="750663"/>
+          </a:xfrm>
+          <a:prstGeom prst="rect">
+            <a:avLst/>
+          </a:prstGeom>
+          <a:solidFill>
+            <a:srgbClr val="FFFFFF"/>
+          </a:solidFill>
+          <a:ln w="13970">
+            <a:solidFill>
+              <a:srgbClr val="0B58CE"/>
+            </a:solidFill>
+          </a:ln>
+          <a:effectLst/>
+        </p:spPr>
+        <p:style>
+          <a:lnRef idx="1">
+            <a:schemeClr val="accent1"/>
+          </a:lnRef>
+          <a:fillRef idx="3">
+            <a:schemeClr val="accent1"/>
+          </a:fillRef>
+          <a:effectRef idx="2">
+            <a:schemeClr val="accent1"/>
+          </a:effectRef>
+          <a:fontRef idx="minor">
+            <a:schemeClr val="lt1"/>
+          </a:fontRef>
+        </p:style>
+        <p:txBody>
+          <a:bodyPr rtlCol="0" anchor="ctr"/>
+          <a:lstStyle/>
+          <a:p>
+            <a:pPr algn="ctr"/>
+            <a:endParaRPr/>
+          </a:p>
+        </p:txBody>
+      </p:sp>
+      <p:sp>
+        <p:nvSpPr>
+          <p:cNvPr id="13" name="TextBox 12"/>
+          <p:cNvSpPr txBox="1"/>
+          <p:nvPr/>
+        </p:nvSpPr>
+        <p:spPr>
+          <a:xfrm>
+            <a:off x="1899573" y="2397749"/>
+            <a:ext cx="2851119" cy="240503"/>
+          </a:xfrm>
+          <a:prstGeom prst="rect">
+            <a:avLst/>
+          </a:prstGeom>
+          <a:noFill/>
+          <a:ln>
+            <a:noFill/>
+          </a:ln>
+          <a:effectLst/>
+        </p:spPr>
+        <p:txBody>
+          <a:bodyPr wrap="none" lIns="0" tIns="0" rIns="0" bIns="0" anchor="ctr">
+            <a:spAutoFit/>
+          </a:bodyPr>
+          <a:lstStyle/>
+          <a:p>
+            <a:pPr algn="ctr"/>
+            <a:r>
+              <a:rPr sz="1980" b="1">
+                <a:solidFill>
+                  <a:srgbClr val="0B58CE"/>
+                </a:solidFill>
+                <a:latin typeface="Noto Sans CJK JP"/>
+              </a:rPr>
+              <a:t>OpenAI Adapter</a:t>
+            </a:r>
+          </a:p>
+        </p:txBody>
+      </p:sp>
+      <p:sp>
+        <p:nvSpPr>
+          <p:cNvPr id="14" name="TextBox 13"/>
+          <p:cNvSpPr txBox="1"/>
+          <p:nvPr/>
+        </p:nvSpPr>
+        <p:spPr>
+          <a:xfrm>
+            <a:off x="1899573" y="2660116"/>
+            <a:ext cx="2851119" cy="335247"/>
+          </a:xfrm>
+          <a:prstGeom prst="rect">
+            <a:avLst/>
+          </a:prstGeom>
+          <a:noFill/>
+          <a:ln>
+            <a:noFill/>
+          </a:ln>
+          <a:effectLst/>
+        </p:spPr>
+        <p:txBody>
+          <a:bodyPr wrap="none" lIns="0" tIns="0" rIns="0" bIns="0" anchor="ctr">
+            <a:spAutoFit/>
+          </a:bodyPr>
+          <a:lstStyle/>
+          <a:p>
+            <a:pPr algn="ctr"/>
+            <a:r>
+              <a:rPr sz="1320" b="0">
+                <a:solidFill>
+                  <a:srgbClr val="262626"/>
+                </a:solidFill>
+                <a:latin typeface="Noto Sans CJK JP"/>
+              </a:rPr>
+              <a:t>Tool情報を共通形式へ変換</a:t>
+            </a:r>
+          </a:p>
+          <a:p>
+            <a:pPr algn="ctr"/>
+            <a:r>
+              <a:rPr sz="1320" b="0">
+                <a:solidFill>
+                  <a:srgbClr val="262626"/>
+                </a:solidFill>
+                <a:latin typeface="Noto Sans CJK JP"/>
+              </a:rPr>
+              <a:t>Policy DecisionをSDK機能へ反映</a:t>
+            </a:r>
+          </a:p>
+        </p:txBody>
+      </p:sp>
+      <p:cxnSp>
+        <p:nvCxnSpPr>
+          <p:cNvPr id="15" name="Connector 14"/>
+          <p:cNvCxnSpPr/>
+          <p:nvPr/>
+        </p:nvCxnSpPr>
+        <p:spPr>
+          <a:xfrm>
+            <a:off x="7006909" y="1530478"/>
+            <a:ext cx="0" cy="182200"/>
+          </a:xfrm>
+          <a:prstGeom prst="line">
+            <a:avLst/>
+          </a:prstGeom>
+          <a:ln w="13970">
+            <a:solidFill>
+              <a:srgbClr val="8D3EC0"/>
+            </a:solidFill>
+          </a:ln>
+          <a:effectLst/>
+        </p:spPr>
+        <p:style>
+          <a:lnRef idx="2">
+            <a:schemeClr val="accent1"/>
+          </a:lnRef>
+          <a:fillRef idx="0">
+            <a:schemeClr val="accent1"/>
+          </a:fillRef>
+          <a:effectRef idx="1">
+            <a:schemeClr val="accent1"/>
+          </a:effectRef>
+          <a:fontRef idx="minor">
+            <a:schemeClr val="tx1"/>
+          </a:fontRef>
+        </p:style>
+      </p:cxnSp>
+      <p:sp>
+        <p:nvSpPr>
+          <p:cNvPr id="16" name="Rectangle 15"/>
+          <p:cNvSpPr/>
+          <p:nvPr/>
+        </p:nvSpPr>
+        <p:spPr>
+          <a:xfrm>
+            <a:off x="5581349" y="1719965"/>
+            <a:ext cx="2851119" cy="422703"/>
+          </a:xfrm>
+          <a:prstGeom prst="rect">
+            <a:avLst/>
+          </a:prstGeom>
+          <a:solidFill>
+            <a:srgbClr val="FFFFFF"/>
+          </a:solidFill>
+          <a:ln w="13970">
+            <a:solidFill>
+              <a:srgbClr val="8D3EC0"/>
+            </a:solidFill>
+          </a:ln>
+          <a:effectLst/>
+        </p:spPr>
+        <p:style>
+          <a:lnRef idx="1">
+            <a:schemeClr val="accent1"/>
+          </a:lnRef>
+          <a:fillRef idx="3">
+            <a:schemeClr val="accent1"/>
+          </a:fillRef>
+          <a:effectRef idx="2">
+            <a:schemeClr val="accent1"/>
+          </a:effectRef>
+          <a:fontRef idx="minor">
+            <a:schemeClr val="lt1"/>
+          </a:fontRef>
+        </p:style>
+        <p:txBody>
+          <a:bodyPr rtlCol="0" anchor="ctr"/>
+          <a:lstStyle/>
+          <a:p>
+            <a:pPr algn="ctr"/>
+            <a:endParaRPr/>
+          </a:p>
+        </p:txBody>
+      </p:sp>
+      <p:sp>
+        <p:nvSpPr>
+          <p:cNvPr id="17" name="TextBox 16"/>
+          <p:cNvSpPr txBox="1"/>
+          <p:nvPr/>
+        </p:nvSpPr>
+        <p:spPr>
+          <a:xfrm>
+            <a:off x="5581349" y="1792845"/>
+            <a:ext cx="2851119" cy="255079"/>
+          </a:xfrm>
+          <a:prstGeom prst="rect">
+            <a:avLst/>
+          </a:prstGeom>
+          <a:noFill/>
+          <a:ln>
+            <a:noFill/>
+          </a:ln>
+          <a:effectLst/>
+        </p:spPr>
+        <p:txBody>
+          <a:bodyPr wrap="none" lIns="0" tIns="0" rIns="0" bIns="0" anchor="ctr">
+            <a:spAutoFit/>
+          </a:bodyPr>
+          <a:lstStyle/>
+          <a:p>
+            <a:pPr algn="ctr"/>
+            <a:r>
+              <a:rPr sz="2000" b="1">
+                <a:solidFill>
+                  <a:srgbClr val="8D3EC0"/>
+                </a:solidFill>
+                <a:latin typeface="Noto Sans CJK JP"/>
+              </a:rPr>
+              <a:t>Claude Agent SDK</a:t>
+            </a:r>
+          </a:p>
+        </p:txBody>
+      </p:sp>
+      <p:cxnSp>
+        <p:nvCxnSpPr>
+          <p:cNvPr id="18" name="Connector 17"/>
+          <p:cNvCxnSpPr/>
+          <p:nvPr/>
+        </p:nvCxnSpPr>
+        <p:spPr>
+          <a:xfrm>
+            <a:off x="7006909" y="2142669"/>
+            <a:ext cx="0" cy="182200"/>
+          </a:xfrm>
+          <a:prstGeom prst="line">
+            <a:avLst/>
+          </a:prstGeom>
+          <a:ln w="13970">
+            <a:solidFill>
+              <a:srgbClr val="8D3EC0"/>
+            </a:solidFill>
+          </a:ln>
+          <a:effectLst/>
+        </p:spPr>
+        <p:style>
+          <a:lnRef idx="2">
+            <a:schemeClr val="accent1"/>
+          </a:lnRef>
+          <a:fillRef idx="0">
+            <a:schemeClr val="accent1"/>
+          </a:fillRef>
+          <a:effectRef idx="1">
+            <a:schemeClr val="accent1"/>
+          </a:effectRef>
+          <a:fontRef idx="minor">
+            <a:schemeClr val="tx1"/>
+          </a:fontRef>
+        </p:style>
+      </p:cxnSp>
+      <p:sp>
+        <p:nvSpPr>
+          <p:cNvPr id="19" name="Rectangle 18"/>
+          <p:cNvSpPr/>
+          <p:nvPr/>
+        </p:nvSpPr>
+        <p:spPr>
+          <a:xfrm>
+            <a:off x="5581349" y="2332157"/>
+            <a:ext cx="2851119" cy="750663"/>
+          </a:xfrm>
+          <a:prstGeom prst="rect">
+            <a:avLst/>
+          </a:prstGeom>
+          <a:solidFill>
+            <a:srgbClr val="FFFFFF"/>
+          </a:solidFill>
+          <a:ln w="13970">
+            <a:solidFill>
+              <a:srgbClr val="8D3EC0"/>
+            </a:solidFill>
+          </a:ln>
+          <a:effectLst/>
+        </p:spPr>
+        <p:style>
+          <a:lnRef idx="1">
+            <a:schemeClr val="accent1"/>
+          </a:lnRef>
+          <a:fillRef idx="3">
+            <a:schemeClr val="accent1"/>
+          </a:fillRef>
+          <a:effectRef idx="2">
+            <a:schemeClr val="accent1"/>
+          </a:effectRef>
+          <a:fontRef idx="minor">
+            <a:schemeClr val="lt1"/>
+          </a:fontRef>
+        </p:style>
+        <p:txBody>
+          <a:bodyPr rtlCol="0" anchor="ctr"/>
+          <a:lstStyle/>
+          <a:p>
+            <a:pPr algn="ctr"/>
+            <a:endParaRPr/>
+          </a:p>
+        </p:txBody>
+      </p:sp>
+      <p:sp>
+        <p:nvSpPr>
+          <p:cNvPr id="20" name="TextBox 19"/>
+          <p:cNvSpPr txBox="1"/>
+          <p:nvPr/>
+        </p:nvSpPr>
+        <p:spPr>
+          <a:xfrm>
+            <a:off x="5581349" y="2397749"/>
+            <a:ext cx="2851119" cy="240503"/>
+          </a:xfrm>
+          <a:prstGeom prst="rect">
+            <a:avLst/>
+          </a:prstGeom>
+          <a:noFill/>
+          <a:ln>
+            <a:noFill/>
+          </a:ln>
+          <a:effectLst/>
+        </p:spPr>
+        <p:txBody>
+          <a:bodyPr wrap="none" lIns="0" tIns="0" rIns="0" bIns="0" anchor="ctr">
+            <a:spAutoFit/>
+          </a:bodyPr>
+          <a:lstStyle/>
+          <a:p>
+            <a:pPr algn="ctr"/>
+            <a:r>
+              <a:rPr sz="1980" b="1">
+                <a:solidFill>
+                  <a:srgbClr val="8D3EC0"/>
+                </a:solidFill>
+                <a:latin typeface="Noto Sans CJK JP"/>
+              </a:rPr>
+              <a:t>Claude Adapter</a:t>
+            </a:r>
+          </a:p>
+        </p:txBody>
+      </p:sp>
+      <p:sp>
+        <p:nvSpPr>
+          <p:cNvPr id="21" name="TextBox 20"/>
+          <p:cNvSpPr txBox="1"/>
+          <p:nvPr/>
+        </p:nvSpPr>
+        <p:spPr>
+          <a:xfrm>
+            <a:off x="5581349" y="2660116"/>
+            <a:ext cx="2851119" cy="335247"/>
+          </a:xfrm>
+          <a:prstGeom prst="rect">
+            <a:avLst/>
+          </a:prstGeom>
+          <a:noFill/>
+          <a:ln>
+            <a:noFill/>
+          </a:ln>
+          <a:effectLst/>
+        </p:spPr>
+        <p:txBody>
+          <a:bodyPr wrap="none" lIns="0" tIns="0" rIns="0" bIns="0" anchor="ctr">
+            <a:spAutoFit/>
+          </a:bodyPr>
+          <a:lstStyle/>
+          <a:p>
+            <a:pPr algn="ctr"/>
+            <a:r>
+              <a:rPr sz="1320" b="0">
+                <a:solidFill>
+                  <a:srgbClr val="262626"/>
+                </a:solidFill>
+                <a:latin typeface="Noto Sans CJK JP"/>
+              </a:rPr>
+              <a:t>Tool情報を共通形式へ変換</a:t>
+            </a:r>
+          </a:p>
+          <a:p>
+            <a:pPr algn="ctr"/>
+            <a:r>
+              <a:rPr sz="1320" b="0">
+                <a:solidFill>
+                  <a:srgbClr val="262626"/>
+                </a:solidFill>
+                <a:latin typeface="Noto Sans CJK JP"/>
+              </a:rPr>
+              <a:t>Policy DecisionをSDK機能へ反映</a:t>
+            </a:r>
+          </a:p>
+        </p:txBody>
+      </p:sp>
+      <p:sp>
+        <p:nvSpPr>
+          <p:cNvPr id="22" name="Rectangle 21"/>
+          <p:cNvSpPr/>
+          <p:nvPr/>
+        </p:nvSpPr>
+        <p:spPr>
+          <a:xfrm>
+            <a:off x="1874009" y="3381628"/>
+            <a:ext cx="6546816" cy="932862"/>
+          </a:xfrm>
+          <a:prstGeom prst="rect">
+            <a:avLst/>
+          </a:prstGeom>
+          <a:solidFill>
+            <a:srgbClr val="F7FAFF"/>
+          </a:solidFill>
+          <a:ln w="19050">
+            <a:solidFill>
+              <a:srgbClr val="0C2070"/>
+            </a:solidFill>
+          </a:ln>
+          <a:effectLst/>
+        </p:spPr>
+        <p:style>
+          <a:lnRef idx="1">
+            <a:schemeClr val="accent1"/>
+          </a:lnRef>
+          <a:fillRef idx="3">
+            <a:schemeClr val="accent1"/>
+          </a:fillRef>
+          <a:effectRef idx="2">
+            <a:schemeClr val="accent1"/>
+          </a:effectRef>
+          <a:fontRef idx="minor">
+            <a:schemeClr val="lt1"/>
+          </a:fontRef>
+        </p:style>
+        <p:txBody>
+          <a:bodyPr rtlCol="0" anchor="ctr"/>
+          <a:lstStyle/>
+          <a:p>
+            <a:pPr algn="ctr"/>
+            <a:endParaRPr/>
+          </a:p>
+        </p:txBody>
+      </p:sp>
+      <p:sp>
+        <p:nvSpPr>
+          <p:cNvPr id="23" name="TextBox 22"/>
+          <p:cNvSpPr txBox="1"/>
+          <p:nvPr/>
+        </p:nvSpPr>
+        <p:spPr>
+          <a:xfrm>
+            <a:off x="1874009" y="3439903"/>
+            <a:ext cx="6546816" cy="276999"/>
+          </a:xfrm>
+          <a:prstGeom prst="rect">
+            <a:avLst/>
+          </a:prstGeom>
+          <a:noFill/>
+          <a:ln>
+            <a:noFill/>
+          </a:ln>
+          <a:effectLst/>
+        </p:spPr>
+        <p:txBody>
+          <a:bodyPr wrap="square" lIns="0" tIns="0" rIns="0" bIns="0" anchor="ctr">
+            <a:spAutoFit/>
+          </a:bodyPr>
+          <a:lstStyle/>
+          <a:p>
+            <a:pPr algn="ctr"/>
+            <a:r>
+              <a:rPr sz="1800" b="1">
+                <a:solidFill>
+                  <a:srgbClr val="0C2070"/>
+                </a:solidFill>
+                <a:latin typeface="Noto Sans CJK JP"/>
+              </a:rPr>
+              <a:t>共通Policy適用層</a:t>
+            </a:r>
+          </a:p>
+        </p:txBody>
+      </p:sp>
+      <p:sp>
+        <p:nvSpPr>
+          <p:cNvPr id="24" name="TextBox 23"/>
+          <p:cNvSpPr txBox="1"/>
+          <p:nvPr/>
+        </p:nvSpPr>
+        <p:spPr>
+          <a:xfrm>
+            <a:off x="1874009" y="3631396"/>
+            <a:ext cx="6546816" cy="477054"/>
+          </a:xfrm>
+          <a:prstGeom prst="rect">
+            <a:avLst/>
+          </a:prstGeom>
+          <a:noFill/>
+          <a:ln>
+            <a:noFill/>
+          </a:ln>
+          <a:effectLst/>
+        </p:spPr>
+        <p:txBody>
+          <a:bodyPr wrap="square" lIns="0" tIns="0" rIns="0" bIns="0" anchor="ctr">
+            <a:spAutoFit/>
+          </a:bodyPr>
+          <a:lstStyle/>
+          <a:p>
+            <a:pPr algn="ctr"/>
+            <a:r>
+              <a:rPr sz="3100" b="1">
+                <a:solidFill>
+                  <a:srgbClr val="0C2070"/>
+                </a:solidFill>
+                <a:latin typeface="Noto Sans CJK JP"/>
+              </a:rPr>
+              <a:t>AGT</a:t>
+            </a:r>
+          </a:p>
+        </p:txBody>
+      </p:sp>
+      <p:sp>
+        <p:nvSpPr>
+          <p:cNvPr id="25" name="TextBox 24"/>
+          <p:cNvSpPr txBox="1"/>
+          <p:nvPr/>
+        </p:nvSpPr>
+        <p:spPr>
+          <a:xfrm>
+            <a:off x="1626087" y="3994604"/>
+            <a:ext cx="6794738" cy="246221"/>
+          </a:xfrm>
+          <a:prstGeom prst="rect">
+            <a:avLst/>
+          </a:prstGeom>
+          <a:noFill/>
+          <a:ln>
+            <a:noFill/>
+          </a:ln>
+          <a:effectLst/>
+        </p:spPr>
+        <p:txBody>
+          <a:bodyPr wrap="square" lIns="0" tIns="0" rIns="0" bIns="0" anchor="ctr">
+            <a:spAutoFit/>
+          </a:bodyPr>
+          <a:lstStyle/>
+          <a:p>
+            <a:pPr algn="ctr"/>
+            <a:r>
+              <a:rPr sz="1600" b="1">
+                <a:solidFill>
+                  <a:srgbClr val="0C2070"/>
+                </a:solidFill>
+                <a:latin typeface="Noto Sans CJK JP"/>
+              </a:rPr>
+              <a:t>共通YAML Policyを評価</a:t>
+            </a:r>
+          </a:p>
+        </p:txBody>
+      </p:sp>
+      <p:cxnSp>
+        <p:nvCxnSpPr>
+          <p:cNvPr id="26" name="Connector 25"/>
+          <p:cNvCxnSpPr/>
+          <p:nvPr/>
+        </p:nvCxnSpPr>
+        <p:spPr>
+          <a:xfrm>
+            <a:off x="3325132" y="3082820"/>
+            <a:ext cx="0" cy="298808"/>
+          </a:xfrm>
+          <a:prstGeom prst="line">
+            <a:avLst/>
+          </a:prstGeom>
+          <a:ln w="15240">
+            <a:solidFill>
+              <a:srgbClr val="0B58CE"/>
+            </a:solidFill>
+          </a:ln>
+          <a:effectLst/>
+        </p:spPr>
+        <p:style>
+          <a:lnRef idx="2">
+            <a:schemeClr val="accent1"/>
+          </a:lnRef>
+          <a:fillRef idx="0">
+            <a:schemeClr val="accent1"/>
+          </a:fillRef>
+          <a:effectRef idx="1">
+            <a:schemeClr val="accent1"/>
+          </a:effectRef>
+          <a:fontRef idx="minor">
+            <a:schemeClr val="tx1"/>
+          </a:fontRef>
+        </p:style>
+      </p:cxnSp>
+      <p:cxnSp>
+        <p:nvCxnSpPr>
+          <p:cNvPr id="27" name="Connector 26"/>
+          <p:cNvCxnSpPr/>
+          <p:nvPr/>
+        </p:nvCxnSpPr>
+        <p:spPr>
+          <a:xfrm>
+            <a:off x="7006909" y="3082820"/>
+            <a:ext cx="0" cy="298808"/>
+          </a:xfrm>
+          <a:prstGeom prst="line">
+            <a:avLst/>
+          </a:prstGeom>
+          <a:ln w="15240">
+            <a:solidFill>
+              <a:srgbClr val="8D3EC0"/>
+            </a:solidFill>
+          </a:ln>
+          <a:effectLst/>
+        </p:spPr>
+        <p:style>
+          <a:lnRef idx="2">
+            <a:schemeClr val="accent1"/>
+          </a:lnRef>
+          <a:fillRef idx="0">
+            <a:schemeClr val="accent1"/>
+          </a:fillRef>
+          <a:effectRef idx="1">
+            <a:schemeClr val="accent1"/>
+          </a:effectRef>
+          <a:fontRef idx="minor">
+            <a:schemeClr val="tx1"/>
+          </a:fontRef>
+        </p:style>
+      </p:cxnSp>
+      <p:cxnSp>
+        <p:nvCxnSpPr>
+          <p:cNvPr id="28" name="Connector 27"/>
+          <p:cNvCxnSpPr/>
+          <p:nvPr/>
+        </p:nvCxnSpPr>
+        <p:spPr>
+          <a:xfrm>
+            <a:off x="3109980" y="4314490"/>
+            <a:ext cx="0" cy="204064"/>
+          </a:xfrm>
+          <a:prstGeom prst="line">
+            <a:avLst/>
+          </a:prstGeom>
+          <a:ln w="15240">
+            <a:solidFill>
+              <a:srgbClr val="0B58CE"/>
+            </a:solidFill>
+          </a:ln>
+          <a:effectLst/>
+        </p:spPr>
+        <p:style>
+          <a:lnRef idx="2">
+            <a:schemeClr val="accent1"/>
+          </a:lnRef>
+          <a:fillRef idx="0">
+            <a:schemeClr val="accent1"/>
+          </a:fillRef>
+          <a:effectRef idx="1">
+            <a:schemeClr val="accent1"/>
+          </a:effectRef>
+          <a:fontRef idx="minor">
+            <a:schemeClr val="tx1"/>
+          </a:fontRef>
+        </p:style>
+      </p:cxnSp>
+      <p:sp>
+        <p:nvSpPr>
+          <p:cNvPr id="29" name="Rectangle 28"/>
+          <p:cNvSpPr/>
+          <p:nvPr/>
+        </p:nvSpPr>
+        <p:spPr>
+          <a:xfrm>
+            <a:off x="1874009" y="4518554"/>
+            <a:ext cx="2727157" cy="524735"/>
+          </a:xfrm>
+          <a:prstGeom prst="rect">
+            <a:avLst/>
+          </a:prstGeom>
+          <a:solidFill>
+            <a:srgbClr val="FFFFFF"/>
+          </a:solidFill>
+          <a:ln w="13970">
+            <a:solidFill>
+              <a:srgbClr val="0B58CE"/>
+            </a:solidFill>
+          </a:ln>
+          <a:effectLst/>
+        </p:spPr>
+        <p:style>
+          <a:lnRef idx="1">
+            <a:schemeClr val="accent1"/>
+          </a:lnRef>
+          <a:fillRef idx="3">
+            <a:schemeClr val="accent1"/>
+          </a:fillRef>
+          <a:effectRef idx="2">
+            <a:schemeClr val="accent1"/>
+          </a:effectRef>
+          <a:fontRef idx="minor">
+            <a:schemeClr val="lt1"/>
+          </a:fontRef>
+        </p:style>
+        <p:txBody>
+          <a:bodyPr rtlCol="0" anchor="ctr"/>
+          <a:lstStyle/>
+          <a:p>
+            <a:pPr algn="ctr"/>
+            <a:endParaRPr/>
+          </a:p>
+        </p:txBody>
+      </p:sp>
+      <p:sp>
+        <p:nvSpPr>
+          <p:cNvPr id="30" name="TextBox 29"/>
+          <p:cNvSpPr txBox="1"/>
+          <p:nvPr/>
+        </p:nvSpPr>
+        <p:spPr>
+          <a:xfrm>
+            <a:off x="1874009" y="4584146"/>
+            <a:ext cx="2727157" cy="247791"/>
+          </a:xfrm>
+          <a:prstGeom prst="rect">
+            <a:avLst/>
+          </a:prstGeom>
+          <a:noFill/>
+          <a:ln>
+            <a:noFill/>
+          </a:ln>
+          <a:effectLst/>
+        </p:spPr>
+        <p:txBody>
+          <a:bodyPr wrap="none" lIns="0" tIns="0" rIns="0" bIns="0" anchor="ctr">
+            <a:spAutoFit/>
+          </a:bodyPr>
+          <a:lstStyle/>
+          <a:p>
+            <a:pPr algn="ctr"/>
+            <a:r>
+              <a:rPr sz="1880" b="1">
+                <a:solidFill>
+                  <a:srgbClr val="0B58CE"/>
+                </a:solidFill>
+                <a:latin typeface="Noto Sans CJK JP"/>
+              </a:rPr>
+              <a:t>Policy Decision</a:t>
+            </a:r>
+          </a:p>
+        </p:txBody>
+      </p:sp>
+      <p:sp>
+        <p:nvSpPr>
+          <p:cNvPr id="31" name="TextBox 30"/>
+          <p:cNvSpPr txBox="1"/>
+          <p:nvPr/>
+        </p:nvSpPr>
+        <p:spPr>
+          <a:xfrm>
+            <a:off x="1874009" y="4817362"/>
+            <a:ext cx="2727157" cy="174911"/>
+          </a:xfrm>
+          <a:prstGeom prst="rect">
+            <a:avLst/>
+          </a:prstGeom>
+          <a:noFill/>
+          <a:ln>
+            <a:noFill/>
+          </a:ln>
+          <a:effectLst/>
+        </p:spPr>
+        <p:txBody>
+          <a:bodyPr wrap="none" lIns="0" tIns="0" rIns="0" bIns="0" anchor="ctr">
+            <a:spAutoFit/>
+          </a:bodyPr>
+          <a:lstStyle/>
+          <a:p>
+            <a:pPr algn="ctr"/>
+            <a:r>
+              <a:rPr sz="1430" b="0">
+                <a:solidFill>
+                  <a:srgbClr val="262626"/>
+                </a:solidFill>
+                <a:latin typeface="Noto Sans CJK JP"/>
+              </a:rPr>
+              <a:t>OpenAI側へ反映</a:t>
+            </a:r>
+          </a:p>
+        </p:txBody>
+      </p:sp>
+      <p:cxnSp>
+        <p:nvCxnSpPr>
+          <p:cNvPr id="32" name="Connector 31"/>
+          <p:cNvCxnSpPr/>
+          <p:nvPr/>
+        </p:nvCxnSpPr>
+        <p:spPr>
+          <a:xfrm>
+            <a:off x="3109980" y="5043290"/>
+            <a:ext cx="0" cy="167623"/>
+          </a:xfrm>
+          <a:prstGeom prst="line">
+            <a:avLst/>
+          </a:prstGeom>
+          <a:ln w="15240">
+            <a:solidFill>
+              <a:srgbClr val="0B58CE"/>
+            </a:solidFill>
+          </a:ln>
+          <a:effectLst/>
+        </p:spPr>
+        <p:style>
+          <a:lnRef idx="2">
+            <a:schemeClr val="accent1"/>
+          </a:lnRef>
+          <a:fillRef idx="0">
+            <a:schemeClr val="accent1"/>
+          </a:fillRef>
+          <a:effectRef idx="1">
+            <a:schemeClr val="accent1"/>
+          </a:effectRef>
+          <a:fontRef idx="minor">
+            <a:schemeClr val="tx1"/>
+          </a:fontRef>
+        </p:style>
+      </p:cxnSp>
+      <p:sp>
+        <p:nvSpPr>
+          <p:cNvPr id="33" name="Rectangle 32"/>
+          <p:cNvSpPr/>
+          <p:nvPr/>
+        </p:nvSpPr>
+        <p:spPr>
+          <a:xfrm>
+            <a:off x="1874009" y="5218201"/>
+            <a:ext cx="2727157" cy="532023"/>
+          </a:xfrm>
+          <a:prstGeom prst="rect">
+            <a:avLst/>
+          </a:prstGeom>
+          <a:solidFill>
+            <a:srgbClr val="FFFFFF"/>
+          </a:solidFill>
+          <a:ln w="13970">
+            <a:solidFill>
+              <a:srgbClr val="0B58CE"/>
+            </a:solidFill>
+          </a:ln>
+          <a:effectLst/>
+        </p:spPr>
+        <p:style>
+          <a:lnRef idx="1">
+            <a:schemeClr val="accent1"/>
+          </a:lnRef>
+          <a:fillRef idx="3">
+            <a:schemeClr val="accent1"/>
+          </a:fillRef>
+          <a:effectRef idx="2">
+            <a:schemeClr val="accent1"/>
+          </a:effectRef>
+          <a:fontRef idx="minor">
+            <a:schemeClr val="lt1"/>
+          </a:fontRef>
+        </p:style>
+        <p:txBody>
+          <a:bodyPr rtlCol="0" anchor="ctr"/>
+          <a:lstStyle/>
+          <a:p>
+            <a:pPr algn="ctr"/>
+            <a:endParaRPr/>
+          </a:p>
+        </p:txBody>
+      </p:sp>
+      <p:sp>
+        <p:nvSpPr>
+          <p:cNvPr id="34" name="TextBox 33"/>
+          <p:cNvSpPr txBox="1"/>
+          <p:nvPr/>
+        </p:nvSpPr>
+        <p:spPr>
+          <a:xfrm>
+            <a:off x="1874009" y="5283793"/>
+            <a:ext cx="2727157" cy="247791"/>
+          </a:xfrm>
+          <a:prstGeom prst="rect">
+            <a:avLst/>
+          </a:prstGeom>
+          <a:noFill/>
+          <a:ln>
+            <a:noFill/>
+          </a:ln>
+          <a:effectLst/>
+        </p:spPr>
+        <p:txBody>
+          <a:bodyPr wrap="none" lIns="0" tIns="0" rIns="0" bIns="0" anchor="ctr">
+            <a:spAutoFit/>
+          </a:bodyPr>
+          <a:lstStyle/>
+          <a:p>
+            <a:pPr algn="ctr"/>
+            <a:r>
+              <a:rPr sz="1880" b="1">
+                <a:solidFill>
+                  <a:srgbClr val="0B58CE"/>
+                </a:solidFill>
+                <a:latin typeface="Noto Sans CJK JP"/>
+              </a:rPr>
+              <a:t>Tool Execution</a:t>
+            </a:r>
+          </a:p>
+        </p:txBody>
+      </p:sp>
+      <p:sp>
+        <p:nvSpPr>
+          <p:cNvPr id="35" name="TextBox 34"/>
+          <p:cNvSpPr txBox="1"/>
+          <p:nvPr/>
+        </p:nvSpPr>
+        <p:spPr>
+          <a:xfrm>
+            <a:off x="1874009" y="5517009"/>
+            <a:ext cx="2727157" cy="174911"/>
+          </a:xfrm>
+          <a:prstGeom prst="rect">
+            <a:avLst/>
+          </a:prstGeom>
+          <a:noFill/>
+          <a:ln>
+            <a:noFill/>
+          </a:ln>
+          <a:effectLst/>
+        </p:spPr>
+        <p:txBody>
+          <a:bodyPr wrap="none" lIns="0" tIns="0" rIns="0" bIns="0" anchor="ctr">
+            <a:spAutoFit/>
+          </a:bodyPr>
+          <a:lstStyle/>
+          <a:p>
+            <a:pPr algn="ctr"/>
+            <a:r>
+              <a:rPr sz="1430" b="0">
+                <a:solidFill>
+                  <a:srgbClr val="262626"/>
+                </a:solidFill>
+                <a:latin typeface="Noto Sans CJK JP"/>
+              </a:rPr>
+              <a:t>OpenAI側で実行</a:t>
+            </a:r>
+          </a:p>
+        </p:txBody>
+      </p:sp>
+      <p:cxnSp>
+        <p:nvCxnSpPr>
+          <p:cNvPr id="36" name="Connector 35"/>
+          <p:cNvCxnSpPr/>
+          <p:nvPr/>
+        </p:nvCxnSpPr>
+        <p:spPr>
+          <a:xfrm>
+            <a:off x="6885886" y="4314490"/>
+            <a:ext cx="0" cy="204064"/>
+          </a:xfrm>
+          <a:prstGeom prst="line">
+            <a:avLst/>
+          </a:prstGeom>
+          <a:ln w="15240">
+            <a:solidFill>
+              <a:srgbClr val="8D3EC0"/>
+            </a:solidFill>
+          </a:ln>
+          <a:effectLst/>
+        </p:spPr>
+        <p:style>
+          <a:lnRef idx="2">
+            <a:schemeClr val="accent1"/>
+          </a:lnRef>
+          <a:fillRef idx="0">
+            <a:schemeClr val="accent1"/>
+          </a:fillRef>
+          <a:effectRef idx="1">
+            <a:schemeClr val="accent1"/>
+          </a:effectRef>
+          <a:fontRef idx="minor">
+            <a:schemeClr val="tx1"/>
+          </a:fontRef>
+        </p:style>
+      </p:cxnSp>
+      <p:sp>
+        <p:nvSpPr>
+          <p:cNvPr id="37" name="Rectangle 36"/>
+          <p:cNvSpPr/>
+          <p:nvPr/>
+        </p:nvSpPr>
+        <p:spPr>
+          <a:xfrm>
+            <a:off x="5657207" y="4518554"/>
+            <a:ext cx="2763617" cy="524735"/>
+          </a:xfrm>
+          <a:prstGeom prst="rect">
+            <a:avLst/>
+          </a:prstGeom>
+          <a:solidFill>
+            <a:srgbClr val="FFFFFF"/>
+          </a:solidFill>
+          <a:ln w="13970">
+            <a:solidFill>
+              <a:srgbClr val="8D3EC0"/>
+            </a:solidFill>
+          </a:ln>
+          <a:effectLst/>
+        </p:spPr>
+        <p:style>
+          <a:lnRef idx="1">
+            <a:schemeClr val="accent1"/>
+          </a:lnRef>
+          <a:fillRef idx="3">
+            <a:schemeClr val="accent1"/>
+          </a:fillRef>
+          <a:effectRef idx="2">
+            <a:schemeClr val="accent1"/>
+          </a:effectRef>
+          <a:fontRef idx="minor">
+            <a:schemeClr val="lt1"/>
+          </a:fontRef>
+        </p:style>
+        <p:txBody>
+          <a:bodyPr rtlCol="0" anchor="ctr"/>
+          <a:lstStyle/>
+          <a:p>
+            <a:pPr algn="ctr"/>
+            <a:endParaRPr/>
+          </a:p>
+        </p:txBody>
+      </p:sp>
+      <p:sp>
+        <p:nvSpPr>
+          <p:cNvPr id="38" name="TextBox 37"/>
+          <p:cNvSpPr txBox="1"/>
+          <p:nvPr/>
+        </p:nvSpPr>
+        <p:spPr>
+          <a:xfrm>
+            <a:off x="5657207" y="4584146"/>
+            <a:ext cx="2763617" cy="247791"/>
+          </a:xfrm>
+          <a:prstGeom prst="rect">
+            <a:avLst/>
+          </a:prstGeom>
+          <a:noFill/>
+          <a:ln>
+            <a:noFill/>
+          </a:ln>
+          <a:effectLst/>
+        </p:spPr>
+        <p:txBody>
+          <a:bodyPr wrap="none" lIns="0" tIns="0" rIns="0" bIns="0" anchor="ctr">
+            <a:spAutoFit/>
+          </a:bodyPr>
+          <a:lstStyle/>
+          <a:p>
+            <a:pPr algn="ctr"/>
+            <a:r>
+              <a:rPr sz="1880" b="1">
+                <a:solidFill>
+                  <a:srgbClr val="8D3EC0"/>
+                </a:solidFill>
+                <a:latin typeface="Noto Sans CJK JP"/>
+              </a:rPr>
+              <a:t>Policy Decision</a:t>
+            </a:r>
+          </a:p>
+        </p:txBody>
+      </p:sp>
+      <p:sp>
+        <p:nvSpPr>
+          <p:cNvPr id="39" name="TextBox 38"/>
+          <p:cNvSpPr txBox="1"/>
+          <p:nvPr/>
+        </p:nvSpPr>
+        <p:spPr>
+          <a:xfrm>
+            <a:off x="5657207" y="4817362"/>
+            <a:ext cx="2763617" cy="174911"/>
+          </a:xfrm>
+          <a:prstGeom prst="rect">
+            <a:avLst/>
+          </a:prstGeom>
+          <a:noFill/>
+          <a:ln>
+            <a:noFill/>
+          </a:ln>
+          <a:effectLst/>
+        </p:spPr>
+        <p:txBody>
+          <a:bodyPr wrap="none" lIns="0" tIns="0" rIns="0" bIns="0" anchor="ctr">
+            <a:spAutoFit/>
+          </a:bodyPr>
+          <a:lstStyle/>
+          <a:p>
+            <a:pPr algn="ctr"/>
+            <a:r>
+              <a:rPr sz="1430" b="0">
+                <a:solidFill>
+                  <a:srgbClr val="262626"/>
+                </a:solidFill>
+                <a:latin typeface="Noto Sans CJK JP"/>
+              </a:rPr>
+              <a:t>Claude側へ反映</a:t>
+            </a:r>
+          </a:p>
+        </p:txBody>
+      </p:sp>
+      <p:cxnSp>
+        <p:nvCxnSpPr>
+          <p:cNvPr id="40" name="Connector 39"/>
+          <p:cNvCxnSpPr/>
+          <p:nvPr/>
+        </p:nvCxnSpPr>
+        <p:spPr>
+          <a:xfrm>
+            <a:off x="6885886" y="5043290"/>
+            <a:ext cx="0" cy="167623"/>
+          </a:xfrm>
+          <a:prstGeom prst="line">
+            <a:avLst/>
+          </a:prstGeom>
+          <a:ln w="15240">
+            <a:solidFill>
+              <a:srgbClr val="8D3EC0"/>
+            </a:solidFill>
+          </a:ln>
+          <a:effectLst/>
+        </p:spPr>
+        <p:style>
+          <a:lnRef idx="2">
+            <a:schemeClr val="accent1"/>
+          </a:lnRef>
+          <a:fillRef idx="0">
+            <a:schemeClr val="accent1"/>
+          </a:fillRef>
+          <a:effectRef idx="1">
+            <a:schemeClr val="accent1"/>
+          </a:effectRef>
+          <a:fontRef idx="minor">
+            <a:schemeClr val="tx1"/>
+          </a:fontRef>
+        </p:style>
+      </p:cxnSp>
+      <p:sp>
+        <p:nvSpPr>
+          <p:cNvPr id="41" name="Rectangle 40"/>
+          <p:cNvSpPr/>
+          <p:nvPr/>
+        </p:nvSpPr>
+        <p:spPr>
+          <a:xfrm>
+            <a:off x="5657207" y="5218201"/>
+            <a:ext cx="2763617" cy="532023"/>
+          </a:xfrm>
+          <a:prstGeom prst="rect">
+            <a:avLst/>
+          </a:prstGeom>
+          <a:solidFill>
+            <a:srgbClr val="FFFFFF"/>
+          </a:solidFill>
+          <a:ln w="13970">
+            <a:solidFill>
+              <a:srgbClr val="8D3EC0"/>
+            </a:solidFill>
+          </a:ln>
+          <a:effectLst/>
+        </p:spPr>
+        <p:style>
+          <a:lnRef idx="1">
+            <a:schemeClr val="accent1"/>
+          </a:lnRef>
+          <a:fillRef idx="3">
+            <a:schemeClr val="accent1"/>
+          </a:fillRef>
+          <a:effectRef idx="2">
+            <a:schemeClr val="accent1"/>
+          </a:effectRef>
+          <a:fontRef idx="minor">
+            <a:schemeClr val="lt1"/>
+          </a:fontRef>
+        </p:style>
+        <p:txBody>
+          <a:bodyPr rtlCol="0" anchor="ctr"/>
+          <a:lstStyle/>
+          <a:p>
+            <a:pPr algn="ctr"/>
+            <a:endParaRPr/>
+          </a:p>
+        </p:txBody>
+      </p:sp>
+      <p:sp>
+        <p:nvSpPr>
+          <p:cNvPr id="42" name="TextBox 41"/>
+          <p:cNvSpPr txBox="1"/>
+          <p:nvPr/>
+        </p:nvSpPr>
+        <p:spPr>
+          <a:xfrm>
+            <a:off x="5657207" y="5283793"/>
+            <a:ext cx="2763617" cy="247791"/>
+          </a:xfrm>
+          <a:prstGeom prst="rect">
+            <a:avLst/>
+          </a:prstGeom>
+          <a:noFill/>
+          <a:ln>
+            <a:noFill/>
+          </a:ln>
+          <a:effectLst/>
+        </p:spPr>
+        <p:txBody>
+          <a:bodyPr wrap="none" lIns="0" tIns="0" rIns="0" bIns="0" anchor="ctr">
+            <a:spAutoFit/>
+          </a:bodyPr>
+          <a:lstStyle/>
+          <a:p>
+            <a:pPr algn="ctr"/>
+            <a:r>
+              <a:rPr sz="1880" b="1">
+                <a:solidFill>
+                  <a:srgbClr val="8D3EC0"/>
+                </a:solidFill>
+                <a:latin typeface="Noto Sans CJK JP"/>
+              </a:rPr>
+              <a:t>Tool Execution</a:t>
+            </a:r>
+          </a:p>
+        </p:txBody>
+      </p:sp>
+      <p:sp>
+        <p:nvSpPr>
+          <p:cNvPr id="43" name="TextBox 42"/>
+          <p:cNvSpPr txBox="1"/>
+          <p:nvPr/>
+        </p:nvSpPr>
+        <p:spPr>
+          <a:xfrm>
+            <a:off x="5657207" y="5517009"/>
+            <a:ext cx="2763617" cy="174911"/>
+          </a:xfrm>
+          <a:prstGeom prst="rect">
+            <a:avLst/>
+          </a:prstGeom>
+          <a:noFill/>
+          <a:ln>
+            <a:noFill/>
+          </a:ln>
+          <a:effectLst/>
+        </p:spPr>
+        <p:txBody>
+          <a:bodyPr wrap="none" lIns="0" tIns="0" rIns="0" bIns="0" anchor="ctr">
+            <a:spAutoFit/>
+          </a:bodyPr>
+          <a:lstStyle/>
+          <a:p>
+            <a:pPr algn="ctr"/>
+            <a:r>
+              <a:rPr sz="1430" b="0">
+                <a:solidFill>
+                  <a:srgbClr val="262626"/>
+                </a:solidFill>
+                <a:latin typeface="Noto Sans CJK JP"/>
+              </a:rPr>
+              <a:t>Claude側で実行</a:t>
+            </a:r>
+          </a:p>
+        </p:txBody>
+      </p:sp>
+      <p:sp>
+        <p:nvSpPr>
+          <p:cNvPr id="44" name="Rectangle 43"/>
+          <p:cNvSpPr/>
+          <p:nvPr/>
+        </p:nvSpPr>
+        <p:spPr>
+          <a:xfrm>
+            <a:off x="1064612" y="5910561"/>
+            <a:ext cx="9960688" cy="583039"/>
+          </a:xfrm>
+          <a:prstGeom prst="rect">
+            <a:avLst/>
+          </a:prstGeom>
+          <a:solidFill>
+            <a:srgbClr val="FFFFFF"/>
+          </a:solidFill>
+          <a:ln w="1270">
+            <a:noFill/>
+          </a:ln>
+          <a:effectLst/>
+        </p:spPr>
+        <p:style>
+          <a:lnRef idx="1">
+            <a:schemeClr val="accent1"/>
+          </a:lnRef>
+          <a:fillRef idx="3">
+            <a:schemeClr val="accent1"/>
+          </a:fillRef>
+          <a:effectRef idx="2">
+            <a:schemeClr val="accent1"/>
+          </a:effectRef>
+          <a:fontRef idx="minor">
+            <a:schemeClr val="lt1"/>
+          </a:fontRef>
+        </p:style>
+        <p:txBody>
+          <a:bodyPr rtlCol="0" anchor="ctr"/>
+          <a:lstStyle/>
+          <a:p>
+            <a:pPr algn="ctr"/>
+            <a:endParaRPr/>
+          </a:p>
+        </p:txBody>
+      </p:sp>
+      <p:sp>
+        <p:nvSpPr>
+          <p:cNvPr id="45" name="Rectangle 44"/>
+          <p:cNvSpPr/>
+          <p:nvPr/>
+        </p:nvSpPr>
+        <p:spPr>
+          <a:xfrm>
+            <a:off x="1050028" y="5895985"/>
+            <a:ext cx="9960688" cy="583039"/>
+          </a:xfrm>
+          <a:prstGeom prst="rect">
+            <a:avLst/>
+          </a:prstGeom>
+          <a:solidFill>
+            <a:srgbClr val="FFFFFF"/>
+          </a:solidFill>
+          <a:ln w="19050">
+            <a:solidFill>
+              <a:srgbClr val="0C2070"/>
+            </a:solidFill>
+          </a:ln>
+          <a:effectLst/>
+        </p:spPr>
+        <p:style>
+          <a:lnRef idx="1">
+            <a:schemeClr val="accent1"/>
+          </a:lnRef>
+          <a:fillRef idx="3">
+            <a:schemeClr val="accent1"/>
+          </a:fillRef>
+          <a:effectRef idx="2">
+            <a:schemeClr val="accent1"/>
+          </a:effectRef>
+          <a:fontRef idx="minor">
+            <a:schemeClr val="lt1"/>
+          </a:fontRef>
+        </p:style>
+        <p:txBody>
+          <a:bodyPr rtlCol="0" anchor="ctr"/>
+          <a:lstStyle/>
+          <a:p>
+            <a:pPr algn="ctr"/>
+            <a:endParaRPr/>
+          </a:p>
+        </p:txBody>
+      </p:sp>
+      <p:sp>
+        <p:nvSpPr>
+          <p:cNvPr id="46" name="TextBox 45"/>
+          <p:cNvSpPr txBox="1"/>
+          <p:nvPr/>
+        </p:nvSpPr>
+        <p:spPr>
+          <a:xfrm>
+            <a:off x="1290660" y="6034456"/>
+            <a:ext cx="9406506" cy="262367"/>
+          </a:xfrm>
+          <a:prstGeom prst="rect">
+            <a:avLst/>
+          </a:prstGeom>
+          <a:noFill/>
+          <a:ln>
+            <a:noFill/>
+          </a:ln>
+          <a:effectLst/>
+        </p:spPr>
+        <p:txBody>
+          <a:bodyPr wrap="none" lIns="0" tIns="0" rIns="0" bIns="0" anchor="ctr">
+            <a:spAutoFit/>
+          </a:bodyPr>
+          <a:lstStyle/>
+          <a:p>
+            <a:pPr algn="l"/>
+            <a:r>
+              <a:rPr sz="1720" b="1">
+                <a:solidFill>
+                  <a:srgbClr val="0C2070"/>
+                </a:solidFill>
+                <a:latin typeface="Noto Sans CJK JP"/>
+              </a:rPr>
+              <a:t>まとめ： AGTは，SDKごとに異なる実行制御の上位で，共通Policyを適用するための層として利用できる．</a:t>
             </a:r>
           </a:p>
         </p:txBody>
